--- a/decks/prod-access/prod-access.pptx
+++ b/decks/prod-access/prod-access.pptx
@@ -1299,6 +1299,13 @@
 <file path=ppt/slides/slide1.xml><?xml version="1.0" encoding="utf-8"?>
 <p:sld xmlns:a="http://schemas.openxmlformats.org/drawingml/2006/main" xmlns:r="http://schemas.openxmlformats.org/officeDocument/2006/relationships" xmlns:p="http://schemas.openxmlformats.org/presentationml/2006/main">
   <p:cSld name="Slide 1">
+    <p:bg>
+      <p:bgPr>
+        <a:solidFill>
+          <a:srgbClr val="0A1A33"/>
+        </a:solidFill>
+      </p:bgPr>
+    </p:bg>
     <p:spTree>
       <p:nvGrpSpPr>
         <p:cNvPr id="1" name=""/>
@@ -1313,30 +1320,519 @@
           <a:chExt cx="0" cy="0"/>
         </a:xfrm>
       </p:grpSpPr>
-      <p:pic>
-        <p:nvPicPr>
-          <p:cNvPr id="2" name="Image 0" descr="/tmp/slide-1787840540324-x7djpqlunk.png">    </p:cNvPr>
-          <p:cNvPicPr>
-            <a:picLocks noChangeAspect="1"/>
-          </p:cNvPicPr>
-          <p:nvPr/>
-        </p:nvPicPr>
-        <p:blipFill>
-          <a:blip r:embed="rId1"/>
-          <a:stretch>
-            <a:fillRect/>
-          </a:stretch>
-        </p:blipFill>
-        <p:spPr>
-          <a:xfrm>
-            <a:off x="0" y="0"/>
-            <a:ext cx="12188952" cy="6858000"/>
-          </a:xfrm>
-          <a:prstGeom prst="rect">
-            <a:avLst/>
-          </a:prstGeom>
-        </p:spPr>
-      </p:pic>
+      <p:sp>
+        <p:nvSpPr>
+          <p:cNvPr id="2" name="Text 0"/>
+          <p:cNvSpPr/>
+          <p:nvPr/>
+        </p:nvSpPr>
+        <p:spPr>
+          <a:xfrm>
+            <a:off x="677098" y="541734"/>
+            <a:ext cx="3650294" cy="260747"/>
+          </a:xfrm>
+          <a:prstGeom prst="rect">
+            <a:avLst/>
+          </a:prstGeom>
+          <a:noFill/>
+          <a:ln/>
+        </p:spPr>
+        <p:txBody>
+          <a:bodyPr wrap="square" lIns="0" tIns="0" rIns="0" bIns="0" rtlCol="0" anchor="t"/>
+          <a:lstStyle/>
+          <a:p>
+            <a:pPr algn="l" indent="0" marL="0">
+              <a:lnSpc>
+                <a:spcPts val="2053"/>
+              </a:lnSpc>
+              <a:buNone/>
+            </a:pPr>
+            <a:r>
+              <a:rPr lang="en-US" sz="1466" dirty="0">
+                <a:solidFill>
+                  <a:srgbClr val="9AA6BC"/>
+                </a:solidFill>
+                <a:latin typeface="Inter" pitchFamily="34" charset="0"/>
+                <a:ea typeface="Inter" pitchFamily="34" charset="-122"/>
+                <a:cs typeface="Inter" pitchFamily="34" charset="-120"/>
+              </a:rPr>
+              <a:t>ACCESS GOVERNANCE · INTERNAL</a:t>
+            </a:r>
+            <a:endParaRPr lang="en-US" sz="1466" dirty="0"/>
+          </a:p>
+        </p:txBody>
+      </p:sp>
+      <p:sp>
+        <p:nvSpPr>
+          <p:cNvPr id="3" name="Text 1"/>
+          <p:cNvSpPr/>
+          <p:nvPr/>
+        </p:nvSpPr>
+        <p:spPr>
+          <a:xfrm>
+            <a:off x="9853530" y="541734"/>
+            <a:ext cx="1691491" cy="260747"/>
+          </a:xfrm>
+          <a:prstGeom prst="rect">
+            <a:avLst/>
+          </a:prstGeom>
+          <a:noFill/>
+          <a:ln/>
+        </p:spPr>
+        <p:txBody>
+          <a:bodyPr wrap="square" lIns="0" tIns="0" rIns="0" bIns="0" rtlCol="0" anchor="t"/>
+          <a:lstStyle/>
+          <a:p>
+            <a:pPr algn="l" indent="0" marL="0">
+              <a:lnSpc>
+                <a:spcPts val="2053"/>
+              </a:lnSpc>
+              <a:buNone/>
+            </a:pPr>
+            <a:r>
+              <a:rPr lang="en-US" sz="1466" b="1" dirty="0">
+                <a:solidFill>
+                  <a:srgbClr val="C8A24B"/>
+                </a:solidFill>
+                <a:latin typeface="Inter" pitchFamily="34" charset="0"/>
+                <a:ea typeface="Inter" pitchFamily="34" charset="-122"/>
+                <a:cs typeface="Inter" pitchFamily="34" charset="-120"/>
+              </a:rPr>
+              <a:t>COVER · 01 / 06</a:t>
+            </a:r>
+            <a:endParaRPr lang="en-US" sz="1466" dirty="0"/>
+          </a:p>
+        </p:txBody>
+      </p:sp>
+      <p:sp>
+        <p:nvSpPr>
+          <p:cNvPr id="4" name="Text 2"/>
+          <p:cNvSpPr/>
+          <p:nvPr/>
+        </p:nvSpPr>
+        <p:spPr>
+          <a:xfrm>
+            <a:off x="677098" y="1039416"/>
+            <a:ext cx="11051451" cy="1051322"/>
+          </a:xfrm>
+          <a:prstGeom prst="rect">
+            <a:avLst/>
+          </a:prstGeom>
+          <a:noFill/>
+          <a:ln/>
+        </p:spPr>
+        <p:txBody>
+          <a:bodyPr wrap="square" lIns="0" tIns="0" rIns="0" bIns="0" rtlCol="0" anchor="t"/>
+          <a:lstStyle/>
+          <a:p>
+            <a:pPr algn="l" indent="0" marL="0">
+              <a:lnSpc>
+                <a:spcPts val="8279"/>
+              </a:lnSpc>
+              <a:buNone/>
+            </a:pPr>
+            <a:r>
+              <a:rPr lang="en-US" sz="6133" b="1" dirty="0">
+                <a:solidFill>
+                  <a:srgbClr val="E8E5DE"/>
+                </a:solidFill>
+                <a:latin typeface="Source Serif 4" pitchFamily="34" charset="0"/>
+                <a:ea typeface="Source Serif 4" pitchFamily="34" charset="-122"/>
+                <a:cs typeface="Source Serif 4" pitchFamily="34" charset="-120"/>
+              </a:rPr>
+              <a:t>Who gets into production</a:t>
+            </a:r>
+            <a:endParaRPr lang="en-US" sz="6133" dirty="0"/>
+          </a:p>
+        </p:txBody>
+      </p:sp>
+      <p:sp>
+        <p:nvSpPr>
+          <p:cNvPr id="5" name="Text 3"/>
+          <p:cNvSpPr/>
+          <p:nvPr/>
+        </p:nvSpPr>
+        <p:spPr>
+          <a:xfrm>
+            <a:off x="677098" y="2124472"/>
+            <a:ext cx="11051451" cy="1051322"/>
+          </a:xfrm>
+          <a:prstGeom prst="rect">
+            <a:avLst/>
+          </a:prstGeom>
+          <a:noFill/>
+          <a:ln/>
+        </p:spPr>
+        <p:txBody>
+          <a:bodyPr wrap="square" lIns="0" tIns="0" rIns="0" bIns="0" rtlCol="0" anchor="t"/>
+          <a:lstStyle/>
+          <a:p>
+            <a:pPr algn="l" indent="0" marL="0">
+              <a:lnSpc>
+                <a:spcPts val="8279"/>
+              </a:lnSpc>
+              <a:spcBef>
+                <a:spcPts val="267"/>
+              </a:spcBef>
+              <a:buNone/>
+            </a:pPr>
+            <a:r>
+              <a:rPr lang="en-US" sz="6133" b="1" dirty="0">
+                <a:solidFill>
+                  <a:srgbClr val="C8A24B"/>
+                </a:solidFill>
+                <a:latin typeface="Source Serif 4" pitchFamily="34" charset="0"/>
+                <a:ea typeface="Source Serif 4" pitchFamily="34" charset="-122"/>
+                <a:cs typeface="Source Serif 4" pitchFamily="34" charset="-120"/>
+              </a:rPr>
+              <a:t>Standing access is the risk</a:t>
+            </a:r>
+            <a:endParaRPr lang="en-US" sz="6133" dirty="0"/>
+          </a:p>
+        </p:txBody>
+      </p:sp>
+      <p:sp>
+        <p:nvSpPr>
+          <p:cNvPr id="6" name="Text 4"/>
+          <p:cNvSpPr/>
+          <p:nvPr/>
+        </p:nvSpPr>
+        <p:spPr>
+          <a:xfrm>
+            <a:off x="677098" y="3582194"/>
+            <a:ext cx="10834756" cy="8334"/>
+          </a:xfrm>
+          <a:prstGeom prst="rect">
+            <a:avLst/>
+          </a:prstGeom>
+          <a:solidFill>
+            <a:srgbClr val="C8A24B"/>
+          </a:solidFill>
+          <a:ln/>
+        </p:spPr>
+        <p:txBody>
+          <a:bodyPr wrap="square" rtlCol="0" anchor="ctr"/>
+          <a:lstStyle/>
+          <a:p>
+            <a:pPr indent="0" marL="0">
+              <a:buNone/>
+            </a:pPr>
+            <a:endParaRPr lang="en-US" dirty="0"/>
+          </a:p>
+        </p:txBody>
+      </p:sp>
+      <p:sp>
+        <p:nvSpPr>
+          <p:cNvPr id="7" name="Text 5"/>
+          <p:cNvSpPr/>
+          <p:nvPr/>
+        </p:nvSpPr>
+        <p:spPr>
+          <a:xfrm>
+            <a:off x="677098" y="3962995"/>
+            <a:ext cx="6354372" cy="1421805"/>
+          </a:xfrm>
+          <a:prstGeom prst="rect">
+            <a:avLst/>
+          </a:prstGeom>
+          <a:noFill/>
+          <a:ln/>
+        </p:spPr>
+        <p:txBody>
+          <a:bodyPr wrap="square" lIns="0" tIns="203175" rIns="0" bIns="0" rtlCol="0" anchor="t"/>
+          <a:lstStyle/>
+          <a:p>
+            <a:pPr algn="l" indent="0" marL="0">
+              <a:lnSpc>
+                <a:spcPts val="3200"/>
+              </a:lnSpc>
+              <a:buNone/>
+            </a:pPr>
+            <a:r>
+              <a:rPr lang="en-US" sz="2133" dirty="0">
+                <a:solidFill>
+                  <a:srgbClr val="E8E5DE"/>
+                </a:solidFill>
+                <a:latin typeface="Inter" pitchFamily="34" charset="0"/>
+                <a:ea typeface="Inter" pitchFamily="34" charset="-122"/>
+                <a:cs typeface="Inter" pitchFamily="34" charset="-120"/>
+              </a:rPr>
+              <a:t>Nobody decides to hold production credentials forever. They are granted</a:t>
+            </a:r>
+            <a:endParaRPr lang="en-US" sz="2133" dirty="0"/>
+          </a:p>
+          <a:p>
+            <a:pPr algn="l" indent="0" marL="0">
+              <a:lnSpc>
+                <a:spcPts val="3200"/>
+              </a:lnSpc>
+              <a:buNone/>
+            </a:pPr>
+            <a:r>
+              <a:rPr lang="en-US" sz="2133" dirty="0">
+                <a:solidFill>
+                  <a:srgbClr val="E8E5DE"/>
+                </a:solidFill>
+                <a:latin typeface="Inter" pitchFamily="34" charset="0"/>
+                <a:ea typeface="Inter" pitchFamily="34" charset="-122"/>
+                <a:cs typeface="Inter" pitchFamily="34" charset="-120"/>
+              </a:rPr>
+              <a:t>      once, for a reason that ends — and the grant does not.</a:t>
+            </a:r>
+            <a:endParaRPr lang="en-US" sz="2133" dirty="0"/>
+          </a:p>
+        </p:txBody>
+      </p:sp>
+      <p:sp>
+        <p:nvSpPr>
+          <p:cNvPr id="8" name="Text 6"/>
+          <p:cNvSpPr/>
+          <p:nvPr/>
+        </p:nvSpPr>
+        <p:spPr>
+          <a:xfrm>
+            <a:off x="7313173" y="3962995"/>
+            <a:ext cx="4198285" cy="1552575"/>
+          </a:xfrm>
+          <a:prstGeom prst="rect">
+            <a:avLst/>
+          </a:prstGeom>
+          <a:solidFill>
+            <a:srgbClr val="1F3A5F"/>
+          </a:solidFill>
+          <a:ln w="12698">
+            <a:solidFill>
+              <a:srgbClr val="C8A24B"/>
+            </a:solidFill>
+          </a:ln>
+        </p:spPr>
+        <p:txBody>
+          <a:bodyPr wrap="square" rtlCol="0" anchor="ctr"/>
+          <a:lstStyle/>
+          <a:p>
+            <a:pPr indent="0" marL="0">
+              <a:buNone/>
+            </a:pPr>
+            <a:endParaRPr lang="en-US" dirty="0"/>
+          </a:p>
+        </p:txBody>
+      </p:sp>
+      <p:sp>
+        <p:nvSpPr>
+          <p:cNvPr id="9" name="Text 7"/>
+          <p:cNvSpPr/>
+          <p:nvPr/>
+        </p:nvSpPr>
+        <p:spPr>
+          <a:xfrm>
+            <a:off x="7529019" y="4178895"/>
+            <a:ext cx="3841924" cy="260747"/>
+          </a:xfrm>
+          <a:prstGeom prst="rect">
+            <a:avLst/>
+          </a:prstGeom>
+          <a:noFill/>
+          <a:ln/>
+        </p:spPr>
+        <p:txBody>
+          <a:bodyPr wrap="square" lIns="0" tIns="0" rIns="0" bIns="0" rtlCol="0" anchor="t"/>
+          <a:lstStyle/>
+          <a:p>
+            <a:pPr algn="l" indent="0" marL="0">
+              <a:lnSpc>
+                <a:spcPts val="2053"/>
+              </a:lnSpc>
+              <a:buNone/>
+            </a:pPr>
+            <a:r>
+              <a:rPr lang="en-US" sz="1466" b="1" dirty="0">
+                <a:solidFill>
+                  <a:srgbClr val="C8A24B"/>
+                </a:solidFill>
+                <a:latin typeface="Inter" pitchFamily="34" charset="0"/>
+                <a:ea typeface="Inter" pitchFamily="34" charset="-122"/>
+                <a:cs typeface="Inter" pitchFamily="34" charset="-120"/>
+              </a:rPr>
+              <a:t>WHAT REPLACES IT</a:t>
+            </a:r>
+            <a:endParaRPr lang="en-US" sz="1466" dirty="0"/>
+          </a:p>
+        </p:txBody>
+      </p:sp>
+      <p:sp>
+        <p:nvSpPr>
+          <p:cNvPr id="10" name="Text 8"/>
+          <p:cNvSpPr/>
+          <p:nvPr/>
+        </p:nvSpPr>
+        <p:spPr>
+          <a:xfrm>
+            <a:off x="7529019" y="4541242"/>
+            <a:ext cx="3841924" cy="758428"/>
+          </a:xfrm>
+          <a:prstGeom prst="rect">
+            <a:avLst/>
+          </a:prstGeom>
+          <a:noFill/>
+          <a:ln/>
+        </p:spPr>
+        <p:txBody>
+          <a:bodyPr wrap="square" lIns="0" tIns="0" rIns="0" bIns="0" rtlCol="0" anchor="t"/>
+          <a:lstStyle/>
+          <a:p>
+            <a:pPr algn="l" indent="0" marL="0">
+              <a:lnSpc>
+                <a:spcPts val="2986"/>
+              </a:lnSpc>
+              <a:spcBef>
+                <a:spcPts val="800"/>
+              </a:spcBef>
+              <a:buNone/>
+            </a:pPr>
+            <a:r>
+              <a:rPr lang="en-US" sz="2133" b="1" dirty="0">
+                <a:solidFill>
+                  <a:srgbClr val="E8E5DE"/>
+                </a:solidFill>
+                <a:latin typeface="Source Serif 4" pitchFamily="34" charset="0"/>
+                <a:ea typeface="Source Serif 4" pitchFamily="34" charset="-122"/>
+                <a:cs typeface="Source Serif 4" pitchFamily="34" charset="-120"/>
+              </a:rPr>
+              <a:t>Break-glass, with an expiry and a written record.</a:t>
+            </a:r>
+            <a:endParaRPr lang="en-US" sz="2133" dirty="0"/>
+          </a:p>
+        </p:txBody>
+      </p:sp>
+      <p:sp>
+        <p:nvSpPr>
+          <p:cNvPr id="11" name="Text 9"/>
+          <p:cNvSpPr/>
+          <p:nvPr/>
+        </p:nvSpPr>
+        <p:spPr>
+          <a:xfrm>
+            <a:off x="677098" y="5615384"/>
+            <a:ext cx="11051451" cy="260747"/>
+          </a:xfrm>
+          <a:prstGeom prst="rect">
+            <a:avLst/>
+          </a:prstGeom>
+          <a:noFill/>
+          <a:ln/>
+        </p:spPr>
+        <p:txBody>
+          <a:bodyPr wrap="square" lIns="0" tIns="0" rIns="0" bIns="0" rtlCol="0" anchor="t"/>
+          <a:lstStyle/>
+          <a:p>
+            <a:pPr algn="l" indent="0" marL="0">
+              <a:lnSpc>
+                <a:spcPts val="2053"/>
+              </a:lnSpc>
+              <a:spcBef>
+                <a:spcPts val="786"/>
+              </a:spcBef>
+              <a:buNone/>
+            </a:pPr>
+            <a:r>
+              <a:rPr lang="en-US" sz="1466" dirty="0">
+                <a:solidFill>
+                  <a:srgbClr val="9AA6BC"/>
+                </a:solidFill>
+                <a:latin typeface="Inter" pitchFamily="34" charset="0"/>
+                <a:ea typeface="Inter" pitchFamily="34" charset="-122"/>
+                <a:cs typeface="Inter" pitchFamily="34" charset="-120"/>
+              </a:rPr>
+              <a:t>PRESENTER · TEAM</a:t>
+            </a:r>
+            <a:endParaRPr lang="en-US" sz="1466" dirty="0"/>
+          </a:p>
+        </p:txBody>
+      </p:sp>
+      <p:sp>
+        <p:nvSpPr>
+          <p:cNvPr id="12" name="Text 10"/>
+          <p:cNvSpPr/>
+          <p:nvPr/>
+        </p:nvSpPr>
+        <p:spPr>
+          <a:xfrm>
+            <a:off x="677098" y="6079331"/>
+            <a:ext cx="5763089" cy="236934"/>
+          </a:xfrm>
+          <a:prstGeom prst="rect">
+            <a:avLst/>
+          </a:prstGeom>
+          <a:noFill/>
+          <a:ln/>
+        </p:spPr>
+        <p:txBody>
+          <a:bodyPr wrap="square" lIns="0" tIns="0" rIns="0" bIns="0" rtlCol="0" anchor="t"/>
+          <a:lstStyle/>
+          <a:p>
+            <a:pPr algn="l" indent="0" marL="0">
+              <a:lnSpc>
+                <a:spcPts val="1866"/>
+              </a:lnSpc>
+              <a:buNone/>
+            </a:pPr>
+            <a:r>
+              <a:rPr lang="en-US" sz="1333" dirty="0">
+                <a:solidFill>
+                  <a:srgbClr val="9AA6BC"/>
+                </a:solidFill>
+                <a:latin typeface="Inter" pitchFamily="34" charset="0"/>
+                <a:ea typeface="Inter" pitchFamily="34" charset="-122"/>
+                <a:cs typeface="Inter" pitchFamily="34" charset="-120"/>
+              </a:rPr>
+              <a:t>SOURCE — none. No figures in this deck; the argument is mechanical.</a:t>
+            </a:r>
+            <a:endParaRPr lang="en-US" sz="1333" dirty="0"/>
+          </a:p>
+        </p:txBody>
+      </p:sp>
+      <p:sp>
+        <p:nvSpPr>
+          <p:cNvPr id="13" name="Text 11"/>
+          <p:cNvSpPr/>
+          <p:nvPr/>
+        </p:nvSpPr>
+        <p:spPr>
+          <a:xfrm>
+            <a:off x="7829775" y="6079331"/>
+            <a:ext cx="3755721" cy="236934"/>
+          </a:xfrm>
+          <a:prstGeom prst="rect">
+            <a:avLst/>
+          </a:prstGeom>
+          <a:noFill/>
+          <a:ln/>
+        </p:spPr>
+        <p:txBody>
+          <a:bodyPr wrap="square" lIns="0" tIns="0" rIns="0" bIns="0" rtlCol="0" anchor="t"/>
+          <a:lstStyle/>
+          <a:p>
+            <a:pPr algn="l" indent="0" marL="0">
+              <a:lnSpc>
+                <a:spcPts val="1866"/>
+              </a:lnSpc>
+              <a:buNone/>
+            </a:pPr>
+            <a:r>
+              <a:rPr lang="en-US" sz="1333" dirty="0">
+                <a:solidFill>
+                  <a:srgbClr val="9AA6BC"/>
+                </a:solidFill>
+                <a:latin typeface="Inter" pitchFamily="34" charset="0"/>
+                <a:ea typeface="Inter" pitchFamily="34" charset="-122"/>
+                <a:cs typeface="Inter" pitchFamily="34" charset="-120"/>
+              </a:rPr>
+              <a:t>INTERNAL DISCUSSION DRAFT · 01 / 06</a:t>
+            </a:r>
+            <a:endParaRPr lang="en-US" sz="1333" dirty="0"/>
+          </a:p>
+        </p:txBody>
+      </p:sp>
     </p:spTree>
   </p:cSld>
   <p:clrMapOvr>
@@ -1348,6 +1844,13 @@
 <file path=ppt/slides/slide2.xml><?xml version="1.0" encoding="utf-8"?>
 <p:sld xmlns:a="http://schemas.openxmlformats.org/drawingml/2006/main" xmlns:r="http://schemas.openxmlformats.org/officeDocument/2006/relationships" xmlns:p="http://schemas.openxmlformats.org/presentationml/2006/main">
   <p:cSld name="Slide 2">
+    <p:bg>
+      <p:bgPr>
+        <a:solidFill>
+          <a:srgbClr val="0A1A33"/>
+        </a:solidFill>
+      </p:bgPr>
+    </p:bg>
     <p:spTree>
       <p:nvGrpSpPr>
         <p:cNvPr id="1" name=""/>
@@ -1362,30 +1865,1045 @@
           <a:chExt cx="0" cy="0"/>
         </a:xfrm>
       </p:grpSpPr>
-      <p:pic>
-        <p:nvPicPr>
-          <p:cNvPr id="2" name="Image 0" descr="/tmp/slide-1787840540601-nkc1fqfev6k.png">    </p:cNvPr>
-          <p:cNvPicPr>
-            <a:picLocks noChangeAspect="1"/>
-          </p:cNvPicPr>
-          <p:nvPr/>
-        </p:nvPicPr>
-        <p:blipFill>
-          <a:blip r:embed="rId1"/>
-          <a:stretch>
-            <a:fillRect/>
-          </a:stretch>
-        </p:blipFill>
-        <p:spPr>
-          <a:xfrm>
-            <a:off x="0" y="0"/>
-            <a:ext cx="12188952" cy="6858000"/>
-          </a:xfrm>
-          <a:prstGeom prst="rect">
-            <a:avLst/>
-          </a:prstGeom>
-        </p:spPr>
-      </p:pic>
+      <p:sp>
+        <p:nvSpPr>
+          <p:cNvPr id="2" name="Text 0"/>
+          <p:cNvSpPr/>
+          <p:nvPr/>
+        </p:nvSpPr>
+        <p:spPr>
+          <a:xfrm>
+            <a:off x="677098" y="541734"/>
+            <a:ext cx="3650294" cy="260747"/>
+          </a:xfrm>
+          <a:prstGeom prst="rect">
+            <a:avLst/>
+          </a:prstGeom>
+          <a:noFill/>
+          <a:ln/>
+        </p:spPr>
+        <p:txBody>
+          <a:bodyPr wrap="square" lIns="0" tIns="0" rIns="0" bIns="0" rtlCol="0" anchor="t"/>
+          <a:lstStyle/>
+          <a:p>
+            <a:pPr algn="l" indent="0" marL="0">
+              <a:lnSpc>
+                <a:spcPts val="2053"/>
+              </a:lnSpc>
+              <a:buNone/>
+            </a:pPr>
+            <a:r>
+              <a:rPr lang="en-US" sz="1466" dirty="0">
+                <a:solidFill>
+                  <a:srgbClr val="9AA6BC"/>
+                </a:solidFill>
+                <a:latin typeface="Inter" pitchFamily="34" charset="0"/>
+                <a:ea typeface="Inter" pitchFamily="34" charset="-122"/>
+                <a:cs typeface="Inter" pitchFamily="34" charset="-120"/>
+              </a:rPr>
+              <a:t>ACCESS GOVERNANCE · INTERNAL</a:t>
+            </a:r>
+            <a:endParaRPr lang="en-US" sz="1466" dirty="0"/>
+          </a:p>
+        </p:txBody>
+      </p:sp>
+      <p:sp>
+        <p:nvSpPr>
+          <p:cNvPr id="3" name="Text 1"/>
+          <p:cNvSpPr/>
+          <p:nvPr/>
+        </p:nvSpPr>
+        <p:spPr>
+          <a:xfrm>
+            <a:off x="9042718" y="541734"/>
+            <a:ext cx="2518518" cy="260747"/>
+          </a:xfrm>
+          <a:prstGeom prst="rect">
+            <a:avLst/>
+          </a:prstGeom>
+          <a:noFill/>
+          <a:ln/>
+        </p:spPr>
+        <p:txBody>
+          <a:bodyPr wrap="square" lIns="0" tIns="0" rIns="0" bIns="0" rtlCol="0" anchor="t"/>
+          <a:lstStyle/>
+          <a:p>
+            <a:pPr algn="l" indent="0" marL="0">
+              <a:lnSpc>
+                <a:spcPts val="2053"/>
+              </a:lnSpc>
+              <a:buNone/>
+            </a:pPr>
+            <a:r>
+              <a:rPr lang="en-US" sz="1466" b="1" dirty="0">
+                <a:solidFill>
+                  <a:srgbClr val="C8A24B"/>
+                </a:solidFill>
+                <a:latin typeface="Inter" pitchFamily="34" charset="0"/>
+                <a:ea typeface="Inter" pitchFamily="34" charset="-122"/>
+                <a:cs typeface="Inter" pitchFamily="34" charset="-120"/>
+              </a:rPr>
+              <a:t>SECTION 01 · ACCRUAL</a:t>
+            </a:r>
+            <a:endParaRPr lang="en-US" sz="1466" dirty="0"/>
+          </a:p>
+        </p:txBody>
+      </p:sp>
+      <p:sp>
+        <p:nvSpPr>
+          <p:cNvPr id="4" name="Text 2"/>
+          <p:cNvSpPr/>
+          <p:nvPr/>
+        </p:nvSpPr>
+        <p:spPr>
+          <a:xfrm>
+            <a:off x="677098" y="904081"/>
+            <a:ext cx="11051451" cy="528241"/>
+          </a:xfrm>
+          <a:prstGeom prst="rect">
+            <a:avLst/>
+          </a:prstGeom>
+          <a:noFill/>
+          <a:ln/>
+        </p:spPr>
+        <p:txBody>
+          <a:bodyPr wrap="square" lIns="0" tIns="0" rIns="0" bIns="0" rtlCol="0" anchor="t"/>
+          <a:lstStyle/>
+          <a:p>
+            <a:pPr algn="l" indent="0" marL="0">
+              <a:lnSpc>
+                <a:spcPts val="4159"/>
+              </a:lnSpc>
+              <a:spcBef>
+                <a:spcPts val="800"/>
+              </a:spcBef>
+              <a:buNone/>
+            </a:pPr>
+            <a:r>
+              <a:rPr lang="en-US" sz="3200" b="1" dirty="0">
+                <a:solidFill>
+                  <a:srgbClr val="E8E5DE"/>
+                </a:solidFill>
+                <a:latin typeface="Source Serif 4" pitchFamily="34" charset="0"/>
+                <a:ea typeface="Source Serif 4" pitchFamily="34" charset="-122"/>
+                <a:cs typeface="Source Serif 4" pitchFamily="34" charset="-120"/>
+              </a:rPr>
+              <a:t>Why permanent access accumulates</a:t>
+            </a:r>
+            <a:endParaRPr lang="en-US" sz="3200" dirty="0"/>
+          </a:p>
+        </p:txBody>
+      </p:sp>
+      <p:sp>
+        <p:nvSpPr>
+          <p:cNvPr id="5" name="Text 3"/>
+          <p:cNvSpPr/>
+          <p:nvPr/>
+        </p:nvSpPr>
+        <p:spPr>
+          <a:xfrm>
+            <a:off x="677098" y="1601589"/>
+            <a:ext cx="10834756" cy="8334"/>
+          </a:xfrm>
+          <a:prstGeom prst="rect">
+            <a:avLst/>
+          </a:prstGeom>
+          <a:solidFill>
+            <a:srgbClr val="C8A24B"/>
+          </a:solidFill>
+          <a:ln/>
+        </p:spPr>
+        <p:txBody>
+          <a:bodyPr wrap="square" rtlCol="0" anchor="ctr"/>
+          <a:lstStyle/>
+          <a:p>
+            <a:pPr indent="0" marL="0">
+              <a:buNone/>
+            </a:pPr>
+            <a:endParaRPr lang="en-US" dirty="0"/>
+          </a:p>
+        </p:txBody>
+      </p:sp>
+      <p:sp>
+        <p:nvSpPr>
+          <p:cNvPr id="6" name="Shape 4"/>
+          <p:cNvSpPr/>
+          <p:nvPr/>
+        </p:nvSpPr>
+        <p:spPr>
+          <a:xfrm>
+            <a:off x="677098" y="2232422"/>
+            <a:ext cx="10834756" cy="0"/>
+          </a:xfrm>
+          <a:prstGeom prst="line">
+            <a:avLst/>
+          </a:prstGeom>
+          <a:noFill/>
+          <a:ln w="12698">
+            <a:solidFill>
+              <a:srgbClr val="C8A24B"/>
+            </a:solidFill>
+            <a:prstDash val="solid"/>
+          </a:ln>
+        </p:spPr>
+      </p:sp>
+      <p:sp>
+        <p:nvSpPr>
+          <p:cNvPr id="7" name="Text 5"/>
+          <p:cNvSpPr/>
+          <p:nvPr/>
+        </p:nvSpPr>
+        <p:spPr>
+          <a:xfrm>
+            <a:off x="677098" y="1846858"/>
+            <a:ext cx="483428" cy="260747"/>
+          </a:xfrm>
+          <a:prstGeom prst="rect">
+            <a:avLst/>
+          </a:prstGeom>
+          <a:noFill/>
+          <a:ln/>
+        </p:spPr>
+        <p:txBody>
+          <a:bodyPr wrap="square" lIns="0" tIns="0" rIns="0" bIns="0" rtlCol="0" anchor="t"/>
+          <a:lstStyle/>
+          <a:p>
+            <a:pPr algn="l" indent="0" marL="0">
+              <a:lnSpc>
+                <a:spcPts val="2053"/>
+              </a:lnSpc>
+              <a:buNone/>
+            </a:pPr>
+            <a:r>
+              <a:rPr lang="en-US" sz="1466" b="1" dirty="0">
+                <a:solidFill>
+                  <a:srgbClr val="C8A24B"/>
+                </a:solidFill>
+                <a:latin typeface="Inter" pitchFamily="34" charset="0"/>
+                <a:ea typeface="Inter" pitchFamily="34" charset="-122"/>
+                <a:cs typeface="Inter" pitchFamily="34" charset="-120"/>
+              </a:rPr>
+              <a:t>#</a:t>
+            </a:r>
+            <a:endParaRPr lang="en-US" sz="1466" dirty="0"/>
+          </a:p>
+        </p:txBody>
+      </p:sp>
+      <p:sp>
+        <p:nvSpPr>
+          <p:cNvPr id="8" name="Text 6"/>
+          <p:cNvSpPr/>
+          <p:nvPr/>
+        </p:nvSpPr>
+        <p:spPr>
+          <a:xfrm>
+            <a:off x="1354196" y="1846858"/>
+            <a:ext cx="2417341" cy="260747"/>
+          </a:xfrm>
+          <a:prstGeom prst="rect">
+            <a:avLst/>
+          </a:prstGeom>
+          <a:noFill/>
+          <a:ln/>
+        </p:spPr>
+        <p:txBody>
+          <a:bodyPr wrap="square" lIns="0" tIns="0" rIns="0" bIns="0" rtlCol="0" anchor="t"/>
+          <a:lstStyle/>
+          <a:p>
+            <a:pPr algn="l" indent="0" marL="0">
+              <a:lnSpc>
+                <a:spcPts val="2053"/>
+              </a:lnSpc>
+              <a:buNone/>
+            </a:pPr>
+            <a:r>
+              <a:rPr lang="en-US" sz="1466" b="1" dirty="0">
+                <a:solidFill>
+                  <a:srgbClr val="C8A24B"/>
+                </a:solidFill>
+                <a:latin typeface="Inter" pitchFamily="34" charset="0"/>
+                <a:ea typeface="Inter" pitchFamily="34" charset="-122"/>
+                <a:cs typeface="Inter" pitchFamily="34" charset="-120"/>
+              </a:rPr>
+              <a:t>THE GRANT</a:t>
+            </a:r>
+            <a:endParaRPr lang="en-US" sz="1466" dirty="0"/>
+          </a:p>
+        </p:txBody>
+      </p:sp>
+      <p:sp>
+        <p:nvSpPr>
+          <p:cNvPr id="9" name="Text 7"/>
+          <p:cNvSpPr/>
+          <p:nvPr/>
+        </p:nvSpPr>
+        <p:spPr>
+          <a:xfrm>
+            <a:off x="3927287" y="1846858"/>
+            <a:ext cx="7736259" cy="260747"/>
+          </a:xfrm>
+          <a:prstGeom prst="rect">
+            <a:avLst/>
+          </a:prstGeom>
+          <a:noFill/>
+          <a:ln/>
+        </p:spPr>
+        <p:txBody>
+          <a:bodyPr wrap="square" lIns="0" tIns="0" rIns="0" bIns="0" rtlCol="0" anchor="t"/>
+          <a:lstStyle/>
+          <a:p>
+            <a:pPr algn="l" indent="0" marL="0">
+              <a:lnSpc>
+                <a:spcPts val="2053"/>
+              </a:lnSpc>
+              <a:buNone/>
+            </a:pPr>
+            <a:r>
+              <a:rPr lang="en-US" sz="1466" b="1" dirty="0">
+                <a:solidFill>
+                  <a:srgbClr val="C8A24B"/>
+                </a:solidFill>
+                <a:latin typeface="Inter" pitchFamily="34" charset="0"/>
+                <a:ea typeface="Inter" pitchFamily="34" charset="-122"/>
+                <a:cs typeface="Inter" pitchFamily="34" charset="-120"/>
+              </a:rPr>
+              <a:t>WHAT MAKES IT PERMANENT</a:t>
+            </a:r>
+            <a:endParaRPr lang="en-US" sz="1466" dirty="0"/>
+          </a:p>
+        </p:txBody>
+      </p:sp>
+      <p:sp>
+        <p:nvSpPr>
+          <p:cNvPr id="10" name="Shape 8"/>
+          <p:cNvSpPr/>
+          <p:nvPr/>
+        </p:nvSpPr>
+        <p:spPr>
+          <a:xfrm>
+            <a:off x="677098" y="3215283"/>
+            <a:ext cx="10834756" cy="0"/>
+          </a:xfrm>
+          <a:prstGeom prst="line">
+            <a:avLst/>
+          </a:prstGeom>
+          <a:noFill/>
+          <a:ln w="12698">
+            <a:solidFill>
+              <a:srgbClr val="3A5A85"/>
+            </a:solidFill>
+            <a:prstDash val="solid"/>
+          </a:ln>
+        </p:spPr>
+      </p:sp>
+      <p:sp>
+        <p:nvSpPr>
+          <p:cNvPr id="11" name="Text 9"/>
+          <p:cNvSpPr/>
+          <p:nvPr/>
+        </p:nvSpPr>
+        <p:spPr>
+          <a:xfrm>
+            <a:off x="677098" y="2340372"/>
+            <a:ext cx="483428" cy="284361"/>
+          </a:xfrm>
+          <a:prstGeom prst="rect">
+            <a:avLst/>
+          </a:prstGeom>
+          <a:noFill/>
+          <a:ln/>
+        </p:spPr>
+        <p:txBody>
+          <a:bodyPr wrap="square" lIns="0" tIns="0" rIns="0" bIns="0" rtlCol="0" anchor="t"/>
+          <a:lstStyle/>
+          <a:p>
+            <a:pPr algn="l" indent="0" marL="0">
+              <a:lnSpc>
+                <a:spcPts val="2240"/>
+              </a:lnSpc>
+              <a:buNone/>
+            </a:pPr>
+            <a:r>
+              <a:rPr lang="en-US" sz="1600" b="1" dirty="0">
+                <a:solidFill>
+                  <a:srgbClr val="C8A24B"/>
+                </a:solidFill>
+                <a:latin typeface="Inter" pitchFamily="34" charset="0"/>
+                <a:ea typeface="Inter" pitchFamily="34" charset="-122"/>
+                <a:cs typeface="Inter" pitchFamily="34" charset="-120"/>
+              </a:rPr>
+              <a:t>01</a:t>
+            </a:r>
+            <a:endParaRPr lang="en-US" sz="1600" dirty="0"/>
+          </a:p>
+        </p:txBody>
+      </p:sp>
+      <p:sp>
+        <p:nvSpPr>
+          <p:cNvPr id="12" name="Text 10"/>
+          <p:cNvSpPr/>
+          <p:nvPr/>
+        </p:nvSpPr>
+        <p:spPr>
+          <a:xfrm>
+            <a:off x="1354196" y="2340372"/>
+            <a:ext cx="2417341" cy="284361"/>
+          </a:xfrm>
+          <a:prstGeom prst="rect">
+            <a:avLst/>
+          </a:prstGeom>
+          <a:noFill/>
+          <a:ln/>
+        </p:spPr>
+        <p:txBody>
+          <a:bodyPr wrap="square" lIns="0" tIns="0" rIns="0" bIns="0" rtlCol="0" anchor="t"/>
+          <a:lstStyle/>
+          <a:p>
+            <a:pPr algn="l" indent="0" marL="0">
+              <a:lnSpc>
+                <a:spcPts val="2240"/>
+              </a:lnSpc>
+              <a:buNone/>
+            </a:pPr>
+            <a:r>
+              <a:rPr lang="en-US" sz="1600" b="1" dirty="0">
+                <a:solidFill>
+                  <a:srgbClr val="E8E5DE"/>
+                </a:solidFill>
+                <a:latin typeface="Inter" pitchFamily="34" charset="0"/>
+                <a:ea typeface="Inter" pitchFamily="34" charset="-122"/>
+                <a:cs typeface="Inter" pitchFamily="34" charset="-120"/>
+              </a:rPr>
+              <a:t>NEVER REVOKED</a:t>
+            </a:r>
+            <a:endParaRPr lang="en-US" sz="1600" dirty="0"/>
+          </a:p>
+        </p:txBody>
+      </p:sp>
+      <p:sp>
+        <p:nvSpPr>
+          <p:cNvPr id="13" name="Text 11"/>
+          <p:cNvSpPr/>
+          <p:nvPr/>
+        </p:nvSpPr>
+        <p:spPr>
+          <a:xfrm>
+            <a:off x="3927287" y="2340372"/>
+            <a:ext cx="7736259" cy="355600"/>
+          </a:xfrm>
+          <a:prstGeom prst="rect">
+            <a:avLst/>
+          </a:prstGeom>
+          <a:noFill/>
+          <a:ln/>
+        </p:spPr>
+        <p:txBody>
+          <a:bodyPr wrap="square" lIns="0" tIns="0" rIns="0" bIns="0" rtlCol="0" anchor="t"/>
+          <a:lstStyle/>
+          <a:p>
+            <a:pPr algn="l" indent="0" marL="0">
+              <a:lnSpc>
+                <a:spcPts val="2800"/>
+              </a:lnSpc>
+              <a:buNone/>
+            </a:pPr>
+            <a:r>
+              <a:rPr lang="en-US" sz="2000" b="1" dirty="0">
+                <a:solidFill>
+                  <a:srgbClr val="E8E5DE"/>
+                </a:solidFill>
+                <a:latin typeface="Source Serif 4" pitchFamily="34" charset="0"/>
+                <a:ea typeface="Source Serif 4" pitchFamily="34" charset="-122"/>
+                <a:cs typeface="Source Serif 4" pitchFamily="34" charset="-120"/>
+              </a:rPr>
+              <a:t>Granted for an incident, and the incident ended</a:t>
+            </a:r>
+            <a:endParaRPr lang="en-US" sz="2000" dirty="0"/>
+          </a:p>
+        </p:txBody>
+      </p:sp>
+      <p:sp>
+        <p:nvSpPr>
+          <p:cNvPr id="14" name="Text 12"/>
+          <p:cNvSpPr/>
+          <p:nvPr/>
+        </p:nvSpPr>
+        <p:spPr>
+          <a:xfrm>
+            <a:off x="3927287" y="2763639"/>
+            <a:ext cx="7736259" cy="343694"/>
+          </a:xfrm>
+          <a:prstGeom prst="rect">
+            <a:avLst/>
+          </a:prstGeom>
+          <a:noFill/>
+          <a:ln/>
+        </p:spPr>
+        <p:txBody>
+          <a:bodyPr wrap="square" lIns="0" tIns="0" rIns="0" bIns="0" rtlCol="0" anchor="t"/>
+          <a:lstStyle/>
+          <a:p>
+            <a:pPr algn="l" indent="0" marL="0">
+              <a:lnSpc>
+                <a:spcPts val="2706"/>
+              </a:lnSpc>
+              <a:spcBef>
+                <a:spcPts val="533"/>
+              </a:spcBef>
+              <a:buNone/>
+            </a:pPr>
+            <a:r>
+              <a:rPr lang="en-US" sz="1866" dirty="0">
+                <a:solidFill>
+                  <a:srgbClr val="9AA6BC"/>
+                </a:solidFill>
+                <a:latin typeface="Inter" pitchFamily="34" charset="0"/>
+                <a:ea typeface="Inter" pitchFamily="34" charset="-122"/>
+                <a:cs typeface="Inter" pitchFamily="34" charset="-120"/>
+              </a:rPr>
+              <a:t>The role outlives the reason. Nothing knows the reason ended.</a:t>
+            </a:r>
+            <a:endParaRPr lang="en-US" sz="1866" dirty="0"/>
+          </a:p>
+        </p:txBody>
+      </p:sp>
+      <p:sp>
+        <p:nvSpPr>
+          <p:cNvPr id="15" name="Shape 13"/>
+          <p:cNvSpPr/>
+          <p:nvPr/>
+        </p:nvSpPr>
+        <p:spPr>
+          <a:xfrm>
+            <a:off x="677098" y="4198144"/>
+            <a:ext cx="10834756" cy="0"/>
+          </a:xfrm>
+          <a:prstGeom prst="line">
+            <a:avLst/>
+          </a:prstGeom>
+          <a:noFill/>
+          <a:ln w="12698">
+            <a:solidFill>
+              <a:srgbClr val="3A5A85"/>
+            </a:solidFill>
+            <a:prstDash val="solid"/>
+          </a:ln>
+        </p:spPr>
+      </p:sp>
+      <p:sp>
+        <p:nvSpPr>
+          <p:cNvPr id="16" name="Text 14"/>
+          <p:cNvSpPr/>
+          <p:nvPr/>
+        </p:nvSpPr>
+        <p:spPr>
+          <a:xfrm>
+            <a:off x="677098" y="3323233"/>
+            <a:ext cx="483428" cy="284361"/>
+          </a:xfrm>
+          <a:prstGeom prst="rect">
+            <a:avLst/>
+          </a:prstGeom>
+          <a:noFill/>
+          <a:ln/>
+        </p:spPr>
+        <p:txBody>
+          <a:bodyPr wrap="square" lIns="0" tIns="0" rIns="0" bIns="0" rtlCol="0" anchor="t"/>
+          <a:lstStyle/>
+          <a:p>
+            <a:pPr algn="l" indent="0" marL="0">
+              <a:lnSpc>
+                <a:spcPts val="2240"/>
+              </a:lnSpc>
+              <a:buNone/>
+            </a:pPr>
+            <a:r>
+              <a:rPr lang="en-US" sz="1600" b="1" dirty="0">
+                <a:solidFill>
+                  <a:srgbClr val="C8A24B"/>
+                </a:solidFill>
+                <a:latin typeface="Inter" pitchFamily="34" charset="0"/>
+                <a:ea typeface="Inter" pitchFamily="34" charset="-122"/>
+                <a:cs typeface="Inter" pitchFamily="34" charset="-120"/>
+              </a:rPr>
+              <a:t>02</a:t>
+            </a:r>
+            <a:endParaRPr lang="en-US" sz="1600" dirty="0"/>
+          </a:p>
+        </p:txBody>
+      </p:sp>
+      <p:sp>
+        <p:nvSpPr>
+          <p:cNvPr id="17" name="Text 15"/>
+          <p:cNvSpPr/>
+          <p:nvPr/>
+        </p:nvSpPr>
+        <p:spPr>
+          <a:xfrm>
+            <a:off x="1354196" y="3323233"/>
+            <a:ext cx="2417341" cy="284361"/>
+          </a:xfrm>
+          <a:prstGeom prst="rect">
+            <a:avLst/>
+          </a:prstGeom>
+          <a:noFill/>
+          <a:ln/>
+        </p:spPr>
+        <p:txBody>
+          <a:bodyPr wrap="square" lIns="0" tIns="0" rIns="0" bIns="0" rtlCol="0" anchor="t"/>
+          <a:lstStyle/>
+          <a:p>
+            <a:pPr algn="l" indent="0" marL="0">
+              <a:lnSpc>
+                <a:spcPts val="2240"/>
+              </a:lnSpc>
+              <a:buNone/>
+            </a:pPr>
+            <a:r>
+              <a:rPr lang="en-US" sz="1600" b="1" dirty="0">
+                <a:solidFill>
+                  <a:srgbClr val="E8E5DE"/>
+                </a:solidFill>
+                <a:latin typeface="Inter" pitchFamily="34" charset="0"/>
+                <a:ea typeface="Inter" pitchFamily="34" charset="-122"/>
+                <a:cs typeface="Inter" pitchFamily="34" charset="-120"/>
+              </a:rPr>
+              <a:t>INHERITED</a:t>
+            </a:r>
+            <a:endParaRPr lang="en-US" sz="1600" dirty="0"/>
+          </a:p>
+        </p:txBody>
+      </p:sp>
+      <p:sp>
+        <p:nvSpPr>
+          <p:cNvPr id="18" name="Text 16"/>
+          <p:cNvSpPr/>
+          <p:nvPr/>
+        </p:nvSpPr>
+        <p:spPr>
+          <a:xfrm>
+            <a:off x="3927287" y="3323233"/>
+            <a:ext cx="7736259" cy="355600"/>
+          </a:xfrm>
+          <a:prstGeom prst="rect">
+            <a:avLst/>
+          </a:prstGeom>
+          <a:noFill/>
+          <a:ln/>
+        </p:spPr>
+        <p:txBody>
+          <a:bodyPr wrap="square" lIns="0" tIns="0" rIns="0" bIns="0" rtlCol="0" anchor="t"/>
+          <a:lstStyle/>
+          <a:p>
+            <a:pPr algn="l" indent="0" marL="0">
+              <a:lnSpc>
+                <a:spcPts val="2800"/>
+              </a:lnSpc>
+              <a:buNone/>
+            </a:pPr>
+            <a:r>
+              <a:rPr lang="en-US" sz="2000" b="1" dirty="0">
+                <a:solidFill>
+                  <a:srgbClr val="E8E5DE"/>
+                </a:solidFill>
+                <a:latin typeface="Source Serif 4" pitchFamily="34" charset="0"/>
+                <a:ea typeface="Source Serif 4" pitchFamily="34" charset="-122"/>
+                <a:cs typeface="Source Serif 4" pitchFamily="34" charset="-120"/>
+              </a:rPr>
+              <a:t>Granted to a group, and the group kept growing</a:t>
+            </a:r>
+            <a:endParaRPr lang="en-US" sz="2000" dirty="0"/>
+          </a:p>
+        </p:txBody>
+      </p:sp>
+      <p:sp>
+        <p:nvSpPr>
+          <p:cNvPr id="19" name="Text 17"/>
+          <p:cNvSpPr/>
+          <p:nvPr/>
+        </p:nvSpPr>
+        <p:spPr>
+          <a:xfrm>
+            <a:off x="3927287" y="3746500"/>
+            <a:ext cx="7736259" cy="343694"/>
+          </a:xfrm>
+          <a:prstGeom prst="rect">
+            <a:avLst/>
+          </a:prstGeom>
+          <a:noFill/>
+          <a:ln/>
+        </p:spPr>
+        <p:txBody>
+          <a:bodyPr wrap="square" lIns="0" tIns="0" rIns="0" bIns="0" rtlCol="0" anchor="t"/>
+          <a:lstStyle/>
+          <a:p>
+            <a:pPr algn="l" indent="0" marL="0">
+              <a:lnSpc>
+                <a:spcPts val="2706"/>
+              </a:lnSpc>
+              <a:spcBef>
+                <a:spcPts val="533"/>
+              </a:spcBef>
+              <a:buNone/>
+            </a:pPr>
+            <a:r>
+              <a:rPr lang="en-US" sz="1866" dirty="0">
+                <a:solidFill>
+                  <a:srgbClr val="9AA6BC"/>
+                </a:solidFill>
+                <a:latin typeface="Inter" pitchFamily="34" charset="0"/>
+                <a:ea typeface="Inter" pitchFamily="34" charset="-122"/>
+                <a:cs typeface="Inter" pitchFamily="34" charset="-120"/>
+              </a:rPr>
+              <a:t>Access follows the team, not the task. Joining inherits all of it.</a:t>
+            </a:r>
+            <a:endParaRPr lang="en-US" sz="1866" dirty="0"/>
+          </a:p>
+        </p:txBody>
+      </p:sp>
+      <p:sp>
+        <p:nvSpPr>
+          <p:cNvPr id="20" name="Shape 18"/>
+          <p:cNvSpPr/>
+          <p:nvPr/>
+        </p:nvSpPr>
+        <p:spPr>
+          <a:xfrm>
+            <a:off x="677098" y="5181005"/>
+            <a:ext cx="10834756" cy="0"/>
+          </a:xfrm>
+          <a:prstGeom prst="line">
+            <a:avLst/>
+          </a:prstGeom>
+          <a:noFill/>
+          <a:ln w="12698">
+            <a:solidFill>
+              <a:srgbClr val="FFFFFF"/>
+            </a:solidFill>
+            <a:prstDash val="solid"/>
+          </a:ln>
+        </p:spPr>
+      </p:sp>
+      <p:sp>
+        <p:nvSpPr>
+          <p:cNvPr id="21" name="Text 19"/>
+          <p:cNvSpPr/>
+          <p:nvPr/>
+        </p:nvSpPr>
+        <p:spPr>
+          <a:xfrm>
+            <a:off x="677098" y="4306094"/>
+            <a:ext cx="483428" cy="284361"/>
+          </a:xfrm>
+          <a:prstGeom prst="rect">
+            <a:avLst/>
+          </a:prstGeom>
+          <a:noFill/>
+          <a:ln/>
+        </p:spPr>
+        <p:txBody>
+          <a:bodyPr wrap="square" lIns="0" tIns="0" rIns="0" bIns="0" rtlCol="0" anchor="t"/>
+          <a:lstStyle/>
+          <a:p>
+            <a:pPr algn="l" indent="0" marL="0">
+              <a:lnSpc>
+                <a:spcPts val="2240"/>
+              </a:lnSpc>
+              <a:buNone/>
+            </a:pPr>
+            <a:r>
+              <a:rPr lang="en-US" sz="1600" b="1" dirty="0">
+                <a:solidFill>
+                  <a:srgbClr val="C8A24B"/>
+                </a:solidFill>
+                <a:latin typeface="Inter" pitchFamily="34" charset="0"/>
+                <a:ea typeface="Inter" pitchFamily="34" charset="-122"/>
+                <a:cs typeface="Inter" pitchFamily="34" charset="-120"/>
+              </a:rPr>
+              <a:t>03</a:t>
+            </a:r>
+            <a:endParaRPr lang="en-US" sz="1600" dirty="0"/>
+          </a:p>
+        </p:txBody>
+      </p:sp>
+      <p:sp>
+        <p:nvSpPr>
+          <p:cNvPr id="22" name="Text 20"/>
+          <p:cNvSpPr/>
+          <p:nvPr/>
+        </p:nvSpPr>
+        <p:spPr>
+          <a:xfrm>
+            <a:off x="1354196" y="4306094"/>
+            <a:ext cx="2417341" cy="284361"/>
+          </a:xfrm>
+          <a:prstGeom prst="rect">
+            <a:avLst/>
+          </a:prstGeom>
+          <a:noFill/>
+          <a:ln/>
+        </p:spPr>
+        <p:txBody>
+          <a:bodyPr wrap="square" lIns="0" tIns="0" rIns="0" bIns="0" rtlCol="0" anchor="t"/>
+          <a:lstStyle/>
+          <a:p>
+            <a:pPr algn="l" indent="0" marL="0">
+              <a:lnSpc>
+                <a:spcPts val="2240"/>
+              </a:lnSpc>
+              <a:buNone/>
+            </a:pPr>
+            <a:r>
+              <a:rPr lang="en-US" sz="1600" b="1" dirty="0">
+                <a:solidFill>
+                  <a:srgbClr val="E8E5DE"/>
+                </a:solidFill>
+                <a:latin typeface="Inter" pitchFamily="34" charset="0"/>
+                <a:ea typeface="Inter" pitchFamily="34" charset="-122"/>
+                <a:cs typeface="Inter" pitchFamily="34" charset="-120"/>
+              </a:rPr>
+              <a:t>THE EXCEPTION</a:t>
+            </a:r>
+            <a:endParaRPr lang="en-US" sz="1600" dirty="0"/>
+          </a:p>
+        </p:txBody>
+      </p:sp>
+      <p:sp>
+        <p:nvSpPr>
+          <p:cNvPr id="23" name="Text 21"/>
+          <p:cNvSpPr/>
+          <p:nvPr/>
+        </p:nvSpPr>
+        <p:spPr>
+          <a:xfrm>
+            <a:off x="3927287" y="4306094"/>
+            <a:ext cx="7736259" cy="355600"/>
+          </a:xfrm>
+          <a:prstGeom prst="rect">
+            <a:avLst/>
+          </a:prstGeom>
+          <a:noFill/>
+          <a:ln/>
+        </p:spPr>
+        <p:txBody>
+          <a:bodyPr wrap="square" lIns="0" tIns="0" rIns="0" bIns="0" rtlCol="0" anchor="t"/>
+          <a:lstStyle/>
+          <a:p>
+            <a:pPr algn="l" indent="0" marL="0">
+              <a:lnSpc>
+                <a:spcPts val="2800"/>
+              </a:lnSpc>
+              <a:buNone/>
+            </a:pPr>
+            <a:r>
+              <a:rPr lang="en-US" sz="2000" b="1" dirty="0">
+                <a:solidFill>
+                  <a:srgbClr val="E8E5DE"/>
+                </a:solidFill>
+                <a:latin typeface="Source Serif 4" pitchFamily="34" charset="0"/>
+                <a:ea typeface="Source Serif 4" pitchFamily="34" charset="-122"/>
+                <a:cs typeface="Source Serif 4" pitchFamily="34" charset="-120"/>
+              </a:rPr>
+              <a:t>Granted to unblock a launch, and the launch shipped</a:t>
+            </a:r>
+            <a:endParaRPr lang="en-US" sz="2000" dirty="0"/>
+          </a:p>
+        </p:txBody>
+      </p:sp>
+      <p:sp>
+        <p:nvSpPr>
+          <p:cNvPr id="24" name="Text 22"/>
+          <p:cNvSpPr/>
+          <p:nvPr/>
+        </p:nvSpPr>
+        <p:spPr>
+          <a:xfrm>
+            <a:off x="3927287" y="4729361"/>
+            <a:ext cx="7736259" cy="343694"/>
+          </a:xfrm>
+          <a:prstGeom prst="rect">
+            <a:avLst/>
+          </a:prstGeom>
+          <a:noFill/>
+          <a:ln/>
+        </p:spPr>
+        <p:txBody>
+          <a:bodyPr wrap="square" lIns="0" tIns="0" rIns="0" bIns="0" rtlCol="0" anchor="t"/>
+          <a:lstStyle/>
+          <a:p>
+            <a:pPr algn="l" indent="0" marL="0">
+              <a:lnSpc>
+                <a:spcPts val="2706"/>
+              </a:lnSpc>
+              <a:spcBef>
+                <a:spcPts val="533"/>
+              </a:spcBef>
+              <a:buNone/>
+            </a:pPr>
+            <a:r>
+              <a:rPr lang="en-US" sz="1866" dirty="0">
+                <a:solidFill>
+                  <a:srgbClr val="9AA6BC"/>
+                </a:solidFill>
+                <a:latin typeface="Inter" pitchFamily="34" charset="0"/>
+                <a:ea typeface="Inter" pitchFamily="34" charset="-122"/>
+                <a:cs typeface="Inter" pitchFamily="34" charset="-120"/>
+              </a:rPr>
+              <a:t>Removing it costs a conversation. Keeping it costs nothing.</a:t>
+            </a:r>
+            <a:endParaRPr lang="en-US" sz="1866" dirty="0"/>
+          </a:p>
+        </p:txBody>
+      </p:sp>
+      <p:sp>
+        <p:nvSpPr>
+          <p:cNvPr id="25" name="Shape 23"/>
+          <p:cNvSpPr/>
+          <p:nvPr/>
+        </p:nvSpPr>
+        <p:spPr>
+          <a:xfrm>
+            <a:off x="677098" y="5298281"/>
+            <a:ext cx="10834756" cy="0"/>
+          </a:xfrm>
+          <a:prstGeom prst="line">
+            <a:avLst/>
+          </a:prstGeom>
+          <a:noFill/>
+          <a:ln w="12698">
+            <a:solidFill>
+              <a:srgbClr val="C8A24B"/>
+            </a:solidFill>
+            <a:prstDash val="solid"/>
+          </a:ln>
+        </p:spPr>
+      </p:sp>
+      <p:sp>
+        <p:nvSpPr>
+          <p:cNvPr id="26" name="Text 24"/>
+          <p:cNvSpPr/>
+          <p:nvPr/>
+        </p:nvSpPr>
+        <p:spPr>
+          <a:xfrm>
+            <a:off x="677098" y="5507831"/>
+            <a:ext cx="11051451" cy="368300"/>
+          </a:xfrm>
+          <a:prstGeom prst="rect">
+            <a:avLst/>
+          </a:prstGeom>
+          <a:noFill/>
+          <a:ln/>
+        </p:spPr>
+        <p:txBody>
+          <a:bodyPr wrap="square" lIns="0" tIns="0" rIns="0" bIns="0" rtlCol="0" anchor="t"/>
+          <a:lstStyle/>
+          <a:p>
+            <a:pPr algn="l" indent="0" marL="0">
+              <a:lnSpc>
+                <a:spcPts val="2900"/>
+              </a:lnSpc>
+              <a:buNone/>
+            </a:pPr>
+            <a:r>
+              <a:rPr lang="en-US" sz="2000" dirty="0">
+                <a:solidFill>
+                  <a:srgbClr val="E8E5DE"/>
+                </a:solidFill>
+                <a:latin typeface="Inter" pitchFamily="34" charset="0"/>
+                <a:ea typeface="Inter" pitchFamily="34" charset="-122"/>
+                <a:cs typeface="Inter" pitchFamily="34" charset="-120"/>
+              </a:rPr>
+              <a:t>Access is the only thing we add without a review date.</a:t>
+            </a:r>
+            <a:endParaRPr lang="en-US" sz="2000" dirty="0"/>
+          </a:p>
+        </p:txBody>
+      </p:sp>
+      <p:sp>
+        <p:nvSpPr>
+          <p:cNvPr id="27" name="Text 25"/>
+          <p:cNvSpPr/>
+          <p:nvPr/>
+        </p:nvSpPr>
+        <p:spPr>
+          <a:xfrm>
+            <a:off x="677098" y="6079331"/>
+            <a:ext cx="5763089" cy="236934"/>
+          </a:xfrm>
+          <a:prstGeom prst="rect">
+            <a:avLst/>
+          </a:prstGeom>
+          <a:noFill/>
+          <a:ln/>
+        </p:spPr>
+        <p:txBody>
+          <a:bodyPr wrap="square" lIns="0" tIns="0" rIns="0" bIns="0" rtlCol="0" anchor="t"/>
+          <a:lstStyle/>
+          <a:p>
+            <a:pPr algn="l" indent="0" marL="0">
+              <a:lnSpc>
+                <a:spcPts val="1866"/>
+              </a:lnSpc>
+              <a:buNone/>
+            </a:pPr>
+            <a:r>
+              <a:rPr lang="en-US" sz="1333" dirty="0">
+                <a:solidFill>
+                  <a:srgbClr val="9AA6BC"/>
+                </a:solidFill>
+                <a:latin typeface="Inter" pitchFamily="34" charset="0"/>
+                <a:ea typeface="Inter" pitchFamily="34" charset="-122"/>
+                <a:cs typeface="Inter" pitchFamily="34" charset="-120"/>
+              </a:rPr>
+              <a:t>SOURCE — none. No figures in this deck; the argument is mechanical.</a:t>
+            </a:r>
+            <a:endParaRPr lang="en-US" sz="1333" dirty="0"/>
+          </a:p>
+        </p:txBody>
+      </p:sp>
+      <p:sp>
+        <p:nvSpPr>
+          <p:cNvPr id="28" name="Text 26"/>
+          <p:cNvSpPr/>
+          <p:nvPr/>
+        </p:nvSpPr>
+        <p:spPr>
+          <a:xfrm>
+            <a:off x="7804381" y="6079331"/>
+            <a:ext cx="3781622" cy="236934"/>
+          </a:xfrm>
+          <a:prstGeom prst="rect">
+            <a:avLst/>
+          </a:prstGeom>
+          <a:noFill/>
+          <a:ln/>
+        </p:spPr>
+        <p:txBody>
+          <a:bodyPr wrap="square" lIns="0" tIns="0" rIns="0" bIns="0" rtlCol="0" anchor="t"/>
+          <a:lstStyle/>
+          <a:p>
+            <a:pPr algn="l" indent="0" marL="0">
+              <a:lnSpc>
+                <a:spcPts val="1866"/>
+              </a:lnSpc>
+              <a:buNone/>
+            </a:pPr>
+            <a:r>
+              <a:rPr lang="en-US" sz="1333" dirty="0">
+                <a:solidFill>
+                  <a:srgbClr val="9AA6BC"/>
+                </a:solidFill>
+                <a:latin typeface="Inter" pitchFamily="34" charset="0"/>
+                <a:ea typeface="Inter" pitchFamily="34" charset="-122"/>
+                <a:cs typeface="Inter" pitchFamily="34" charset="-120"/>
+              </a:rPr>
+              <a:t>INTERNAL DISCUSSION DRAFT · 02 / 06</a:t>
+            </a:r>
+            <a:endParaRPr lang="en-US" sz="1333" dirty="0"/>
+          </a:p>
+        </p:txBody>
+      </p:sp>
     </p:spTree>
   </p:cSld>
   <p:clrMapOvr>
@@ -1397,6 +2915,13 @@
 <file path=ppt/slides/slide3.xml><?xml version="1.0" encoding="utf-8"?>
 <p:sld xmlns:a="http://schemas.openxmlformats.org/drawingml/2006/main" xmlns:r="http://schemas.openxmlformats.org/officeDocument/2006/relationships" xmlns:p="http://schemas.openxmlformats.org/presentationml/2006/main">
   <p:cSld name="Slide 3">
+    <p:bg>
+      <p:bgPr>
+        <a:solidFill>
+          <a:srgbClr val="0A1A33"/>
+        </a:solidFill>
+      </p:bgPr>
+    </p:bg>
     <p:spTree>
       <p:nvGrpSpPr>
         <p:cNvPr id="1" name=""/>
@@ -1411,30 +2936,1022 @@
           <a:chExt cx="0" cy="0"/>
         </a:xfrm>
       </p:grpSpPr>
-      <p:pic>
-        <p:nvPicPr>
-          <p:cNvPr id="2" name="Image 0" descr="/tmp/slide-1787840540890-iwonjcabj7e.png">    </p:cNvPr>
-          <p:cNvPicPr>
-            <a:picLocks noChangeAspect="1"/>
-          </p:cNvPicPr>
-          <p:nvPr/>
-        </p:nvPicPr>
-        <p:blipFill>
-          <a:blip r:embed="rId1"/>
-          <a:stretch>
-            <a:fillRect/>
-          </a:stretch>
-        </p:blipFill>
-        <p:spPr>
-          <a:xfrm>
-            <a:off x="0" y="0"/>
-            <a:ext cx="12188952" cy="6858000"/>
-          </a:xfrm>
-          <a:prstGeom prst="rect">
-            <a:avLst/>
-          </a:prstGeom>
-        </p:spPr>
-      </p:pic>
+      <p:sp>
+        <p:nvSpPr>
+          <p:cNvPr id="2" name="Text 0"/>
+          <p:cNvSpPr/>
+          <p:nvPr/>
+        </p:nvSpPr>
+        <p:spPr>
+          <a:xfrm>
+            <a:off x="677098" y="541734"/>
+            <a:ext cx="3650294" cy="260747"/>
+          </a:xfrm>
+          <a:prstGeom prst="rect">
+            <a:avLst/>
+          </a:prstGeom>
+          <a:noFill/>
+          <a:ln/>
+        </p:spPr>
+        <p:txBody>
+          <a:bodyPr wrap="square" lIns="0" tIns="0" rIns="0" bIns="0" rtlCol="0" anchor="t"/>
+          <a:lstStyle/>
+          <a:p>
+            <a:pPr algn="l" indent="0" marL="0">
+              <a:lnSpc>
+                <a:spcPts val="2053"/>
+              </a:lnSpc>
+              <a:buNone/>
+            </a:pPr>
+            <a:r>
+              <a:rPr lang="en-US" sz="1466" dirty="0">
+                <a:solidFill>
+                  <a:srgbClr val="9AA6BC"/>
+                </a:solidFill>
+                <a:latin typeface="Inter" pitchFamily="34" charset="0"/>
+                <a:ea typeface="Inter" pitchFamily="34" charset="-122"/>
+                <a:cs typeface="Inter" pitchFamily="34" charset="-120"/>
+              </a:rPr>
+              <a:t>ACCESS GOVERNANCE · INTERNAL</a:t>
+            </a:r>
+            <a:endParaRPr lang="en-US" sz="1466" dirty="0"/>
+          </a:p>
+        </p:txBody>
+      </p:sp>
+      <p:sp>
+        <p:nvSpPr>
+          <p:cNvPr id="3" name="Text 1"/>
+          <p:cNvSpPr/>
+          <p:nvPr/>
+        </p:nvSpPr>
+        <p:spPr>
+          <a:xfrm>
+            <a:off x="8911187" y="541734"/>
+            <a:ext cx="2652680" cy="260747"/>
+          </a:xfrm>
+          <a:prstGeom prst="rect">
+            <a:avLst/>
+          </a:prstGeom>
+          <a:noFill/>
+          <a:ln/>
+        </p:spPr>
+        <p:txBody>
+          <a:bodyPr wrap="square" lIns="0" tIns="0" rIns="0" bIns="0" rtlCol="0" anchor="t"/>
+          <a:lstStyle/>
+          <a:p>
+            <a:pPr algn="l" indent="0" marL="0">
+              <a:lnSpc>
+                <a:spcPts val="2053"/>
+              </a:lnSpc>
+              <a:buNone/>
+            </a:pPr>
+            <a:r>
+              <a:rPr lang="en-US" sz="1466" b="1" dirty="0">
+                <a:solidFill>
+                  <a:srgbClr val="C8A24B"/>
+                </a:solidFill>
+                <a:latin typeface="Inter" pitchFamily="34" charset="0"/>
+                <a:ea typeface="Inter" pitchFamily="34" charset="-122"/>
+                <a:cs typeface="Inter" pitchFamily="34" charset="-120"/>
+              </a:rPr>
+              <a:t>SECTION 02 · THE PRICE</a:t>
+            </a:r>
+            <a:endParaRPr lang="en-US" sz="1466" dirty="0"/>
+          </a:p>
+        </p:txBody>
+      </p:sp>
+      <p:sp>
+        <p:nvSpPr>
+          <p:cNvPr id="4" name="Text 2"/>
+          <p:cNvSpPr/>
+          <p:nvPr/>
+        </p:nvSpPr>
+        <p:spPr>
+          <a:xfrm>
+            <a:off x="677098" y="904081"/>
+            <a:ext cx="11051451" cy="528241"/>
+          </a:xfrm>
+          <a:prstGeom prst="rect">
+            <a:avLst/>
+          </a:prstGeom>
+          <a:noFill/>
+          <a:ln/>
+        </p:spPr>
+        <p:txBody>
+          <a:bodyPr wrap="square" lIns="0" tIns="0" rIns="0" bIns="0" rtlCol="0" anchor="t"/>
+          <a:lstStyle/>
+          <a:p>
+            <a:pPr algn="l" indent="0" marL="0">
+              <a:lnSpc>
+                <a:spcPts val="4159"/>
+              </a:lnSpc>
+              <a:spcBef>
+                <a:spcPts val="800"/>
+              </a:spcBef>
+              <a:buNone/>
+            </a:pPr>
+            <a:r>
+              <a:rPr lang="en-US" sz="3200" b="1" dirty="0">
+                <a:solidFill>
+                  <a:srgbClr val="E8E5DE"/>
+                </a:solidFill>
+                <a:latin typeface="Source Serif 4" pitchFamily="34" charset="0"/>
+                <a:ea typeface="Source Serif 4" pitchFamily="34" charset="-122"/>
+                <a:cs typeface="Source Serif 4" pitchFamily="34" charset="-120"/>
+              </a:rPr>
+              <a:t>What least privilege actually costs</a:t>
+            </a:r>
+            <a:endParaRPr lang="en-US" sz="3200" dirty="0"/>
+          </a:p>
+        </p:txBody>
+      </p:sp>
+      <p:sp>
+        <p:nvSpPr>
+          <p:cNvPr id="5" name="Text 3"/>
+          <p:cNvSpPr/>
+          <p:nvPr/>
+        </p:nvSpPr>
+        <p:spPr>
+          <a:xfrm>
+            <a:off x="677098" y="1601589"/>
+            <a:ext cx="10834756" cy="8334"/>
+          </a:xfrm>
+          <a:prstGeom prst="rect">
+            <a:avLst/>
+          </a:prstGeom>
+          <a:solidFill>
+            <a:srgbClr val="C8A24B"/>
+          </a:solidFill>
+          <a:ln/>
+        </p:spPr>
+        <p:txBody>
+          <a:bodyPr wrap="square" rtlCol="0" anchor="ctr"/>
+          <a:lstStyle/>
+          <a:p>
+            <a:pPr indent="0" marL="0">
+              <a:buNone/>
+            </a:pPr>
+            <a:endParaRPr lang="en-US" dirty="0"/>
+          </a:p>
+        </p:txBody>
+      </p:sp>
+      <p:sp>
+        <p:nvSpPr>
+          <p:cNvPr id="6" name="Text 4"/>
+          <p:cNvSpPr/>
+          <p:nvPr/>
+        </p:nvSpPr>
+        <p:spPr>
+          <a:xfrm>
+            <a:off x="677098" y="1846858"/>
+            <a:ext cx="3385688" cy="3274219"/>
+          </a:xfrm>
+          <a:prstGeom prst="rect">
+            <a:avLst/>
+          </a:prstGeom>
+          <a:solidFill>
+            <a:srgbClr val="1F3A5F"/>
+          </a:solidFill>
+          <a:ln w="12698">
+            <a:solidFill>
+              <a:srgbClr val="C8A24B"/>
+            </a:solidFill>
+          </a:ln>
+        </p:spPr>
+        <p:txBody>
+          <a:bodyPr wrap="square" rtlCol="0" anchor="ctr"/>
+          <a:lstStyle/>
+          <a:p>
+            <a:pPr indent="0" marL="0">
+              <a:buNone/>
+            </a:pPr>
+            <a:endParaRPr lang="en-US" dirty="0"/>
+          </a:p>
+        </p:txBody>
+      </p:sp>
+      <p:sp>
+        <p:nvSpPr>
+          <p:cNvPr id="7" name="Text 5"/>
+          <p:cNvSpPr/>
+          <p:nvPr/>
+        </p:nvSpPr>
+        <p:spPr>
+          <a:xfrm>
+            <a:off x="892944" y="2062758"/>
+            <a:ext cx="3013076" cy="260747"/>
+          </a:xfrm>
+          <a:prstGeom prst="rect">
+            <a:avLst/>
+          </a:prstGeom>
+          <a:noFill/>
+          <a:ln/>
+        </p:spPr>
+        <p:txBody>
+          <a:bodyPr wrap="square" lIns="0" tIns="0" rIns="0" bIns="0" rtlCol="0" anchor="t"/>
+          <a:lstStyle/>
+          <a:p>
+            <a:pPr algn="l" indent="0" marL="0">
+              <a:lnSpc>
+                <a:spcPts val="2053"/>
+              </a:lnSpc>
+              <a:buNone/>
+            </a:pPr>
+            <a:r>
+              <a:rPr lang="en-US" sz="1466" b="1" dirty="0">
+                <a:solidFill>
+                  <a:srgbClr val="C8A24B"/>
+                </a:solidFill>
+                <a:latin typeface="Inter" pitchFamily="34" charset="0"/>
+                <a:ea typeface="Inter" pitchFamily="34" charset="-122"/>
+                <a:cs typeface="Inter" pitchFamily="34" charset="-120"/>
+              </a:rPr>
+              <a:t>LATENCY</a:t>
+            </a:r>
+            <a:endParaRPr lang="en-US" sz="1466" dirty="0"/>
+          </a:p>
+        </p:txBody>
+      </p:sp>
+      <p:sp>
+        <p:nvSpPr>
+          <p:cNvPr id="8" name="Text 6"/>
+          <p:cNvSpPr/>
+          <p:nvPr/>
+        </p:nvSpPr>
+        <p:spPr>
+          <a:xfrm>
+            <a:off x="892944" y="2425105"/>
+            <a:ext cx="3013076" cy="758428"/>
+          </a:xfrm>
+          <a:prstGeom prst="rect">
+            <a:avLst/>
+          </a:prstGeom>
+          <a:noFill/>
+          <a:ln/>
+        </p:spPr>
+        <p:txBody>
+          <a:bodyPr wrap="square" lIns="0" tIns="0" rIns="0" bIns="0" rtlCol="0" anchor="t"/>
+          <a:lstStyle/>
+          <a:p>
+            <a:pPr algn="l" indent="0" marL="0">
+              <a:lnSpc>
+                <a:spcPts val="2986"/>
+              </a:lnSpc>
+              <a:spcBef>
+                <a:spcPts val="800"/>
+              </a:spcBef>
+              <a:buNone/>
+            </a:pPr>
+            <a:r>
+              <a:rPr lang="en-US" sz="2133" dirty="0">
+                <a:solidFill>
+                  <a:srgbClr val="E8E5DE"/>
+                </a:solidFill>
+                <a:latin typeface="Source Serif 4" pitchFamily="34" charset="0"/>
+                <a:ea typeface="Source Serif 4" pitchFamily="34" charset="-122"/>
+                <a:cs typeface="Source Serif 4" pitchFamily="34" charset="-120"/>
+              </a:rPr>
+              <a:t>The fix waits</a:t>
+            </a:r>
+            <a:endParaRPr lang="en-US" sz="2133" dirty="0"/>
+          </a:p>
+          <a:p>
+            <a:pPr algn="l" indent="0" marL="0">
+              <a:lnSpc>
+                <a:spcPts val="2986"/>
+              </a:lnSpc>
+              <a:spcBef>
+                <a:spcPts val="800"/>
+              </a:spcBef>
+              <a:buNone/>
+            </a:pPr>
+            <a:r>
+              <a:rPr lang="en-US" sz="2133" dirty="0">
+                <a:solidFill>
+                  <a:srgbClr val="E8E5DE"/>
+                </a:solidFill>
+                <a:latin typeface="Source Serif 4" pitchFamily="34" charset="0"/>
+                <a:ea typeface="Source Serif 4" pitchFamily="34" charset="-122"/>
+                <a:cs typeface="Source Serif 4" pitchFamily="34" charset="-120"/>
+              </a:rPr>
+              <a:t>on a question</a:t>
+            </a:r>
+            <a:endParaRPr lang="en-US" sz="2133" dirty="0"/>
+          </a:p>
+        </p:txBody>
+      </p:sp>
+      <p:sp>
+        <p:nvSpPr>
+          <p:cNvPr id="9" name="Text 7"/>
+          <p:cNvSpPr/>
+          <p:nvPr/>
+        </p:nvSpPr>
+        <p:spPr>
+          <a:xfrm>
+            <a:off x="892944" y="3352800"/>
+            <a:ext cx="2953996" cy="8334"/>
+          </a:xfrm>
+          <a:prstGeom prst="rect">
+            <a:avLst/>
+          </a:prstGeom>
+          <a:solidFill>
+            <a:srgbClr val="C8A24B"/>
+          </a:solidFill>
+          <a:ln/>
+        </p:spPr>
+        <p:txBody>
+          <a:bodyPr wrap="square" rtlCol="0" anchor="ctr"/>
+          <a:lstStyle/>
+          <a:p>
+            <a:pPr indent="0" marL="0">
+              <a:buNone/>
+            </a:pPr>
+            <a:endParaRPr lang="en-US" dirty="0"/>
+          </a:p>
+        </p:txBody>
+      </p:sp>
+      <p:sp>
+        <p:nvSpPr>
+          <p:cNvPr id="10" name="Text 8"/>
+          <p:cNvSpPr/>
+          <p:nvPr/>
+        </p:nvSpPr>
+        <p:spPr>
+          <a:xfrm>
+            <a:off x="892944" y="3530402"/>
+            <a:ext cx="3013076" cy="1031081"/>
+          </a:xfrm>
+          <a:prstGeom prst="rect">
+            <a:avLst/>
+          </a:prstGeom>
+          <a:noFill/>
+          <a:ln/>
+        </p:spPr>
+        <p:txBody>
+          <a:bodyPr wrap="square" lIns="0" tIns="0" rIns="0" bIns="0" rtlCol="0" anchor="t"/>
+          <a:lstStyle/>
+          <a:p>
+            <a:pPr algn="l" indent="0" marL="0">
+              <a:lnSpc>
+                <a:spcPts val="2706"/>
+              </a:lnSpc>
+              <a:buNone/>
+            </a:pPr>
+            <a:r>
+              <a:rPr lang="en-US" sz="1866" dirty="0">
+                <a:solidFill>
+                  <a:srgbClr val="E8E5DE"/>
+                </a:solidFill>
+                <a:latin typeface="Inter" pitchFamily="34" charset="0"/>
+                <a:ea typeface="Inter" pitchFamily="34" charset="-122"/>
+                <a:cs typeface="Inter" pitchFamily="34" charset="-120"/>
+              </a:rPr>
+              <a:t>The one who can repair it must ask first, and asking costs most</a:t>
+            </a:r>
+            <a:endParaRPr lang="en-US" sz="1866" dirty="0"/>
+          </a:p>
+          <a:p>
+            <a:pPr algn="l" indent="0" marL="0">
+              <a:lnSpc>
+                <a:spcPts val="2706"/>
+              </a:lnSpc>
+              <a:buNone/>
+            </a:pPr>
+            <a:r>
+              <a:rPr lang="en-US" sz="1866" dirty="0">
+                <a:solidFill>
+                  <a:srgbClr val="E8E5DE"/>
+                </a:solidFill>
+                <a:latin typeface="Inter" pitchFamily="34" charset="0"/>
+                <a:ea typeface="Inter" pitchFamily="34" charset="-122"/>
+                <a:cs typeface="Inter" pitchFamily="34" charset="-120"/>
+              </a:rPr>
+              <a:t>        at 03:00.</a:t>
+            </a:r>
+            <a:endParaRPr lang="en-US" sz="1866" dirty="0"/>
+          </a:p>
+        </p:txBody>
+      </p:sp>
+      <p:sp>
+        <p:nvSpPr>
+          <p:cNvPr id="11" name="Text 9"/>
+          <p:cNvSpPr/>
+          <p:nvPr/>
+        </p:nvSpPr>
+        <p:spPr>
+          <a:xfrm>
+            <a:off x="4401235" y="1846858"/>
+            <a:ext cx="3385688" cy="3274219"/>
+          </a:xfrm>
+          <a:prstGeom prst="rect">
+            <a:avLst/>
+          </a:prstGeom>
+          <a:solidFill>
+            <a:srgbClr val="1F3A5F"/>
+          </a:solidFill>
+          <a:ln w="12698">
+            <a:solidFill>
+              <a:srgbClr val="C8A24B"/>
+            </a:solidFill>
+          </a:ln>
+        </p:spPr>
+        <p:txBody>
+          <a:bodyPr wrap="square" rtlCol="0" anchor="ctr"/>
+          <a:lstStyle/>
+          <a:p>
+            <a:pPr indent="0" marL="0">
+              <a:buNone/>
+            </a:pPr>
+            <a:endParaRPr lang="en-US" dirty="0"/>
+          </a:p>
+        </p:txBody>
+      </p:sp>
+      <p:sp>
+        <p:nvSpPr>
+          <p:cNvPr id="12" name="Text 10"/>
+          <p:cNvSpPr/>
+          <p:nvPr/>
+        </p:nvSpPr>
+        <p:spPr>
+          <a:xfrm>
+            <a:off x="4617081" y="2062758"/>
+            <a:ext cx="3013076" cy="260747"/>
+          </a:xfrm>
+          <a:prstGeom prst="rect">
+            <a:avLst/>
+          </a:prstGeom>
+          <a:noFill/>
+          <a:ln/>
+        </p:spPr>
+        <p:txBody>
+          <a:bodyPr wrap="square" lIns="0" tIns="0" rIns="0" bIns="0" rtlCol="0" anchor="t"/>
+          <a:lstStyle/>
+          <a:p>
+            <a:pPr algn="l" indent="0" marL="0">
+              <a:lnSpc>
+                <a:spcPts val="2053"/>
+              </a:lnSpc>
+              <a:buNone/>
+            </a:pPr>
+            <a:r>
+              <a:rPr lang="en-US" sz="1466" b="1" dirty="0">
+                <a:solidFill>
+                  <a:srgbClr val="C8A24B"/>
+                </a:solidFill>
+                <a:latin typeface="Inter" pitchFamily="34" charset="0"/>
+                <a:ea typeface="Inter" pitchFamily="34" charset="-122"/>
+                <a:cs typeface="Inter" pitchFamily="34" charset="-120"/>
+              </a:rPr>
+              <a:t>ATTENTION</a:t>
+            </a:r>
+            <a:endParaRPr lang="en-US" sz="1466" dirty="0"/>
+          </a:p>
+        </p:txBody>
+      </p:sp>
+      <p:sp>
+        <p:nvSpPr>
+          <p:cNvPr id="13" name="Text 11"/>
+          <p:cNvSpPr/>
+          <p:nvPr/>
+        </p:nvSpPr>
+        <p:spPr>
+          <a:xfrm>
+            <a:off x="4617081" y="2425105"/>
+            <a:ext cx="3013076" cy="758428"/>
+          </a:xfrm>
+          <a:prstGeom prst="rect">
+            <a:avLst/>
+          </a:prstGeom>
+          <a:noFill/>
+          <a:ln/>
+        </p:spPr>
+        <p:txBody>
+          <a:bodyPr wrap="square" lIns="0" tIns="0" rIns="0" bIns="0" rtlCol="0" anchor="t"/>
+          <a:lstStyle/>
+          <a:p>
+            <a:pPr algn="l" indent="0" marL="0">
+              <a:lnSpc>
+                <a:spcPts val="2986"/>
+              </a:lnSpc>
+              <a:spcBef>
+                <a:spcPts val="800"/>
+              </a:spcBef>
+              <a:buNone/>
+            </a:pPr>
+            <a:r>
+              <a:rPr lang="en-US" sz="2133" dirty="0">
+                <a:solidFill>
+                  <a:srgbClr val="E8E5DE"/>
+                </a:solidFill>
+                <a:latin typeface="Source Serif 4" pitchFamily="34" charset="0"/>
+                <a:ea typeface="Source Serif 4" pitchFamily="34" charset="-122"/>
+                <a:cs typeface="Source Serif 4" pitchFamily="34" charset="-120"/>
+              </a:rPr>
+              <a:t>Someone has to</a:t>
+            </a:r>
+            <a:endParaRPr lang="en-US" sz="2133" dirty="0"/>
+          </a:p>
+          <a:p>
+            <a:pPr algn="l" indent="0" marL="0">
+              <a:lnSpc>
+                <a:spcPts val="2986"/>
+              </a:lnSpc>
+              <a:spcBef>
+                <a:spcPts val="800"/>
+              </a:spcBef>
+              <a:buNone/>
+            </a:pPr>
+            <a:r>
+              <a:rPr lang="en-US" sz="2133" dirty="0">
+                <a:solidFill>
+                  <a:srgbClr val="E8E5DE"/>
+                </a:solidFill>
+                <a:latin typeface="Source Serif 4" pitchFamily="34" charset="0"/>
+                <a:ea typeface="Source Serif 4" pitchFamily="34" charset="-122"/>
+                <a:cs typeface="Source Serif 4" pitchFamily="34" charset="-120"/>
+              </a:rPr>
+              <a:t>be awake to say yes</a:t>
+            </a:r>
+            <a:endParaRPr lang="en-US" sz="2133" dirty="0"/>
+          </a:p>
+        </p:txBody>
+      </p:sp>
+      <p:sp>
+        <p:nvSpPr>
+          <p:cNvPr id="14" name="Text 12"/>
+          <p:cNvSpPr/>
+          <p:nvPr/>
+        </p:nvSpPr>
+        <p:spPr>
+          <a:xfrm>
+            <a:off x="4617081" y="3352800"/>
+            <a:ext cx="2953996" cy="8334"/>
+          </a:xfrm>
+          <a:prstGeom prst="rect">
+            <a:avLst/>
+          </a:prstGeom>
+          <a:solidFill>
+            <a:srgbClr val="C8A24B"/>
+          </a:solidFill>
+          <a:ln/>
+        </p:spPr>
+        <p:txBody>
+          <a:bodyPr wrap="square" rtlCol="0" anchor="ctr"/>
+          <a:lstStyle/>
+          <a:p>
+            <a:pPr indent="0" marL="0">
+              <a:buNone/>
+            </a:pPr>
+            <a:endParaRPr lang="en-US" dirty="0"/>
+          </a:p>
+        </p:txBody>
+      </p:sp>
+      <p:sp>
+        <p:nvSpPr>
+          <p:cNvPr id="15" name="Text 13"/>
+          <p:cNvSpPr/>
+          <p:nvPr/>
+        </p:nvSpPr>
+        <p:spPr>
+          <a:xfrm>
+            <a:off x="4617081" y="3530402"/>
+            <a:ext cx="3013076" cy="1374775"/>
+          </a:xfrm>
+          <a:prstGeom prst="rect">
+            <a:avLst/>
+          </a:prstGeom>
+          <a:noFill/>
+          <a:ln/>
+        </p:spPr>
+        <p:txBody>
+          <a:bodyPr wrap="square" lIns="0" tIns="0" rIns="0" bIns="0" rtlCol="0" anchor="t"/>
+          <a:lstStyle/>
+          <a:p>
+            <a:pPr algn="l" indent="0" marL="0">
+              <a:lnSpc>
+                <a:spcPts val="2706"/>
+              </a:lnSpc>
+              <a:buNone/>
+            </a:pPr>
+            <a:r>
+              <a:rPr lang="en-US" sz="1866" dirty="0">
+                <a:solidFill>
+                  <a:srgbClr val="E8E5DE"/>
+                </a:solidFill>
+                <a:latin typeface="Inter" pitchFamily="34" charset="0"/>
+                <a:ea typeface="Inter" pitchFamily="34" charset="-122"/>
+                <a:cs typeface="Inter" pitchFamily="34" charset="-120"/>
+              </a:rPr>
+              <a:t>A permission that expires is requested again, and every request</a:t>
+            </a:r>
+            <a:endParaRPr lang="en-US" sz="1866" dirty="0"/>
+          </a:p>
+          <a:p>
+            <a:pPr algn="l" indent="0" marL="0">
+              <a:lnSpc>
+                <a:spcPts val="2706"/>
+              </a:lnSpc>
+              <a:buNone/>
+            </a:pPr>
+            <a:r>
+              <a:rPr lang="en-US" sz="1866" dirty="0">
+                <a:solidFill>
+                  <a:srgbClr val="E8E5DE"/>
+                </a:solidFill>
+                <a:latin typeface="Inter" pitchFamily="34" charset="0"/>
+                <a:ea typeface="Inter" pitchFamily="34" charset="-122"/>
+                <a:cs typeface="Inter" pitchFamily="34" charset="-120"/>
+              </a:rPr>
+              <a:t>        needs someone awake.</a:t>
+            </a:r>
+            <a:endParaRPr lang="en-US" sz="1866" dirty="0"/>
+          </a:p>
+        </p:txBody>
+      </p:sp>
+      <p:sp>
+        <p:nvSpPr>
+          <p:cNvPr id="16" name="Text 14"/>
+          <p:cNvSpPr/>
+          <p:nvPr/>
+        </p:nvSpPr>
+        <p:spPr>
+          <a:xfrm>
+            <a:off x="8125373" y="1846858"/>
+            <a:ext cx="3385688" cy="3274219"/>
+          </a:xfrm>
+          <a:prstGeom prst="rect">
+            <a:avLst/>
+          </a:prstGeom>
+          <a:solidFill>
+            <a:srgbClr val="1F3A5F"/>
+          </a:solidFill>
+          <a:ln w="12698">
+            <a:solidFill>
+              <a:srgbClr val="C8A24B"/>
+            </a:solidFill>
+          </a:ln>
+        </p:spPr>
+        <p:txBody>
+          <a:bodyPr wrap="square" rtlCol="0" anchor="ctr"/>
+          <a:lstStyle/>
+          <a:p>
+            <a:pPr indent="0" marL="0">
+              <a:buNone/>
+            </a:pPr>
+            <a:endParaRPr lang="en-US" dirty="0"/>
+          </a:p>
+        </p:txBody>
+      </p:sp>
+      <p:sp>
+        <p:nvSpPr>
+          <p:cNvPr id="17" name="Text 15"/>
+          <p:cNvSpPr/>
+          <p:nvPr/>
+        </p:nvSpPr>
+        <p:spPr>
+          <a:xfrm>
+            <a:off x="8341219" y="2062758"/>
+            <a:ext cx="3013076" cy="260747"/>
+          </a:xfrm>
+          <a:prstGeom prst="rect">
+            <a:avLst/>
+          </a:prstGeom>
+          <a:noFill/>
+          <a:ln/>
+        </p:spPr>
+        <p:txBody>
+          <a:bodyPr wrap="square" lIns="0" tIns="0" rIns="0" bIns="0" rtlCol="0" anchor="t"/>
+          <a:lstStyle/>
+          <a:p>
+            <a:pPr algn="l" indent="0" marL="0">
+              <a:lnSpc>
+                <a:spcPts val="2053"/>
+              </a:lnSpc>
+              <a:buNone/>
+            </a:pPr>
+            <a:r>
+              <a:rPr lang="en-US" sz="1466" b="1" dirty="0">
+                <a:solidFill>
+                  <a:srgbClr val="C8A24B"/>
+                </a:solidFill>
+                <a:latin typeface="Inter" pitchFamily="34" charset="0"/>
+                <a:ea typeface="Inter" pitchFamily="34" charset="-122"/>
+                <a:cs typeface="Inter" pitchFamily="34" charset="-120"/>
+              </a:rPr>
+              <a:t>THE MISSING MAP</a:t>
+            </a:r>
+            <a:endParaRPr lang="en-US" sz="1466" dirty="0"/>
+          </a:p>
+        </p:txBody>
+      </p:sp>
+      <p:sp>
+        <p:nvSpPr>
+          <p:cNvPr id="18" name="Text 16"/>
+          <p:cNvSpPr/>
+          <p:nvPr/>
+        </p:nvSpPr>
+        <p:spPr>
+          <a:xfrm>
+            <a:off x="8341219" y="2425105"/>
+            <a:ext cx="3013076" cy="758428"/>
+          </a:xfrm>
+          <a:prstGeom prst="rect">
+            <a:avLst/>
+          </a:prstGeom>
+          <a:noFill/>
+          <a:ln/>
+        </p:spPr>
+        <p:txBody>
+          <a:bodyPr wrap="square" lIns="0" tIns="0" rIns="0" bIns="0" rtlCol="0" anchor="t"/>
+          <a:lstStyle/>
+          <a:p>
+            <a:pPr algn="l" indent="0" marL="0">
+              <a:lnSpc>
+                <a:spcPts val="2986"/>
+              </a:lnSpc>
+              <a:spcBef>
+                <a:spcPts val="800"/>
+              </a:spcBef>
+              <a:buNone/>
+            </a:pPr>
+            <a:r>
+              <a:rPr lang="en-US" sz="2133" dirty="0">
+                <a:solidFill>
+                  <a:srgbClr val="E8E5DE"/>
+                </a:solidFill>
+                <a:latin typeface="Source Serif 4" pitchFamily="34" charset="0"/>
+                <a:ea typeface="Source Serif 4" pitchFamily="34" charset="-122"/>
+                <a:cs typeface="Source Serif 4" pitchFamily="34" charset="-120"/>
+              </a:rPr>
+              <a:t>You have to know</a:t>
+            </a:r>
+            <a:endParaRPr lang="en-US" sz="2133" dirty="0"/>
+          </a:p>
+          <a:p>
+            <a:pPr algn="l" indent="0" marL="0">
+              <a:lnSpc>
+                <a:spcPts val="2986"/>
+              </a:lnSpc>
+              <a:spcBef>
+                <a:spcPts val="800"/>
+              </a:spcBef>
+              <a:buNone/>
+            </a:pPr>
+            <a:r>
+              <a:rPr lang="en-US" sz="2133" dirty="0">
+                <a:solidFill>
+                  <a:srgbClr val="E8E5DE"/>
+                </a:solidFill>
+                <a:latin typeface="Source Serif 4" pitchFamily="34" charset="0"/>
+                <a:ea typeface="Source Serif 4" pitchFamily="34" charset="-122"/>
+                <a:cs typeface="Source Serif 4" pitchFamily="34" charset="-120"/>
+              </a:rPr>
+              <a:t>what is needed</a:t>
+            </a:r>
+            <a:endParaRPr lang="en-US" sz="2133" dirty="0"/>
+          </a:p>
+        </p:txBody>
+      </p:sp>
+      <p:sp>
+        <p:nvSpPr>
+          <p:cNvPr id="19" name="Text 17"/>
+          <p:cNvSpPr/>
+          <p:nvPr/>
+        </p:nvSpPr>
+        <p:spPr>
+          <a:xfrm>
+            <a:off x="8341219" y="3352800"/>
+            <a:ext cx="2953996" cy="8334"/>
+          </a:xfrm>
+          <a:prstGeom prst="rect">
+            <a:avLst/>
+          </a:prstGeom>
+          <a:solidFill>
+            <a:srgbClr val="C8A24B"/>
+          </a:solidFill>
+          <a:ln/>
+        </p:spPr>
+        <p:txBody>
+          <a:bodyPr wrap="square" rtlCol="0" anchor="ctr"/>
+          <a:lstStyle/>
+          <a:p>
+            <a:pPr indent="0" marL="0">
+              <a:buNone/>
+            </a:pPr>
+            <a:endParaRPr lang="en-US" dirty="0"/>
+          </a:p>
+        </p:txBody>
+      </p:sp>
+      <p:sp>
+        <p:nvSpPr>
+          <p:cNvPr id="20" name="Text 18"/>
+          <p:cNvSpPr/>
+          <p:nvPr/>
+        </p:nvSpPr>
+        <p:spPr>
+          <a:xfrm>
+            <a:off x="8341219" y="3530402"/>
+            <a:ext cx="3013076" cy="1374775"/>
+          </a:xfrm>
+          <a:prstGeom prst="rect">
+            <a:avLst/>
+          </a:prstGeom>
+          <a:noFill/>
+          <a:ln/>
+        </p:spPr>
+        <p:txBody>
+          <a:bodyPr wrap="square" lIns="0" tIns="0" rIns="0" bIns="0" rtlCol="0" anchor="t"/>
+          <a:lstStyle/>
+          <a:p>
+            <a:pPr algn="l" indent="0" marL="0">
+              <a:lnSpc>
+                <a:spcPts val="2706"/>
+              </a:lnSpc>
+              <a:buNone/>
+            </a:pPr>
+            <a:r>
+              <a:rPr lang="en-US" sz="1866" dirty="0">
+                <a:solidFill>
+                  <a:srgbClr val="E8E5DE"/>
+                </a:solidFill>
+                <a:latin typeface="Inter" pitchFamily="34" charset="0"/>
+                <a:ea typeface="Inter" pitchFamily="34" charset="-122"/>
+                <a:cs typeface="Inter" pitchFamily="34" charset="-120"/>
+              </a:rPr>
+              <a:t>Knowing what is needed means knowing it per service and per role, and</a:t>
+            </a:r>
+            <a:endParaRPr lang="en-US" sz="1866" dirty="0"/>
+          </a:p>
+          <a:p>
+            <a:pPr algn="l" indent="0" marL="0">
+              <a:lnSpc>
+                <a:spcPts val="2706"/>
+              </a:lnSpc>
+              <a:buNone/>
+            </a:pPr>
+            <a:r>
+              <a:rPr lang="en-US" sz="1866" dirty="0">
+                <a:solidFill>
+                  <a:srgbClr val="E8E5DE"/>
+                </a:solidFill>
+                <a:latin typeface="Inter" pitchFamily="34" charset="0"/>
+                <a:ea typeface="Inter" pitchFamily="34" charset="-122"/>
+                <a:cs typeface="Inter" pitchFamily="34" charset="-120"/>
+              </a:rPr>
+              <a:t>        it goes stale.</a:t>
+            </a:r>
+            <a:endParaRPr lang="en-US" sz="1866" dirty="0"/>
+          </a:p>
+        </p:txBody>
+      </p:sp>
+      <p:sp>
+        <p:nvSpPr>
+          <p:cNvPr id="21" name="Shape 19"/>
+          <p:cNvSpPr/>
+          <p:nvPr/>
+        </p:nvSpPr>
+        <p:spPr>
+          <a:xfrm>
+            <a:off x="677098" y="5298281"/>
+            <a:ext cx="10834756" cy="0"/>
+          </a:xfrm>
+          <a:prstGeom prst="line">
+            <a:avLst/>
+          </a:prstGeom>
+          <a:noFill/>
+          <a:ln w="12698">
+            <a:solidFill>
+              <a:srgbClr val="C8A24B"/>
+            </a:solidFill>
+            <a:prstDash val="solid"/>
+          </a:ln>
+        </p:spPr>
+      </p:sp>
+      <p:sp>
+        <p:nvSpPr>
+          <p:cNvPr id="22" name="Text 20"/>
+          <p:cNvSpPr/>
+          <p:nvPr/>
+        </p:nvSpPr>
+        <p:spPr>
+          <a:xfrm>
+            <a:off x="677098" y="5507831"/>
+            <a:ext cx="11051451" cy="368300"/>
+          </a:xfrm>
+          <a:prstGeom prst="rect">
+            <a:avLst/>
+          </a:prstGeom>
+          <a:noFill/>
+          <a:ln/>
+        </p:spPr>
+        <p:txBody>
+          <a:bodyPr wrap="square" lIns="0" tIns="0" rIns="0" bIns="0" rtlCol="0" anchor="t"/>
+          <a:lstStyle/>
+          <a:p>
+            <a:pPr algn="l" indent="0" marL="0">
+              <a:lnSpc>
+                <a:spcPts val="2900"/>
+              </a:lnSpc>
+              <a:buNone/>
+            </a:pPr>
+            <a:r>
+              <a:rPr lang="en-US" sz="2000" dirty="0">
+                <a:solidFill>
+                  <a:srgbClr val="E8E5DE"/>
+                </a:solidFill>
+                <a:latin typeface="Inter" pitchFamily="34" charset="0"/>
+                <a:ea typeface="Inter" pitchFamily="34" charset="-122"/>
+                <a:cs typeface="Inter" pitchFamily="34" charset="-120"/>
+              </a:rPr>
+              <a:t>Least privilege priced honestly is not free — which is why standing access wins.</a:t>
+            </a:r>
+            <a:endParaRPr lang="en-US" sz="2000" dirty="0"/>
+          </a:p>
+        </p:txBody>
+      </p:sp>
+      <p:sp>
+        <p:nvSpPr>
+          <p:cNvPr id="23" name="Text 21"/>
+          <p:cNvSpPr/>
+          <p:nvPr/>
+        </p:nvSpPr>
+        <p:spPr>
+          <a:xfrm>
+            <a:off x="677098" y="6079331"/>
+            <a:ext cx="5763089" cy="236934"/>
+          </a:xfrm>
+          <a:prstGeom prst="rect">
+            <a:avLst/>
+          </a:prstGeom>
+          <a:noFill/>
+          <a:ln/>
+        </p:spPr>
+        <p:txBody>
+          <a:bodyPr wrap="square" lIns="0" tIns="0" rIns="0" bIns="0" rtlCol="0" anchor="t"/>
+          <a:lstStyle/>
+          <a:p>
+            <a:pPr algn="l" indent="0" marL="0">
+              <a:lnSpc>
+                <a:spcPts val="1866"/>
+              </a:lnSpc>
+              <a:buNone/>
+            </a:pPr>
+            <a:r>
+              <a:rPr lang="en-US" sz="1333" dirty="0">
+                <a:solidFill>
+                  <a:srgbClr val="9AA6BC"/>
+                </a:solidFill>
+                <a:latin typeface="Inter" pitchFamily="34" charset="0"/>
+                <a:ea typeface="Inter" pitchFamily="34" charset="-122"/>
+                <a:cs typeface="Inter" pitchFamily="34" charset="-120"/>
+              </a:rPr>
+              <a:t>SOURCE — none. No figures in this deck; the argument is mechanical.</a:t>
+            </a:r>
+            <a:endParaRPr lang="en-US" sz="1333" dirty="0"/>
+          </a:p>
+        </p:txBody>
+      </p:sp>
+      <p:sp>
+        <p:nvSpPr>
+          <p:cNvPr id="24" name="Text 22"/>
+          <p:cNvSpPr/>
+          <p:nvPr/>
+        </p:nvSpPr>
+        <p:spPr>
+          <a:xfrm>
+            <a:off x="7804381" y="6079331"/>
+            <a:ext cx="3781622" cy="236934"/>
+          </a:xfrm>
+          <a:prstGeom prst="rect">
+            <a:avLst/>
+          </a:prstGeom>
+          <a:noFill/>
+          <a:ln/>
+        </p:spPr>
+        <p:txBody>
+          <a:bodyPr wrap="square" lIns="0" tIns="0" rIns="0" bIns="0" rtlCol="0" anchor="t"/>
+          <a:lstStyle/>
+          <a:p>
+            <a:pPr algn="l" indent="0" marL="0">
+              <a:lnSpc>
+                <a:spcPts val="1866"/>
+              </a:lnSpc>
+              <a:buNone/>
+            </a:pPr>
+            <a:r>
+              <a:rPr lang="en-US" sz="1333" dirty="0">
+                <a:solidFill>
+                  <a:srgbClr val="9AA6BC"/>
+                </a:solidFill>
+                <a:latin typeface="Inter" pitchFamily="34" charset="0"/>
+                <a:ea typeface="Inter" pitchFamily="34" charset="-122"/>
+                <a:cs typeface="Inter" pitchFamily="34" charset="-120"/>
+              </a:rPr>
+              <a:t>INTERNAL DISCUSSION DRAFT · 03 / 06</a:t>
+            </a:r>
+            <a:endParaRPr lang="en-US" sz="1333" dirty="0"/>
+          </a:p>
+        </p:txBody>
+      </p:sp>
     </p:spTree>
   </p:cSld>
   <p:clrMapOvr>
@@ -1446,6 +3963,13 @@
 <file path=ppt/slides/slide4.xml><?xml version="1.0" encoding="utf-8"?>
 <p:sld xmlns:a="http://schemas.openxmlformats.org/drawingml/2006/main" xmlns:r="http://schemas.openxmlformats.org/officeDocument/2006/relationships" xmlns:p="http://schemas.openxmlformats.org/presentationml/2006/main">
   <p:cSld name="Slide 4">
+    <p:bg>
+      <p:bgPr>
+        <a:solidFill>
+          <a:srgbClr val="0A1A33"/>
+        </a:solidFill>
+      </p:bgPr>
+    </p:bg>
     <p:spTree>
       <p:nvGrpSpPr>
         <p:cNvPr id="1" name=""/>
@@ -1460,30 +3984,936 @@
           <a:chExt cx="0" cy="0"/>
         </a:xfrm>
       </p:grpSpPr>
-      <p:pic>
-        <p:nvPicPr>
-          <p:cNvPr id="2" name="Image 0" descr="/tmp/slide-1787840541167-36ue442s4yq.png">    </p:cNvPr>
-          <p:cNvPicPr>
-            <a:picLocks noChangeAspect="1"/>
-          </p:cNvPicPr>
-          <p:nvPr/>
-        </p:nvPicPr>
-        <p:blipFill>
-          <a:blip r:embed="rId1"/>
-          <a:stretch>
-            <a:fillRect/>
-          </a:stretch>
-        </p:blipFill>
-        <p:spPr>
-          <a:xfrm>
-            <a:off x="0" y="0"/>
-            <a:ext cx="12188952" cy="6858000"/>
-          </a:xfrm>
-          <a:prstGeom prst="rect">
-            <a:avLst/>
-          </a:prstGeom>
-        </p:spPr>
-      </p:pic>
+      <p:sp>
+        <p:nvSpPr>
+          <p:cNvPr id="2" name="Text 0"/>
+          <p:cNvSpPr/>
+          <p:nvPr/>
+        </p:nvSpPr>
+        <p:spPr>
+          <a:xfrm>
+            <a:off x="677098" y="541734"/>
+            <a:ext cx="3650294" cy="260747"/>
+          </a:xfrm>
+          <a:prstGeom prst="rect">
+            <a:avLst/>
+          </a:prstGeom>
+          <a:noFill/>
+          <a:ln/>
+        </p:spPr>
+        <p:txBody>
+          <a:bodyPr wrap="square" lIns="0" tIns="0" rIns="0" bIns="0" rtlCol="0" anchor="t"/>
+          <a:lstStyle/>
+          <a:p>
+            <a:pPr algn="l" indent="0" marL="0">
+              <a:lnSpc>
+                <a:spcPts val="2053"/>
+              </a:lnSpc>
+              <a:buNone/>
+            </a:pPr>
+            <a:r>
+              <a:rPr lang="en-US" sz="1466" dirty="0">
+                <a:solidFill>
+                  <a:srgbClr val="9AA6BC"/>
+                </a:solidFill>
+                <a:latin typeface="Inter" pitchFamily="34" charset="0"/>
+                <a:ea typeface="Inter" pitchFamily="34" charset="-122"/>
+                <a:cs typeface="Inter" pitchFamily="34" charset="-120"/>
+              </a:rPr>
+              <a:t>ACCESS GOVERNANCE · INTERNAL</a:t>
+            </a:r>
+            <a:endParaRPr lang="en-US" sz="1466" dirty="0"/>
+          </a:p>
+        </p:txBody>
+      </p:sp>
+      <p:sp>
+        <p:nvSpPr>
+          <p:cNvPr id="3" name="Text 1"/>
+          <p:cNvSpPr/>
+          <p:nvPr/>
+        </p:nvSpPr>
+        <p:spPr>
+          <a:xfrm>
+            <a:off x="8655069" y="541734"/>
+            <a:ext cx="2913921" cy="260747"/>
+          </a:xfrm>
+          <a:prstGeom prst="rect">
+            <a:avLst/>
+          </a:prstGeom>
+          <a:noFill/>
+          <a:ln/>
+        </p:spPr>
+        <p:txBody>
+          <a:bodyPr wrap="square" lIns="0" tIns="0" rIns="0" bIns="0" rtlCol="0" anchor="t"/>
+          <a:lstStyle/>
+          <a:p>
+            <a:pPr algn="l" indent="0" marL="0">
+              <a:lnSpc>
+                <a:spcPts val="2053"/>
+              </a:lnSpc>
+              <a:buNone/>
+            </a:pPr>
+            <a:r>
+              <a:rPr lang="en-US" sz="1466" b="1" dirty="0">
+                <a:solidFill>
+                  <a:srgbClr val="C8A24B"/>
+                </a:solidFill>
+                <a:latin typeface="Inter" pitchFamily="34" charset="0"/>
+                <a:ea typeface="Inter" pitchFamily="34" charset="-122"/>
+                <a:cs typeface="Inter" pitchFamily="34" charset="-120"/>
+              </a:rPr>
+              <a:t>SECTION 03 · THE RECORD</a:t>
+            </a:r>
+            <a:endParaRPr lang="en-US" sz="1466" dirty="0"/>
+          </a:p>
+        </p:txBody>
+      </p:sp>
+      <p:sp>
+        <p:nvSpPr>
+          <p:cNvPr id="4" name="Text 2"/>
+          <p:cNvSpPr/>
+          <p:nvPr/>
+        </p:nvSpPr>
+        <p:spPr>
+          <a:xfrm>
+            <a:off x="677098" y="904081"/>
+            <a:ext cx="11051451" cy="528241"/>
+          </a:xfrm>
+          <a:prstGeom prst="rect">
+            <a:avLst/>
+          </a:prstGeom>
+          <a:noFill/>
+          <a:ln/>
+        </p:spPr>
+        <p:txBody>
+          <a:bodyPr wrap="square" lIns="0" tIns="0" rIns="0" bIns="0" rtlCol="0" anchor="t"/>
+          <a:lstStyle/>
+          <a:p>
+            <a:pPr algn="l" indent="0" marL="0">
+              <a:lnSpc>
+                <a:spcPts val="4159"/>
+              </a:lnSpc>
+              <a:spcBef>
+                <a:spcPts val="800"/>
+              </a:spcBef>
+              <a:buNone/>
+            </a:pPr>
+            <a:r>
+              <a:rPr lang="en-US" sz="3200" b="1" dirty="0">
+                <a:solidFill>
+                  <a:srgbClr val="E8E5DE"/>
+                </a:solidFill>
+                <a:latin typeface="Source Serif 4" pitchFamily="34" charset="0"/>
+                <a:ea typeface="Source Serif 4" pitchFamily="34" charset="-122"/>
+                <a:cs typeface="Source Serif 4" pitchFamily="34" charset="-120"/>
+              </a:rPr>
+              <a:t>What the elevation record has to capture</a:t>
+            </a:r>
+            <a:endParaRPr lang="en-US" sz="3200" dirty="0"/>
+          </a:p>
+        </p:txBody>
+      </p:sp>
+      <p:sp>
+        <p:nvSpPr>
+          <p:cNvPr id="5" name="Text 3"/>
+          <p:cNvSpPr/>
+          <p:nvPr/>
+        </p:nvSpPr>
+        <p:spPr>
+          <a:xfrm>
+            <a:off x="677098" y="1601589"/>
+            <a:ext cx="10834756" cy="8334"/>
+          </a:xfrm>
+          <a:prstGeom prst="rect">
+            <a:avLst/>
+          </a:prstGeom>
+          <a:solidFill>
+            <a:srgbClr val="C8A24B"/>
+          </a:solidFill>
+          <a:ln/>
+        </p:spPr>
+        <p:txBody>
+          <a:bodyPr wrap="square" rtlCol="0" anchor="ctr"/>
+          <a:lstStyle/>
+          <a:p>
+            <a:pPr indent="0" marL="0">
+              <a:buNone/>
+            </a:pPr>
+            <a:endParaRPr lang="en-US" dirty="0"/>
+          </a:p>
+        </p:txBody>
+      </p:sp>
+      <p:sp>
+        <p:nvSpPr>
+          <p:cNvPr id="6" name="Text 4"/>
+          <p:cNvSpPr/>
+          <p:nvPr/>
+        </p:nvSpPr>
+        <p:spPr>
+          <a:xfrm>
+            <a:off x="677098" y="1846858"/>
+            <a:ext cx="5281879" cy="1912938"/>
+          </a:xfrm>
+          <a:prstGeom prst="rect">
+            <a:avLst/>
+          </a:prstGeom>
+          <a:solidFill>
+            <a:srgbClr val="1F3A5F"/>
+          </a:solidFill>
+          <a:ln w="12698">
+            <a:solidFill>
+              <a:srgbClr val="C8A24B"/>
+            </a:solidFill>
+          </a:ln>
+        </p:spPr>
+        <p:txBody>
+          <a:bodyPr wrap="square" rtlCol="0" anchor="ctr"/>
+          <a:lstStyle/>
+          <a:p>
+            <a:pPr indent="0" marL="0">
+              <a:buNone/>
+            </a:pPr>
+            <a:endParaRPr lang="en-US" dirty="0"/>
+          </a:p>
+        </p:txBody>
+      </p:sp>
+      <p:sp>
+        <p:nvSpPr>
+          <p:cNvPr id="7" name="Text 5"/>
+          <p:cNvSpPr/>
+          <p:nvPr/>
+        </p:nvSpPr>
+        <p:spPr>
+          <a:xfrm>
+            <a:off x="859020" y="1994892"/>
+            <a:ext cx="5016397" cy="284361"/>
+          </a:xfrm>
+          <a:prstGeom prst="rect">
+            <a:avLst/>
+          </a:prstGeom>
+          <a:noFill/>
+          <a:ln/>
+        </p:spPr>
+        <p:txBody>
+          <a:bodyPr wrap="square" lIns="0" tIns="0" rIns="0" bIns="0" rtlCol="0" anchor="t"/>
+          <a:lstStyle/>
+          <a:p>
+            <a:pPr algn="l" indent="0" marL="0">
+              <a:lnSpc>
+                <a:spcPts val="2240"/>
+              </a:lnSpc>
+              <a:buNone/>
+            </a:pPr>
+            <a:r>
+              <a:rPr lang="en-US" sz="1600" b="1" dirty="0">
+                <a:solidFill>
+                  <a:srgbClr val="C8A24B"/>
+                </a:solidFill>
+                <a:latin typeface="Inter" pitchFamily="34" charset="0"/>
+                <a:ea typeface="Inter" pitchFamily="34" charset="-122"/>
+                <a:cs typeface="Inter" pitchFamily="34" charset="-120"/>
+              </a:rPr>
+              <a:t>WHO</a:t>
+            </a:r>
+            <a:endParaRPr lang="en-US" sz="1600" dirty="0"/>
+          </a:p>
+        </p:txBody>
+      </p:sp>
+      <p:sp>
+        <p:nvSpPr>
+          <p:cNvPr id="8" name="Text 6"/>
+          <p:cNvSpPr/>
+          <p:nvPr/>
+        </p:nvSpPr>
+        <p:spPr>
+          <a:xfrm>
+            <a:off x="859020" y="2380853"/>
+            <a:ext cx="5016397" cy="379214"/>
+          </a:xfrm>
+          <a:prstGeom prst="rect">
+            <a:avLst/>
+          </a:prstGeom>
+          <a:noFill/>
+          <a:ln/>
+        </p:spPr>
+        <p:txBody>
+          <a:bodyPr wrap="square" lIns="0" tIns="0" rIns="0" bIns="0" rtlCol="0" anchor="t"/>
+          <a:lstStyle/>
+          <a:p>
+            <a:pPr algn="l" indent="0" marL="0">
+              <a:lnSpc>
+                <a:spcPts val="2986"/>
+              </a:lnSpc>
+              <a:spcBef>
+                <a:spcPts val="800"/>
+              </a:spcBef>
+              <a:buNone/>
+            </a:pPr>
+            <a:r>
+              <a:rPr lang="en-US" sz="2133" b="1" dirty="0">
+                <a:solidFill>
+                  <a:srgbClr val="E8E5DE"/>
+                </a:solidFill>
+                <a:latin typeface="Source Serif 4" pitchFamily="34" charset="0"/>
+                <a:ea typeface="Source Serif 4" pitchFamily="34" charset="-122"/>
+                <a:cs typeface="Source Serif 4" pitchFamily="34" charset="-120"/>
+              </a:rPr>
+              <a:t>A named human, not a role</a:t>
+            </a:r>
+            <a:endParaRPr lang="en-US" sz="2133" dirty="0"/>
+          </a:p>
+        </p:txBody>
+      </p:sp>
+      <p:sp>
+        <p:nvSpPr>
+          <p:cNvPr id="9" name="Text 7"/>
+          <p:cNvSpPr/>
+          <p:nvPr/>
+        </p:nvSpPr>
+        <p:spPr>
+          <a:xfrm>
+            <a:off x="859020" y="2861667"/>
+            <a:ext cx="5016397" cy="687388"/>
+          </a:xfrm>
+          <a:prstGeom prst="rect">
+            <a:avLst/>
+          </a:prstGeom>
+          <a:noFill/>
+          <a:ln/>
+        </p:spPr>
+        <p:txBody>
+          <a:bodyPr wrap="square" lIns="0" tIns="0" rIns="0" bIns="0" rtlCol="0" anchor="t"/>
+          <a:lstStyle/>
+          <a:p>
+            <a:pPr algn="l" indent="0" marL="0">
+              <a:lnSpc>
+                <a:spcPts val="2706"/>
+              </a:lnSpc>
+              <a:spcBef>
+                <a:spcPts val="800"/>
+              </a:spcBef>
+              <a:buNone/>
+            </a:pPr>
+            <a:r>
+              <a:rPr lang="en-US" sz="1866" dirty="0">
+                <a:solidFill>
+                  <a:srgbClr val="9AA6BC"/>
+                </a:solidFill>
+                <a:latin typeface="Inter" pitchFamily="34" charset="0"/>
+                <a:ea typeface="Inter" pitchFamily="34" charset="-122"/>
+                <a:cs typeface="Inter" pitchFamily="34" charset="-120"/>
+              </a:rPr>
+              <a:t>A record that names a role names nobody. There is no one left to ask.</a:t>
+            </a:r>
+            <a:endParaRPr lang="en-US" sz="1866" dirty="0"/>
+          </a:p>
+        </p:txBody>
+      </p:sp>
+      <p:sp>
+        <p:nvSpPr>
+          <p:cNvPr id="10" name="Text 8"/>
+          <p:cNvSpPr/>
+          <p:nvPr/>
+        </p:nvSpPr>
+        <p:spPr>
+          <a:xfrm>
+            <a:off x="6229777" y="1846858"/>
+            <a:ext cx="5281879" cy="1912938"/>
+          </a:xfrm>
+          <a:prstGeom prst="rect">
+            <a:avLst/>
+          </a:prstGeom>
+          <a:solidFill>
+            <a:srgbClr val="1F3A5F"/>
+          </a:solidFill>
+          <a:ln w="12698">
+            <a:solidFill>
+              <a:srgbClr val="C8A24B"/>
+            </a:solidFill>
+          </a:ln>
+        </p:spPr>
+        <p:txBody>
+          <a:bodyPr wrap="square" rtlCol="0" anchor="ctr"/>
+          <a:lstStyle/>
+          <a:p>
+            <a:pPr indent="0" marL="0">
+              <a:buNone/>
+            </a:pPr>
+            <a:endParaRPr lang="en-US" dirty="0"/>
+          </a:p>
+        </p:txBody>
+      </p:sp>
+      <p:sp>
+        <p:nvSpPr>
+          <p:cNvPr id="11" name="Text 9"/>
+          <p:cNvSpPr/>
+          <p:nvPr/>
+        </p:nvSpPr>
+        <p:spPr>
+          <a:xfrm>
+            <a:off x="6411698" y="1994892"/>
+            <a:ext cx="5016397" cy="284361"/>
+          </a:xfrm>
+          <a:prstGeom prst="rect">
+            <a:avLst/>
+          </a:prstGeom>
+          <a:noFill/>
+          <a:ln/>
+        </p:spPr>
+        <p:txBody>
+          <a:bodyPr wrap="square" lIns="0" tIns="0" rIns="0" bIns="0" rtlCol="0" anchor="t"/>
+          <a:lstStyle/>
+          <a:p>
+            <a:pPr algn="l" indent="0" marL="0">
+              <a:lnSpc>
+                <a:spcPts val="2240"/>
+              </a:lnSpc>
+              <a:buNone/>
+            </a:pPr>
+            <a:r>
+              <a:rPr lang="en-US" sz="1600" b="1" dirty="0">
+                <a:solidFill>
+                  <a:srgbClr val="C8A24B"/>
+                </a:solidFill>
+                <a:latin typeface="Inter" pitchFamily="34" charset="0"/>
+                <a:ea typeface="Inter" pitchFamily="34" charset="-122"/>
+                <a:cs typeface="Inter" pitchFamily="34" charset="-120"/>
+              </a:rPr>
+              <a:t>WHAT</a:t>
+            </a:r>
+            <a:endParaRPr lang="en-US" sz="1600" dirty="0"/>
+          </a:p>
+        </p:txBody>
+      </p:sp>
+      <p:sp>
+        <p:nvSpPr>
+          <p:cNvPr id="12" name="Text 10"/>
+          <p:cNvSpPr/>
+          <p:nvPr/>
+        </p:nvSpPr>
+        <p:spPr>
+          <a:xfrm>
+            <a:off x="6411698" y="2380853"/>
+            <a:ext cx="5016397" cy="379214"/>
+          </a:xfrm>
+          <a:prstGeom prst="rect">
+            <a:avLst/>
+          </a:prstGeom>
+          <a:noFill/>
+          <a:ln/>
+        </p:spPr>
+        <p:txBody>
+          <a:bodyPr wrap="square" lIns="0" tIns="0" rIns="0" bIns="0" rtlCol="0" anchor="t"/>
+          <a:lstStyle/>
+          <a:p>
+            <a:pPr algn="l" indent="0" marL="0">
+              <a:lnSpc>
+                <a:spcPts val="2986"/>
+              </a:lnSpc>
+              <a:spcBef>
+                <a:spcPts val="800"/>
+              </a:spcBef>
+              <a:buNone/>
+            </a:pPr>
+            <a:r>
+              <a:rPr lang="en-US" sz="2133" b="1" dirty="0">
+                <a:solidFill>
+                  <a:srgbClr val="E8E5DE"/>
+                </a:solidFill>
+                <a:latin typeface="Source Serif 4" pitchFamily="34" charset="0"/>
+                <a:ea typeface="Source Serif 4" pitchFamily="34" charset="-122"/>
+                <a:cs typeface="Source Serif 4" pitchFamily="34" charset="-120"/>
+              </a:rPr>
+              <a:t>The account, role and resource</a:t>
+            </a:r>
+            <a:endParaRPr lang="en-US" sz="2133" dirty="0"/>
+          </a:p>
+        </p:txBody>
+      </p:sp>
+      <p:sp>
+        <p:nvSpPr>
+          <p:cNvPr id="13" name="Text 11"/>
+          <p:cNvSpPr/>
+          <p:nvPr/>
+        </p:nvSpPr>
+        <p:spPr>
+          <a:xfrm>
+            <a:off x="6411698" y="2861667"/>
+            <a:ext cx="5016397" cy="687388"/>
+          </a:xfrm>
+          <a:prstGeom prst="rect">
+            <a:avLst/>
+          </a:prstGeom>
+          <a:noFill/>
+          <a:ln/>
+        </p:spPr>
+        <p:txBody>
+          <a:bodyPr wrap="square" lIns="0" tIns="0" rIns="0" bIns="0" rtlCol="0" anchor="t"/>
+          <a:lstStyle/>
+          <a:p>
+            <a:pPr algn="l" indent="0" marL="0">
+              <a:lnSpc>
+                <a:spcPts val="2706"/>
+              </a:lnSpc>
+              <a:spcBef>
+                <a:spcPts val="800"/>
+              </a:spcBef>
+              <a:buNone/>
+            </a:pPr>
+            <a:r>
+              <a:rPr lang="en-US" sz="1866" dirty="0">
+                <a:solidFill>
+                  <a:srgbClr val="9AA6BC"/>
+                </a:solidFill>
+                <a:latin typeface="Inter" pitchFamily="34" charset="0"/>
+                <a:ea typeface="Inter" pitchFamily="34" charset="-122"/>
+                <a:cs typeface="Inter" pitchFamily="34" charset="-120"/>
+              </a:rPr>
+              <a:t>“Production” is a place, not a scope, and proves only that something</a:t>
+            </a:r>
+            <a:endParaRPr lang="en-US" sz="1866" dirty="0"/>
+          </a:p>
+          <a:p>
+            <a:pPr algn="l" indent="0" marL="0">
+              <a:lnSpc>
+                <a:spcPts val="2706"/>
+              </a:lnSpc>
+              <a:spcBef>
+                <a:spcPts val="800"/>
+              </a:spcBef>
+              <a:buNone/>
+            </a:pPr>
+            <a:r>
+              <a:rPr lang="en-US" sz="1866" dirty="0">
+                <a:solidFill>
+                  <a:srgbClr val="9AA6BC"/>
+                </a:solidFill>
+                <a:latin typeface="Inter" pitchFamily="34" charset="0"/>
+                <a:ea typeface="Inter" pitchFamily="34" charset="-122"/>
+                <a:cs typeface="Inter" pitchFamily="34" charset="-120"/>
+              </a:rPr>
+              <a:t>        happened.</a:t>
+            </a:r>
+            <a:endParaRPr lang="en-US" sz="1866" dirty="0"/>
+          </a:p>
+        </p:txBody>
+      </p:sp>
+      <p:sp>
+        <p:nvSpPr>
+          <p:cNvPr id="14" name="Text 12"/>
+          <p:cNvSpPr/>
+          <p:nvPr/>
+        </p:nvSpPr>
+        <p:spPr>
+          <a:xfrm>
+            <a:off x="677098" y="3962995"/>
+            <a:ext cx="5281879" cy="1913136"/>
+          </a:xfrm>
+          <a:prstGeom prst="rect">
+            <a:avLst/>
+          </a:prstGeom>
+          <a:solidFill>
+            <a:srgbClr val="1F3A5F"/>
+          </a:solidFill>
+          <a:ln w="12698">
+            <a:solidFill>
+              <a:srgbClr val="C8A24B"/>
+            </a:solidFill>
+          </a:ln>
+        </p:spPr>
+        <p:txBody>
+          <a:bodyPr wrap="square" rtlCol="0" anchor="ctr"/>
+          <a:lstStyle/>
+          <a:p>
+            <a:pPr indent="0" marL="0">
+              <a:buNone/>
+            </a:pPr>
+            <a:endParaRPr lang="en-US" dirty="0"/>
+          </a:p>
+        </p:txBody>
+      </p:sp>
+      <p:sp>
+        <p:nvSpPr>
+          <p:cNvPr id="15" name="Text 13"/>
+          <p:cNvSpPr/>
+          <p:nvPr/>
+        </p:nvSpPr>
+        <p:spPr>
+          <a:xfrm>
+            <a:off x="859020" y="4111030"/>
+            <a:ext cx="5016397" cy="284361"/>
+          </a:xfrm>
+          <a:prstGeom prst="rect">
+            <a:avLst/>
+          </a:prstGeom>
+          <a:noFill/>
+          <a:ln/>
+        </p:spPr>
+        <p:txBody>
+          <a:bodyPr wrap="square" lIns="0" tIns="0" rIns="0" bIns="0" rtlCol="0" anchor="t"/>
+          <a:lstStyle/>
+          <a:p>
+            <a:pPr algn="l" indent="0" marL="0">
+              <a:lnSpc>
+                <a:spcPts val="2240"/>
+              </a:lnSpc>
+              <a:buNone/>
+            </a:pPr>
+            <a:r>
+              <a:rPr lang="en-US" sz="1600" b="1" dirty="0">
+                <a:solidFill>
+                  <a:srgbClr val="C8A24B"/>
+                </a:solidFill>
+                <a:latin typeface="Inter" pitchFamily="34" charset="0"/>
+                <a:ea typeface="Inter" pitchFamily="34" charset="-122"/>
+                <a:cs typeface="Inter" pitchFamily="34" charset="-120"/>
+              </a:rPr>
+              <a:t>WHY</a:t>
+            </a:r>
+            <a:endParaRPr lang="en-US" sz="1600" dirty="0"/>
+          </a:p>
+        </p:txBody>
+      </p:sp>
+      <p:sp>
+        <p:nvSpPr>
+          <p:cNvPr id="16" name="Text 14"/>
+          <p:cNvSpPr/>
+          <p:nvPr/>
+        </p:nvSpPr>
+        <p:spPr>
+          <a:xfrm>
+            <a:off x="859020" y="4496991"/>
+            <a:ext cx="5016397" cy="379214"/>
+          </a:xfrm>
+          <a:prstGeom prst="rect">
+            <a:avLst/>
+          </a:prstGeom>
+          <a:noFill/>
+          <a:ln/>
+        </p:spPr>
+        <p:txBody>
+          <a:bodyPr wrap="square" lIns="0" tIns="0" rIns="0" bIns="0" rtlCol="0" anchor="t"/>
+          <a:lstStyle/>
+          <a:p>
+            <a:pPr algn="l" indent="0" marL="0">
+              <a:lnSpc>
+                <a:spcPts val="2986"/>
+              </a:lnSpc>
+              <a:spcBef>
+                <a:spcPts val="800"/>
+              </a:spcBef>
+              <a:buNone/>
+            </a:pPr>
+            <a:r>
+              <a:rPr lang="en-US" sz="2133" b="1" dirty="0">
+                <a:solidFill>
+                  <a:srgbClr val="E8E5DE"/>
+                </a:solidFill>
+                <a:latin typeface="Source Serif 4" pitchFamily="34" charset="0"/>
+                <a:ea typeface="Source Serif 4" pitchFamily="34" charset="-122"/>
+                <a:cs typeface="Source Serif 4" pitchFamily="34" charset="-120"/>
+              </a:rPr>
+              <a:t>The ticket, written first</a:t>
+            </a:r>
+            <a:endParaRPr lang="en-US" sz="2133" dirty="0"/>
+          </a:p>
+        </p:txBody>
+      </p:sp>
+      <p:sp>
+        <p:nvSpPr>
+          <p:cNvPr id="17" name="Text 15"/>
+          <p:cNvSpPr/>
+          <p:nvPr/>
+        </p:nvSpPr>
+        <p:spPr>
+          <a:xfrm>
+            <a:off x="859020" y="4977805"/>
+            <a:ext cx="5016397" cy="687388"/>
+          </a:xfrm>
+          <a:prstGeom prst="rect">
+            <a:avLst/>
+          </a:prstGeom>
+          <a:noFill/>
+          <a:ln/>
+        </p:spPr>
+        <p:txBody>
+          <a:bodyPr wrap="square" lIns="0" tIns="0" rIns="0" bIns="0" rtlCol="0" anchor="t"/>
+          <a:lstStyle/>
+          <a:p>
+            <a:pPr algn="l" indent="0" marL="0">
+              <a:lnSpc>
+                <a:spcPts val="2706"/>
+              </a:lnSpc>
+              <a:spcBef>
+                <a:spcPts val="800"/>
+              </a:spcBef>
+              <a:buNone/>
+            </a:pPr>
+            <a:r>
+              <a:rPr lang="en-US" sz="1866" dirty="0">
+                <a:solidFill>
+                  <a:srgbClr val="9AA6BC"/>
+                </a:solidFill>
+                <a:latin typeface="Inter" pitchFamily="34" charset="0"/>
+                <a:ea typeface="Inter" pitchFamily="34" charset="-122"/>
+                <a:cs typeface="Inter" pitchFamily="34" charset="-120"/>
+              </a:rPr>
+              <a:t>A reason given afterwards is a reason invented afterwards.</a:t>
+            </a:r>
+            <a:endParaRPr lang="en-US" sz="1866" dirty="0"/>
+          </a:p>
+        </p:txBody>
+      </p:sp>
+      <p:sp>
+        <p:nvSpPr>
+          <p:cNvPr id="18" name="Text 16"/>
+          <p:cNvSpPr/>
+          <p:nvPr/>
+        </p:nvSpPr>
+        <p:spPr>
+          <a:xfrm>
+            <a:off x="6229777" y="3962995"/>
+            <a:ext cx="5281879" cy="1913136"/>
+          </a:xfrm>
+          <a:prstGeom prst="rect">
+            <a:avLst/>
+          </a:prstGeom>
+          <a:solidFill>
+            <a:srgbClr val="1F3A5F"/>
+          </a:solidFill>
+          <a:ln w="12698">
+            <a:solidFill>
+              <a:srgbClr val="C8A24B"/>
+            </a:solidFill>
+          </a:ln>
+        </p:spPr>
+        <p:txBody>
+          <a:bodyPr wrap="square" rtlCol="0" anchor="ctr"/>
+          <a:lstStyle/>
+          <a:p>
+            <a:pPr indent="0" marL="0">
+              <a:buNone/>
+            </a:pPr>
+            <a:endParaRPr lang="en-US" dirty="0"/>
+          </a:p>
+        </p:txBody>
+      </p:sp>
+      <p:sp>
+        <p:nvSpPr>
+          <p:cNvPr id="19" name="Text 17"/>
+          <p:cNvSpPr/>
+          <p:nvPr/>
+        </p:nvSpPr>
+        <p:spPr>
+          <a:xfrm>
+            <a:off x="6411698" y="4111030"/>
+            <a:ext cx="5016397" cy="284361"/>
+          </a:xfrm>
+          <a:prstGeom prst="rect">
+            <a:avLst/>
+          </a:prstGeom>
+          <a:noFill/>
+          <a:ln/>
+        </p:spPr>
+        <p:txBody>
+          <a:bodyPr wrap="square" lIns="0" tIns="0" rIns="0" bIns="0" rtlCol="0" anchor="t"/>
+          <a:lstStyle/>
+          <a:p>
+            <a:pPr algn="l" indent="0" marL="0">
+              <a:lnSpc>
+                <a:spcPts val="2240"/>
+              </a:lnSpc>
+              <a:buNone/>
+            </a:pPr>
+            <a:r>
+              <a:rPr lang="en-US" sz="1600" b="1" dirty="0">
+                <a:solidFill>
+                  <a:srgbClr val="C8A24B"/>
+                </a:solidFill>
+                <a:latin typeface="Inter" pitchFamily="34" charset="0"/>
+                <a:ea typeface="Inter" pitchFamily="34" charset="-122"/>
+                <a:cs typeface="Inter" pitchFamily="34" charset="-120"/>
+              </a:rPr>
+              <a:t>WHEN IT LAPSED</a:t>
+            </a:r>
+            <a:endParaRPr lang="en-US" sz="1600" dirty="0"/>
+          </a:p>
+        </p:txBody>
+      </p:sp>
+      <p:sp>
+        <p:nvSpPr>
+          <p:cNvPr id="20" name="Text 18"/>
+          <p:cNvSpPr/>
+          <p:nvPr/>
+        </p:nvSpPr>
+        <p:spPr>
+          <a:xfrm>
+            <a:off x="6411698" y="4496991"/>
+            <a:ext cx="5016397" cy="379214"/>
+          </a:xfrm>
+          <a:prstGeom prst="rect">
+            <a:avLst/>
+          </a:prstGeom>
+          <a:noFill/>
+          <a:ln/>
+        </p:spPr>
+        <p:txBody>
+          <a:bodyPr wrap="square" lIns="0" tIns="0" rIns="0" bIns="0" rtlCol="0" anchor="t"/>
+          <a:lstStyle/>
+          <a:p>
+            <a:pPr algn="l" indent="0" marL="0">
+              <a:lnSpc>
+                <a:spcPts val="2986"/>
+              </a:lnSpc>
+              <a:spcBef>
+                <a:spcPts val="800"/>
+              </a:spcBef>
+              <a:buNone/>
+            </a:pPr>
+            <a:r>
+              <a:rPr lang="en-US" sz="2133" b="1" dirty="0">
+                <a:solidFill>
+                  <a:srgbClr val="E8E5DE"/>
+                </a:solidFill>
+                <a:latin typeface="Source Serif 4" pitchFamily="34" charset="0"/>
+                <a:ea typeface="Source Serif 4" pitchFamily="34" charset="-122"/>
+                <a:cs typeface="Source Serif 4" pitchFamily="34" charset="-120"/>
+              </a:rPr>
+              <a:t>The expiry, and who ended it</a:t>
+            </a:r>
+            <a:endParaRPr lang="en-US" sz="2133" dirty="0"/>
+          </a:p>
+        </p:txBody>
+      </p:sp>
+      <p:sp>
+        <p:nvSpPr>
+          <p:cNvPr id="21" name="Text 19"/>
+          <p:cNvSpPr/>
+          <p:nvPr/>
+        </p:nvSpPr>
+        <p:spPr>
+          <a:xfrm>
+            <a:off x="6411698" y="4977805"/>
+            <a:ext cx="5016397" cy="687388"/>
+          </a:xfrm>
+          <a:prstGeom prst="rect">
+            <a:avLst/>
+          </a:prstGeom>
+          <a:noFill/>
+          <a:ln/>
+        </p:spPr>
+        <p:txBody>
+          <a:bodyPr wrap="square" lIns="0" tIns="0" rIns="0" bIns="0" rtlCol="0" anchor="t"/>
+          <a:lstStyle/>
+          <a:p>
+            <a:pPr algn="l" indent="0" marL="0">
+              <a:lnSpc>
+                <a:spcPts val="2706"/>
+              </a:lnSpc>
+              <a:spcBef>
+                <a:spcPts val="800"/>
+              </a:spcBef>
+              <a:buNone/>
+            </a:pPr>
+            <a:r>
+              <a:rPr lang="en-US" sz="1866" dirty="0">
+                <a:solidFill>
+                  <a:srgbClr val="9AA6BC"/>
+                </a:solidFill>
+                <a:latin typeface="Inter" pitchFamily="34" charset="0"/>
+                <a:ea typeface="Inter" pitchFamily="34" charset="-122"/>
+                <a:cs typeface="Inter" pitchFamily="34" charset="-120"/>
+              </a:rPr>
+              <a:t>A grant with no observed end is standing access with a form attached.</a:t>
+            </a:r>
+            <a:endParaRPr lang="en-US" sz="1866" dirty="0"/>
+          </a:p>
+        </p:txBody>
+      </p:sp>
+      <p:sp>
+        <p:nvSpPr>
+          <p:cNvPr id="22" name="Text 20"/>
+          <p:cNvSpPr/>
+          <p:nvPr/>
+        </p:nvSpPr>
+        <p:spPr>
+          <a:xfrm>
+            <a:off x="677098" y="6079331"/>
+            <a:ext cx="5763089" cy="236934"/>
+          </a:xfrm>
+          <a:prstGeom prst="rect">
+            <a:avLst/>
+          </a:prstGeom>
+          <a:noFill/>
+          <a:ln/>
+        </p:spPr>
+        <p:txBody>
+          <a:bodyPr wrap="square" lIns="0" tIns="0" rIns="0" bIns="0" rtlCol="0" anchor="t"/>
+          <a:lstStyle/>
+          <a:p>
+            <a:pPr algn="l" indent="0" marL="0">
+              <a:lnSpc>
+                <a:spcPts val="1866"/>
+              </a:lnSpc>
+              <a:buNone/>
+            </a:pPr>
+            <a:r>
+              <a:rPr lang="en-US" sz="1333" dirty="0">
+                <a:solidFill>
+                  <a:srgbClr val="9AA6BC"/>
+                </a:solidFill>
+                <a:latin typeface="Inter" pitchFamily="34" charset="0"/>
+                <a:ea typeface="Inter" pitchFamily="34" charset="-122"/>
+                <a:cs typeface="Inter" pitchFamily="34" charset="-120"/>
+              </a:rPr>
+              <a:t>SOURCE — none. No figures in this deck; the argument is mechanical.</a:t>
+            </a:r>
+            <a:endParaRPr lang="en-US" sz="1333" dirty="0"/>
+          </a:p>
+        </p:txBody>
+      </p:sp>
+      <p:sp>
+        <p:nvSpPr>
+          <p:cNvPr id="23" name="Text 21"/>
+          <p:cNvSpPr/>
+          <p:nvPr/>
+        </p:nvSpPr>
+        <p:spPr>
+          <a:xfrm>
+            <a:off x="7791684" y="6079331"/>
+            <a:ext cx="3794573" cy="236934"/>
+          </a:xfrm>
+          <a:prstGeom prst="rect">
+            <a:avLst/>
+          </a:prstGeom>
+          <a:noFill/>
+          <a:ln/>
+        </p:spPr>
+        <p:txBody>
+          <a:bodyPr wrap="square" lIns="0" tIns="0" rIns="0" bIns="0" rtlCol="0" anchor="t"/>
+          <a:lstStyle/>
+          <a:p>
+            <a:pPr algn="l" indent="0" marL="0">
+              <a:lnSpc>
+                <a:spcPts val="1866"/>
+              </a:lnSpc>
+              <a:buNone/>
+            </a:pPr>
+            <a:r>
+              <a:rPr lang="en-US" sz="1333" dirty="0">
+                <a:solidFill>
+                  <a:srgbClr val="9AA6BC"/>
+                </a:solidFill>
+                <a:latin typeface="Inter" pitchFamily="34" charset="0"/>
+                <a:ea typeface="Inter" pitchFamily="34" charset="-122"/>
+                <a:cs typeface="Inter" pitchFamily="34" charset="-120"/>
+              </a:rPr>
+              <a:t>INTERNAL DISCUSSION DRAFT · 04 / 06</a:t>
+            </a:r>
+            <a:endParaRPr lang="en-US" sz="1333" dirty="0"/>
+          </a:p>
+        </p:txBody>
+      </p:sp>
     </p:spTree>
   </p:cSld>
   <p:clrMapOvr>
@@ -1495,6 +4925,13 @@
 <file path=ppt/slides/slide5.xml><?xml version="1.0" encoding="utf-8"?>
 <p:sld xmlns:a="http://schemas.openxmlformats.org/drawingml/2006/main" xmlns:r="http://schemas.openxmlformats.org/officeDocument/2006/relationships" xmlns:p="http://schemas.openxmlformats.org/presentationml/2006/main">
   <p:cSld name="Slide 5">
+    <p:bg>
+      <p:bgPr>
+        <a:solidFill>
+          <a:srgbClr val="0A1A33"/>
+        </a:solidFill>
+      </p:bgPr>
+    </p:bg>
     <p:spTree>
       <p:nvGrpSpPr>
         <p:cNvPr id="1" name=""/>
@@ -1509,30 +4946,1062 @@
           <a:chExt cx="0" cy="0"/>
         </a:xfrm>
       </p:grpSpPr>
+      <p:sp>
+        <p:nvSpPr>
+          <p:cNvPr id="2" name="Text 0"/>
+          <p:cNvSpPr/>
+          <p:nvPr/>
+        </p:nvSpPr>
+        <p:spPr>
+          <a:xfrm>
+            <a:off x="677098" y="541734"/>
+            <a:ext cx="3650294" cy="260747"/>
+          </a:xfrm>
+          <a:prstGeom prst="rect">
+            <a:avLst/>
+          </a:prstGeom>
+          <a:noFill/>
+          <a:ln/>
+        </p:spPr>
+        <p:txBody>
+          <a:bodyPr wrap="square" lIns="0" tIns="0" rIns="0" bIns="0" rtlCol="0" anchor="t"/>
+          <a:lstStyle/>
+          <a:p>
+            <a:pPr algn="l" indent="0" marL="0">
+              <a:lnSpc>
+                <a:spcPts val="2053"/>
+              </a:lnSpc>
+              <a:buNone/>
+            </a:pPr>
+            <a:r>
+              <a:rPr lang="en-US" sz="1466" dirty="0">
+                <a:solidFill>
+                  <a:srgbClr val="9AA6BC"/>
+                </a:solidFill>
+                <a:latin typeface="Inter" pitchFamily="34" charset="0"/>
+                <a:ea typeface="Inter" pitchFamily="34" charset="-122"/>
+                <a:cs typeface="Inter" pitchFamily="34" charset="-120"/>
+              </a:rPr>
+              <a:t>ACCESS GOVERNANCE · INTERNAL</a:t>
+            </a:r>
+            <a:endParaRPr lang="en-US" sz="1466" dirty="0"/>
+          </a:p>
+        </p:txBody>
+      </p:sp>
+      <p:sp>
+        <p:nvSpPr>
+          <p:cNvPr id="3" name="Text 1"/>
+          <p:cNvSpPr/>
+          <p:nvPr/>
+        </p:nvSpPr>
+        <p:spPr>
+          <a:xfrm>
+            <a:off x="8938962" y="541734"/>
+            <a:ext cx="2624350" cy="260747"/>
+          </a:xfrm>
+          <a:prstGeom prst="rect">
+            <a:avLst/>
+          </a:prstGeom>
+          <a:noFill/>
+          <a:ln/>
+        </p:spPr>
+        <p:txBody>
+          <a:bodyPr wrap="square" lIns="0" tIns="0" rIns="0" bIns="0" rtlCol="0" anchor="t"/>
+          <a:lstStyle/>
+          <a:p>
+            <a:pPr algn="l" indent="0" marL="0">
+              <a:lnSpc>
+                <a:spcPts val="2053"/>
+              </a:lnSpc>
+              <a:buNone/>
+            </a:pPr>
+            <a:r>
+              <a:rPr lang="en-US" sz="1466" b="1" dirty="0">
+                <a:solidFill>
+                  <a:srgbClr val="C8A24B"/>
+                </a:solidFill>
+                <a:latin typeface="Inter" pitchFamily="34" charset="0"/>
+                <a:ea typeface="Inter" pitchFamily="34" charset="-122"/>
+                <a:cs typeface="Inter" pitchFamily="34" charset="-120"/>
+              </a:rPr>
+              <a:t>SECTION 04 · THE READ</a:t>
+            </a:r>
+            <a:endParaRPr lang="en-US" sz="1466" dirty="0"/>
+          </a:p>
+        </p:txBody>
+      </p:sp>
+      <p:sp>
+        <p:nvSpPr>
+          <p:cNvPr id="4" name="Text 2"/>
+          <p:cNvSpPr/>
+          <p:nvPr/>
+        </p:nvSpPr>
+        <p:spPr>
+          <a:xfrm>
+            <a:off x="677098" y="904081"/>
+            <a:ext cx="11051451" cy="528241"/>
+          </a:xfrm>
+          <a:prstGeom prst="rect">
+            <a:avLst/>
+          </a:prstGeom>
+          <a:noFill/>
+          <a:ln/>
+        </p:spPr>
+        <p:txBody>
+          <a:bodyPr wrap="square" lIns="0" tIns="0" rIns="0" bIns="0" rtlCol="0" anchor="t"/>
+          <a:lstStyle/>
+          <a:p>
+            <a:pPr algn="l" indent="0" marL="0">
+              <a:lnSpc>
+                <a:spcPts val="4159"/>
+              </a:lnSpc>
+              <a:spcBef>
+                <a:spcPts val="800"/>
+              </a:spcBef>
+              <a:buNone/>
+            </a:pPr>
+            <a:r>
+              <a:rPr lang="en-US" sz="3200" b="1" dirty="0">
+                <a:solidFill>
+                  <a:srgbClr val="E8E5DE"/>
+                </a:solidFill>
+                <a:latin typeface="Source Serif 4" pitchFamily="34" charset="0"/>
+                <a:ea typeface="Source Serif 4" pitchFamily="34" charset="-122"/>
+                <a:cs typeface="Source Serif 4" pitchFamily="34" charset="-120"/>
+              </a:rPr>
+              <a:t>A record nobody reads is not a record</a:t>
+            </a:r>
+            <a:endParaRPr lang="en-US" sz="3200" dirty="0"/>
+          </a:p>
+        </p:txBody>
+      </p:sp>
+      <p:sp>
+        <p:nvSpPr>
+          <p:cNvPr id="5" name="Text 3"/>
+          <p:cNvSpPr/>
+          <p:nvPr/>
+        </p:nvSpPr>
+        <p:spPr>
+          <a:xfrm>
+            <a:off x="677098" y="1601589"/>
+            <a:ext cx="10834756" cy="8334"/>
+          </a:xfrm>
+          <a:prstGeom prst="rect">
+            <a:avLst/>
+          </a:prstGeom>
+          <a:solidFill>
+            <a:srgbClr val="C8A24B"/>
+          </a:solidFill>
+          <a:ln/>
+        </p:spPr>
+        <p:txBody>
+          <a:bodyPr wrap="square" rtlCol="0" anchor="ctr"/>
+          <a:lstStyle/>
+          <a:p>
+            <a:pPr indent="0" marL="0">
+              <a:buNone/>
+            </a:pPr>
+            <a:endParaRPr lang="en-US" dirty="0"/>
+          </a:p>
+        </p:txBody>
+      </p:sp>
+      <p:sp>
+        <p:nvSpPr>
+          <p:cNvPr id="6" name="Text 4"/>
+          <p:cNvSpPr/>
+          <p:nvPr/>
+        </p:nvSpPr>
+        <p:spPr>
+          <a:xfrm>
+            <a:off x="677098" y="1846858"/>
+            <a:ext cx="3385688" cy="2930525"/>
+          </a:xfrm>
+          <a:prstGeom prst="rect">
+            <a:avLst/>
+          </a:prstGeom>
+          <a:solidFill>
+            <a:srgbClr val="1F3A5F"/>
+          </a:solidFill>
+          <a:ln w="12698">
+            <a:solidFill>
+              <a:srgbClr val="C8A24B"/>
+            </a:solidFill>
+          </a:ln>
+        </p:spPr>
+        <p:txBody>
+          <a:bodyPr wrap="square" rtlCol="0" anchor="ctr"/>
+          <a:lstStyle/>
+          <a:p>
+            <a:pPr indent="0" marL="0">
+              <a:buNone/>
+            </a:pPr>
+            <a:endParaRPr lang="en-US" dirty="0"/>
+          </a:p>
+        </p:txBody>
+      </p:sp>
+      <p:sp>
+        <p:nvSpPr>
+          <p:cNvPr id="7" name="Text 5"/>
+          <p:cNvSpPr/>
+          <p:nvPr/>
+        </p:nvSpPr>
+        <p:spPr>
+          <a:xfrm>
+            <a:off x="892944" y="2062758"/>
+            <a:ext cx="3013076" cy="260747"/>
+          </a:xfrm>
+          <a:prstGeom prst="rect">
+            <a:avLst/>
+          </a:prstGeom>
+          <a:noFill/>
+          <a:ln/>
+        </p:spPr>
+        <p:txBody>
+          <a:bodyPr wrap="square" lIns="0" tIns="0" rIns="0" bIns="0" rtlCol="0" anchor="t"/>
+          <a:lstStyle/>
+          <a:p>
+            <a:pPr algn="l" indent="0" marL="0">
+              <a:lnSpc>
+                <a:spcPts val="2053"/>
+              </a:lnSpc>
+              <a:buNone/>
+            </a:pPr>
+            <a:r>
+              <a:rPr lang="en-US" sz="1466" b="1" dirty="0">
+                <a:solidFill>
+                  <a:srgbClr val="C8A24B"/>
+                </a:solidFill>
+                <a:latin typeface="Inter" pitchFamily="34" charset="0"/>
+                <a:ea typeface="Inter" pitchFamily="34" charset="-122"/>
+                <a:cs typeface="Inter" pitchFamily="34" charset="-120"/>
+              </a:rPr>
+              <a:t>A NAMED READER</a:t>
+            </a:r>
+            <a:endParaRPr lang="en-US" sz="1466" dirty="0"/>
+          </a:p>
+        </p:txBody>
+      </p:sp>
+      <p:sp>
+        <p:nvSpPr>
+          <p:cNvPr id="8" name="Text 6"/>
+          <p:cNvSpPr/>
+          <p:nvPr/>
+        </p:nvSpPr>
+        <p:spPr>
+          <a:xfrm>
+            <a:off x="892944" y="2425105"/>
+            <a:ext cx="3013076" cy="758428"/>
+          </a:xfrm>
+          <a:prstGeom prst="rect">
+            <a:avLst/>
+          </a:prstGeom>
+          <a:noFill/>
+          <a:ln/>
+        </p:spPr>
+        <p:txBody>
+          <a:bodyPr wrap="square" lIns="0" tIns="0" rIns="0" bIns="0" rtlCol="0" anchor="t"/>
+          <a:lstStyle/>
+          <a:p>
+            <a:pPr algn="l" indent="0" marL="0">
+              <a:lnSpc>
+                <a:spcPts val="2986"/>
+              </a:lnSpc>
+              <a:spcBef>
+                <a:spcPts val="800"/>
+              </a:spcBef>
+              <a:buNone/>
+            </a:pPr>
+            <a:r>
+              <a:rPr lang="en-US" sz="2133" dirty="0">
+                <a:solidFill>
+                  <a:srgbClr val="E8E5DE"/>
+                </a:solidFill>
+                <a:latin typeface="Source Serif 4" pitchFamily="34" charset="0"/>
+                <a:ea typeface="Source Serif 4" pitchFamily="34" charset="-122"/>
+                <a:cs typeface="Source Serif 4" pitchFamily="34" charset="-120"/>
+              </a:rPr>
+              <a:t>“Someone reviews it”</a:t>
+            </a:r>
+            <a:endParaRPr lang="en-US" sz="2133" dirty="0"/>
+          </a:p>
+          <a:p>
+            <a:pPr algn="l" indent="0" marL="0">
+              <a:lnSpc>
+                <a:spcPts val="2986"/>
+              </a:lnSpc>
+              <a:spcBef>
+                <a:spcPts val="800"/>
+              </a:spcBef>
+              <a:buNone/>
+            </a:pPr>
+            <a:r>
+              <a:rPr lang="en-US" sz="2133" dirty="0">
+                <a:solidFill>
+                  <a:srgbClr val="E8E5DE"/>
+                </a:solidFill>
+                <a:latin typeface="Source Serif 4" pitchFamily="34" charset="0"/>
+                <a:ea typeface="Source Serif 4" pitchFamily="34" charset="-122"/>
+                <a:cs typeface="Source Serif 4" pitchFamily="34" charset="-120"/>
+              </a:rPr>
+              <a:t>means no one does</a:t>
+            </a:r>
+            <a:endParaRPr lang="en-US" sz="2133" dirty="0"/>
+          </a:p>
+        </p:txBody>
+      </p:sp>
+      <p:sp>
+        <p:nvSpPr>
+          <p:cNvPr id="9" name="Text 7"/>
+          <p:cNvSpPr/>
+          <p:nvPr/>
+        </p:nvSpPr>
+        <p:spPr>
+          <a:xfrm>
+            <a:off x="892944" y="3352800"/>
+            <a:ext cx="2953996" cy="8334"/>
+          </a:xfrm>
+          <a:prstGeom prst="rect">
+            <a:avLst/>
+          </a:prstGeom>
+          <a:solidFill>
+            <a:srgbClr val="C8A24B"/>
+          </a:solidFill>
+          <a:ln/>
+        </p:spPr>
+        <p:txBody>
+          <a:bodyPr wrap="square" rtlCol="0" anchor="ctr"/>
+          <a:lstStyle/>
+          <a:p>
+            <a:pPr indent="0" marL="0">
+              <a:buNone/>
+            </a:pPr>
+            <a:endParaRPr lang="en-US" dirty="0"/>
+          </a:p>
+        </p:txBody>
+      </p:sp>
+      <p:sp>
+        <p:nvSpPr>
+          <p:cNvPr id="10" name="Text 8"/>
+          <p:cNvSpPr/>
+          <p:nvPr/>
+        </p:nvSpPr>
+        <p:spPr>
+          <a:xfrm>
+            <a:off x="892944" y="3530402"/>
+            <a:ext cx="3013076" cy="1031081"/>
+          </a:xfrm>
+          <a:prstGeom prst="rect">
+            <a:avLst/>
+          </a:prstGeom>
+          <a:noFill/>
+          <a:ln/>
+        </p:spPr>
+        <p:txBody>
+          <a:bodyPr wrap="square" lIns="0" tIns="0" rIns="0" bIns="0" rtlCol="0" anchor="t"/>
+          <a:lstStyle/>
+          <a:p>
+            <a:pPr algn="l" indent="0" marL="0">
+              <a:lnSpc>
+                <a:spcPts val="2706"/>
+              </a:lnSpc>
+              <a:buNone/>
+            </a:pPr>
+            <a:r>
+              <a:rPr lang="en-US" sz="1866" dirty="0">
+                <a:solidFill>
+                  <a:srgbClr val="E8E5DE"/>
+                </a:solidFill>
+                <a:latin typeface="Inter" pitchFamily="34" charset="0"/>
+                <a:ea typeface="Inter" pitchFamily="34" charset="-122"/>
+                <a:cs typeface="Inter" pitchFamily="34" charset="-120"/>
+              </a:rPr>
+              <a:t>A review that belongs to everyone is always about to happen.</a:t>
+            </a:r>
+            <a:endParaRPr lang="en-US" sz="1866" dirty="0"/>
+          </a:p>
+        </p:txBody>
+      </p:sp>
       <p:pic>
         <p:nvPicPr>
-          <p:cNvPr id="2" name="Image 0" descr="/tmp/slide-1787840541436-adb11ivxdx.png">    </p:cNvPr>
+          <p:cNvPr id="11" name="Image 0" descr="preencoded.png">    </p:cNvPr>
           <p:cNvPicPr>
             <a:picLocks noChangeAspect="1"/>
           </p:cNvPicPr>
           <p:nvPr/>
         </p:nvPicPr>
         <p:blipFill>
-          <a:blip r:embed="rId1"/>
+          <a:blip r:embed="rId1">
+            <a:extLst>
+              <a:ext uri="{96DAC541-7B7A-43D3-8B79-37D633B846F1}">
+                <asvg:svgBlip xmlns:asvg="http://schemas.microsoft.com/office/drawing/2016/SVG/main" r:embed="rId2"/>
+              </a:ext>
+            </a:extLst>
+          </a:blip>
           <a:stretch>
             <a:fillRect/>
           </a:stretch>
         </p:blipFill>
         <p:spPr>
           <a:xfrm>
-            <a:off x="0" y="0"/>
-            <a:ext cx="12188952" cy="6858000"/>
+            <a:off x="4174875" y="3223220"/>
+            <a:ext cx="114271" cy="177800"/>
           </a:xfrm>
           <a:prstGeom prst="rect">
             <a:avLst/>
           </a:prstGeom>
         </p:spPr>
       </p:pic>
+      <p:sp>
+        <p:nvSpPr>
+          <p:cNvPr id="12" name="Text 9"/>
+          <p:cNvSpPr/>
+          <p:nvPr/>
+        </p:nvSpPr>
+        <p:spPr>
+          <a:xfrm>
+            <a:off x="4401235" y="1846858"/>
+            <a:ext cx="3385688" cy="2930525"/>
+          </a:xfrm>
+          <a:prstGeom prst="rect">
+            <a:avLst/>
+          </a:prstGeom>
+          <a:solidFill>
+            <a:srgbClr val="1F3A5F"/>
+          </a:solidFill>
+          <a:ln w="12698">
+            <a:solidFill>
+              <a:srgbClr val="C8A24B"/>
+            </a:solidFill>
+          </a:ln>
+        </p:spPr>
+        <p:txBody>
+          <a:bodyPr wrap="square" rtlCol="0" anchor="ctr"/>
+          <a:lstStyle/>
+          <a:p>
+            <a:pPr indent="0" marL="0">
+              <a:buNone/>
+            </a:pPr>
+            <a:endParaRPr lang="en-US" dirty="0"/>
+          </a:p>
+        </p:txBody>
+      </p:sp>
+      <p:sp>
+        <p:nvSpPr>
+          <p:cNvPr id="13" name="Text 10"/>
+          <p:cNvSpPr/>
+          <p:nvPr/>
+        </p:nvSpPr>
+        <p:spPr>
+          <a:xfrm>
+            <a:off x="4617081" y="2062758"/>
+            <a:ext cx="3013076" cy="260747"/>
+          </a:xfrm>
+          <a:prstGeom prst="rect">
+            <a:avLst/>
+          </a:prstGeom>
+          <a:noFill/>
+          <a:ln/>
+        </p:spPr>
+        <p:txBody>
+          <a:bodyPr wrap="square" lIns="0" tIns="0" rIns="0" bIns="0" rtlCol="0" anchor="t"/>
+          <a:lstStyle/>
+          <a:p>
+            <a:pPr algn="l" indent="0" marL="0">
+              <a:lnSpc>
+                <a:spcPts val="2053"/>
+              </a:lnSpc>
+              <a:buNone/>
+            </a:pPr>
+            <a:r>
+              <a:rPr lang="en-US" sz="1466" b="1" dirty="0">
+                <a:solidFill>
+                  <a:srgbClr val="C8A24B"/>
+                </a:solidFill>
+                <a:latin typeface="Inter" pitchFamily="34" charset="0"/>
+                <a:ea typeface="Inter" pitchFamily="34" charset="-122"/>
+                <a:cs typeface="Inter" pitchFamily="34" charset="-120"/>
+              </a:rPr>
+              <a:t>A FIXED CADENCE</a:t>
+            </a:r>
+            <a:endParaRPr lang="en-US" sz="1466" dirty="0"/>
+          </a:p>
+        </p:txBody>
+      </p:sp>
+      <p:sp>
+        <p:nvSpPr>
+          <p:cNvPr id="14" name="Text 11"/>
+          <p:cNvSpPr/>
+          <p:nvPr/>
+        </p:nvSpPr>
+        <p:spPr>
+          <a:xfrm>
+            <a:off x="4617081" y="2425105"/>
+            <a:ext cx="3013076" cy="758428"/>
+          </a:xfrm>
+          <a:prstGeom prst="rect">
+            <a:avLst/>
+          </a:prstGeom>
+          <a:noFill/>
+          <a:ln/>
+        </p:spPr>
+        <p:txBody>
+          <a:bodyPr wrap="square" lIns="0" tIns="0" rIns="0" bIns="0" rtlCol="0" anchor="t"/>
+          <a:lstStyle/>
+          <a:p>
+            <a:pPr algn="l" indent="0" marL="0">
+              <a:lnSpc>
+                <a:spcPts val="2986"/>
+              </a:lnSpc>
+              <a:spcBef>
+                <a:spcPts val="800"/>
+              </a:spcBef>
+              <a:buNone/>
+            </a:pPr>
+            <a:r>
+              <a:rPr lang="en-US" sz="2133" dirty="0">
+                <a:solidFill>
+                  <a:srgbClr val="E8E5DE"/>
+                </a:solidFill>
+                <a:latin typeface="Source Serif 4" pitchFamily="34" charset="0"/>
+                <a:ea typeface="Source Serif 4" pitchFamily="34" charset="-122"/>
+                <a:cs typeface="Source Serif 4" pitchFamily="34" charset="-120"/>
+              </a:rPr>
+              <a:t>On a schedule,</a:t>
+            </a:r>
+            <a:endParaRPr lang="en-US" sz="2133" dirty="0"/>
+          </a:p>
+          <a:p>
+            <a:pPr algn="l" indent="0" marL="0">
+              <a:lnSpc>
+                <a:spcPts val="2986"/>
+              </a:lnSpc>
+              <a:spcBef>
+                <a:spcPts val="800"/>
+              </a:spcBef>
+              <a:buNone/>
+            </a:pPr>
+            <a:r>
+              <a:rPr lang="en-US" sz="2133" dirty="0">
+                <a:solidFill>
+                  <a:srgbClr val="E8E5DE"/>
+                </a:solidFill>
+                <a:latin typeface="Source Serif 4" pitchFamily="34" charset="0"/>
+                <a:ea typeface="Source Serif 4" pitchFamily="34" charset="-122"/>
+                <a:cs typeface="Source Serif 4" pitchFamily="34" charset="-120"/>
+              </a:rPr>
+              <a:t>or never at all</a:t>
+            </a:r>
+            <a:endParaRPr lang="en-US" sz="2133" dirty="0"/>
+          </a:p>
+        </p:txBody>
+      </p:sp>
+      <p:sp>
+        <p:nvSpPr>
+          <p:cNvPr id="15" name="Text 12"/>
+          <p:cNvSpPr/>
+          <p:nvPr/>
+        </p:nvSpPr>
+        <p:spPr>
+          <a:xfrm>
+            <a:off x="4617081" y="3352800"/>
+            <a:ext cx="2953996" cy="8334"/>
+          </a:xfrm>
+          <a:prstGeom prst="rect">
+            <a:avLst/>
+          </a:prstGeom>
+          <a:solidFill>
+            <a:srgbClr val="C8A24B"/>
+          </a:solidFill>
+          <a:ln/>
+        </p:spPr>
+        <p:txBody>
+          <a:bodyPr wrap="square" rtlCol="0" anchor="ctr"/>
+          <a:lstStyle/>
+          <a:p>
+            <a:pPr indent="0" marL="0">
+              <a:buNone/>
+            </a:pPr>
+            <a:endParaRPr lang="en-US" dirty="0"/>
+          </a:p>
+        </p:txBody>
+      </p:sp>
+      <p:sp>
+        <p:nvSpPr>
+          <p:cNvPr id="16" name="Text 13"/>
+          <p:cNvSpPr/>
+          <p:nvPr/>
+        </p:nvSpPr>
+        <p:spPr>
+          <a:xfrm>
+            <a:off x="4617081" y="3530402"/>
+            <a:ext cx="3013076" cy="1031081"/>
+          </a:xfrm>
+          <a:prstGeom prst="rect">
+            <a:avLst/>
+          </a:prstGeom>
+          <a:noFill/>
+          <a:ln/>
+        </p:spPr>
+        <p:txBody>
+          <a:bodyPr wrap="square" lIns="0" tIns="0" rIns="0" bIns="0" rtlCol="0" anchor="t"/>
+          <a:lstStyle/>
+          <a:p>
+            <a:pPr algn="l" indent="0" marL="0">
+              <a:lnSpc>
+                <a:spcPts val="2706"/>
+              </a:lnSpc>
+              <a:buNone/>
+            </a:pPr>
+            <a:r>
+              <a:rPr lang="en-US" sz="1866" dirty="0">
+                <a:solidFill>
+                  <a:srgbClr val="E8E5DE"/>
+                </a:solidFill>
+                <a:latin typeface="Inter" pitchFamily="34" charset="0"/>
+                <a:ea typeface="Inter" pitchFamily="34" charset="-122"/>
+                <a:cs typeface="Inter" pitchFamily="34" charset="-120"/>
+              </a:rPr>
+              <a:t>Read weekly, the record is a control. Read after the fact, it is only</a:t>
+            </a:r>
+            <a:endParaRPr lang="en-US" sz="1866" dirty="0"/>
+          </a:p>
+          <a:p>
+            <a:pPr algn="l" indent="0" marL="0">
+              <a:lnSpc>
+                <a:spcPts val="2706"/>
+              </a:lnSpc>
+              <a:buNone/>
+            </a:pPr>
+            <a:r>
+              <a:rPr lang="en-US" sz="1866" dirty="0">
+                <a:solidFill>
+                  <a:srgbClr val="E8E5DE"/>
+                </a:solidFill>
+                <a:latin typeface="Inter" pitchFamily="34" charset="0"/>
+                <a:ea typeface="Inter" pitchFamily="34" charset="-122"/>
+                <a:cs typeface="Inter" pitchFamily="34" charset="-120"/>
+              </a:rPr>
+              <a:t>        evidence.</a:t>
+            </a:r>
+            <a:endParaRPr lang="en-US" sz="1866" dirty="0"/>
+          </a:p>
+        </p:txBody>
+      </p:sp>
+      <p:pic>
+        <p:nvPicPr>
+          <p:cNvPr id="17" name="Image 1" descr="preencoded.png">    </p:cNvPr>
+          <p:cNvPicPr>
+            <a:picLocks noChangeAspect="1"/>
+          </p:cNvPicPr>
+          <p:nvPr/>
+        </p:nvPicPr>
+        <p:blipFill>
+          <a:blip r:embed="rId3">
+            <a:extLst>
+              <a:ext uri="{96DAC541-7B7A-43D3-8B79-37D633B846F1}">
+                <asvg:svgBlip xmlns:asvg="http://schemas.microsoft.com/office/drawing/2016/SVG/main" r:embed="rId4"/>
+              </a:ext>
+            </a:extLst>
+          </a:blip>
+          <a:stretch>
+            <a:fillRect/>
+          </a:stretch>
+        </p:blipFill>
+        <p:spPr>
+          <a:xfrm>
+            <a:off x="7899012" y="3223220"/>
+            <a:ext cx="114271" cy="177800"/>
+          </a:xfrm>
+          <a:prstGeom prst="rect">
+            <a:avLst/>
+          </a:prstGeom>
+        </p:spPr>
+      </p:pic>
+      <p:sp>
+        <p:nvSpPr>
+          <p:cNvPr id="18" name="Text 14"/>
+          <p:cNvSpPr/>
+          <p:nvPr/>
+        </p:nvSpPr>
+        <p:spPr>
+          <a:xfrm>
+            <a:off x="8125373" y="1846858"/>
+            <a:ext cx="3385688" cy="2930525"/>
+          </a:xfrm>
+          <a:prstGeom prst="rect">
+            <a:avLst/>
+          </a:prstGeom>
+          <a:solidFill>
+            <a:srgbClr val="1F3A5F"/>
+          </a:solidFill>
+          <a:ln w="12698">
+            <a:solidFill>
+              <a:srgbClr val="C8A24B"/>
+            </a:solidFill>
+          </a:ln>
+        </p:spPr>
+        <p:txBody>
+          <a:bodyPr wrap="square" rtlCol="0" anchor="ctr"/>
+          <a:lstStyle/>
+          <a:p>
+            <a:pPr indent="0" marL="0">
+              <a:buNone/>
+            </a:pPr>
+            <a:endParaRPr lang="en-US" dirty="0"/>
+          </a:p>
+        </p:txBody>
+      </p:sp>
+      <p:sp>
+        <p:nvSpPr>
+          <p:cNvPr id="19" name="Text 15"/>
+          <p:cNvSpPr/>
+          <p:nvPr/>
+        </p:nvSpPr>
+        <p:spPr>
+          <a:xfrm>
+            <a:off x="8341219" y="2062758"/>
+            <a:ext cx="3013076" cy="260747"/>
+          </a:xfrm>
+          <a:prstGeom prst="rect">
+            <a:avLst/>
+          </a:prstGeom>
+          <a:noFill/>
+          <a:ln/>
+        </p:spPr>
+        <p:txBody>
+          <a:bodyPr wrap="square" lIns="0" tIns="0" rIns="0" bIns="0" rtlCol="0" anchor="t"/>
+          <a:lstStyle/>
+          <a:p>
+            <a:pPr algn="l" indent="0" marL="0">
+              <a:lnSpc>
+                <a:spcPts val="2053"/>
+              </a:lnSpc>
+              <a:buNone/>
+            </a:pPr>
+            <a:r>
+              <a:rPr lang="en-US" sz="1466" b="1" dirty="0">
+                <a:solidFill>
+                  <a:srgbClr val="C8A24B"/>
+                </a:solidFill>
+                <a:latin typeface="Inter" pitchFamily="34" charset="0"/>
+                <a:ea typeface="Inter" pitchFamily="34" charset="-122"/>
+                <a:cs typeface="Inter" pitchFamily="34" charset="-120"/>
+              </a:rPr>
+              <a:t>A CONSEQUENCE</a:t>
+            </a:r>
+            <a:endParaRPr lang="en-US" sz="1466" dirty="0"/>
+          </a:p>
+        </p:txBody>
+      </p:sp>
+      <p:sp>
+        <p:nvSpPr>
+          <p:cNvPr id="20" name="Text 16"/>
+          <p:cNvSpPr/>
+          <p:nvPr/>
+        </p:nvSpPr>
+        <p:spPr>
+          <a:xfrm>
+            <a:off x="8341219" y="2425105"/>
+            <a:ext cx="3013076" cy="758428"/>
+          </a:xfrm>
+          <a:prstGeom prst="rect">
+            <a:avLst/>
+          </a:prstGeom>
+          <a:noFill/>
+          <a:ln/>
+        </p:spPr>
+        <p:txBody>
+          <a:bodyPr wrap="square" lIns="0" tIns="0" rIns="0" bIns="0" rtlCol="0" anchor="t"/>
+          <a:lstStyle/>
+          <a:p>
+            <a:pPr algn="l" indent="0" marL="0">
+              <a:lnSpc>
+                <a:spcPts val="2986"/>
+              </a:lnSpc>
+              <a:spcBef>
+                <a:spcPts val="800"/>
+              </a:spcBef>
+              <a:buNone/>
+            </a:pPr>
+            <a:r>
+              <a:rPr lang="en-US" sz="2133" dirty="0">
+                <a:solidFill>
+                  <a:srgbClr val="E8E5DE"/>
+                </a:solidFill>
+                <a:latin typeface="Source Serif 4" pitchFamily="34" charset="0"/>
+                <a:ea typeface="Source Serif 4" pitchFamily="34" charset="-122"/>
+                <a:cs typeface="Source Serif 4" pitchFamily="34" charset="-120"/>
+              </a:rPr>
+              <a:t>The read must</a:t>
+            </a:r>
+            <a:endParaRPr lang="en-US" sz="2133" dirty="0"/>
+          </a:p>
+          <a:p>
+            <a:pPr algn="l" indent="0" marL="0">
+              <a:lnSpc>
+                <a:spcPts val="2986"/>
+              </a:lnSpc>
+              <a:spcBef>
+                <a:spcPts val="800"/>
+              </a:spcBef>
+              <a:buNone/>
+            </a:pPr>
+            <a:r>
+              <a:rPr lang="en-US" sz="2133" dirty="0">
+                <a:solidFill>
+                  <a:srgbClr val="E8E5DE"/>
+                </a:solidFill>
+                <a:latin typeface="Source Serif 4" pitchFamily="34" charset="0"/>
+                <a:ea typeface="Source Serif 4" pitchFamily="34" charset="-122"/>
+                <a:cs typeface="Source Serif 4" pitchFamily="34" charset="-120"/>
+              </a:rPr>
+              <a:t>change something</a:t>
+            </a:r>
+            <a:endParaRPr lang="en-US" sz="2133" dirty="0"/>
+          </a:p>
+        </p:txBody>
+      </p:sp>
+      <p:sp>
+        <p:nvSpPr>
+          <p:cNvPr id="21" name="Text 17"/>
+          <p:cNvSpPr/>
+          <p:nvPr/>
+        </p:nvSpPr>
+        <p:spPr>
+          <a:xfrm>
+            <a:off x="8341219" y="3352800"/>
+            <a:ext cx="2953996" cy="8334"/>
+          </a:xfrm>
+          <a:prstGeom prst="rect">
+            <a:avLst/>
+          </a:prstGeom>
+          <a:solidFill>
+            <a:srgbClr val="C8A24B"/>
+          </a:solidFill>
+          <a:ln/>
+        </p:spPr>
+        <p:txBody>
+          <a:bodyPr wrap="square" rtlCol="0" anchor="ctr"/>
+          <a:lstStyle/>
+          <a:p>
+            <a:pPr indent="0" marL="0">
+              <a:buNone/>
+            </a:pPr>
+            <a:endParaRPr lang="en-US" dirty="0"/>
+          </a:p>
+        </p:txBody>
+      </p:sp>
+      <p:sp>
+        <p:nvSpPr>
+          <p:cNvPr id="22" name="Text 18"/>
+          <p:cNvSpPr/>
+          <p:nvPr/>
+        </p:nvSpPr>
+        <p:spPr>
+          <a:xfrm>
+            <a:off x="8341219" y="3530402"/>
+            <a:ext cx="3013076" cy="1031081"/>
+          </a:xfrm>
+          <a:prstGeom prst="rect">
+            <a:avLst/>
+          </a:prstGeom>
+          <a:noFill/>
+          <a:ln/>
+        </p:spPr>
+        <p:txBody>
+          <a:bodyPr wrap="square" lIns="0" tIns="0" rIns="0" bIns="0" rtlCol="0" anchor="t"/>
+          <a:lstStyle/>
+          <a:p>
+            <a:pPr algn="l" indent="0" marL="0">
+              <a:lnSpc>
+                <a:spcPts val="2706"/>
+              </a:lnSpc>
+              <a:buNone/>
+            </a:pPr>
+            <a:r>
+              <a:rPr lang="en-US" sz="1866" dirty="0">
+                <a:solidFill>
+                  <a:srgbClr val="E8E5DE"/>
+                </a:solidFill>
+                <a:latin typeface="Inter" pitchFamily="34" charset="0"/>
+                <a:ea typeface="Inter" pitchFamily="34" charset="-122"/>
+                <a:cs typeface="Inter" pitchFamily="34" charset="-120"/>
+              </a:rPr>
+              <a:t>If it cannot revoke a role, narrow a scope or close a gap, it is</a:t>
+            </a:r>
+            <a:endParaRPr lang="en-US" sz="1866" dirty="0"/>
+          </a:p>
+          <a:p>
+            <a:pPr algn="l" indent="0" marL="0">
+              <a:lnSpc>
+                <a:spcPts val="2706"/>
+              </a:lnSpc>
+              <a:buNone/>
+            </a:pPr>
+            <a:r>
+              <a:rPr lang="en-US" sz="1866" dirty="0">
+                <a:solidFill>
+                  <a:srgbClr val="E8E5DE"/>
+                </a:solidFill>
+                <a:latin typeface="Inter" pitchFamily="34" charset="0"/>
+                <a:ea typeface="Inter" pitchFamily="34" charset="-122"/>
+                <a:cs typeface="Inter" pitchFamily="34" charset="-120"/>
+              </a:rPr>
+              <a:t>        theatre.</a:t>
+            </a:r>
+            <a:endParaRPr lang="en-US" sz="1866" dirty="0"/>
+          </a:p>
+        </p:txBody>
+      </p:sp>
+      <p:sp>
+        <p:nvSpPr>
+          <p:cNvPr id="23" name="Shape 19"/>
+          <p:cNvSpPr/>
+          <p:nvPr/>
+        </p:nvSpPr>
+        <p:spPr>
+          <a:xfrm>
+            <a:off x="677098" y="5298281"/>
+            <a:ext cx="10834756" cy="0"/>
+          </a:xfrm>
+          <a:prstGeom prst="line">
+            <a:avLst/>
+          </a:prstGeom>
+          <a:noFill/>
+          <a:ln w="12698">
+            <a:solidFill>
+              <a:srgbClr val="C8A24B"/>
+            </a:solidFill>
+            <a:prstDash val="solid"/>
+          </a:ln>
+        </p:spPr>
+      </p:sp>
+      <p:sp>
+        <p:nvSpPr>
+          <p:cNvPr id="24" name="Text 20"/>
+          <p:cNvSpPr/>
+          <p:nvPr/>
+        </p:nvSpPr>
+        <p:spPr>
+          <a:xfrm>
+            <a:off x="677098" y="5507831"/>
+            <a:ext cx="11051451" cy="368300"/>
+          </a:xfrm>
+          <a:prstGeom prst="rect">
+            <a:avLst/>
+          </a:prstGeom>
+          <a:noFill/>
+          <a:ln/>
+        </p:spPr>
+        <p:txBody>
+          <a:bodyPr wrap="square" lIns="0" tIns="0" rIns="0" bIns="0" rtlCol="0" anchor="t"/>
+          <a:lstStyle/>
+          <a:p>
+            <a:pPr algn="l" indent="0" marL="0">
+              <a:lnSpc>
+                <a:spcPts val="2900"/>
+              </a:lnSpc>
+              <a:buNone/>
+            </a:pPr>
+            <a:r>
+              <a:rPr lang="en-US" sz="2000" dirty="0">
+                <a:solidFill>
+                  <a:srgbClr val="E8E5DE"/>
+                </a:solidFill>
+                <a:latin typeface="Inter" pitchFamily="34" charset="0"/>
+                <a:ea typeface="Inter" pitchFamily="34" charset="-122"/>
+                <a:cs typeface="Inter" pitchFamily="34" charset="-120"/>
+              </a:rPr>
+              <a:t>A log with no reader or consequence audits as compliant and controls nothing.</a:t>
+            </a:r>
+            <a:endParaRPr lang="en-US" sz="2000" dirty="0"/>
+          </a:p>
+        </p:txBody>
+      </p:sp>
+      <p:sp>
+        <p:nvSpPr>
+          <p:cNvPr id="25" name="Text 21"/>
+          <p:cNvSpPr/>
+          <p:nvPr/>
+        </p:nvSpPr>
+        <p:spPr>
+          <a:xfrm>
+            <a:off x="677098" y="6079331"/>
+            <a:ext cx="5763089" cy="236934"/>
+          </a:xfrm>
+          <a:prstGeom prst="rect">
+            <a:avLst/>
+          </a:prstGeom>
+          <a:noFill/>
+          <a:ln/>
+        </p:spPr>
+        <p:txBody>
+          <a:bodyPr wrap="square" lIns="0" tIns="0" rIns="0" bIns="0" rtlCol="0" anchor="t"/>
+          <a:lstStyle/>
+          <a:p>
+            <a:pPr algn="l" indent="0" marL="0">
+              <a:lnSpc>
+                <a:spcPts val="1866"/>
+              </a:lnSpc>
+              <a:buNone/>
+            </a:pPr>
+            <a:r>
+              <a:rPr lang="en-US" sz="1333" dirty="0">
+                <a:solidFill>
+                  <a:srgbClr val="9AA6BC"/>
+                </a:solidFill>
+                <a:latin typeface="Inter" pitchFamily="34" charset="0"/>
+                <a:ea typeface="Inter" pitchFamily="34" charset="-122"/>
+                <a:cs typeface="Inter" pitchFamily="34" charset="-120"/>
+              </a:rPr>
+              <a:t>SOURCE — none. No figures in this deck; the argument is mechanical.</a:t>
+            </a:r>
+            <a:endParaRPr lang="en-US" sz="1333" dirty="0"/>
+          </a:p>
+        </p:txBody>
+      </p:sp>
+      <p:sp>
+        <p:nvSpPr>
+          <p:cNvPr id="26" name="Text 22"/>
+          <p:cNvSpPr/>
+          <p:nvPr/>
+        </p:nvSpPr>
+        <p:spPr>
+          <a:xfrm>
+            <a:off x="7804381" y="6079331"/>
+            <a:ext cx="3781622" cy="236934"/>
+          </a:xfrm>
+          <a:prstGeom prst="rect">
+            <a:avLst/>
+          </a:prstGeom>
+          <a:noFill/>
+          <a:ln/>
+        </p:spPr>
+        <p:txBody>
+          <a:bodyPr wrap="square" lIns="0" tIns="0" rIns="0" bIns="0" rtlCol="0" anchor="t"/>
+          <a:lstStyle/>
+          <a:p>
+            <a:pPr algn="l" indent="0" marL="0">
+              <a:lnSpc>
+                <a:spcPts val="1866"/>
+              </a:lnSpc>
+              <a:buNone/>
+            </a:pPr>
+            <a:r>
+              <a:rPr lang="en-US" sz="1333" dirty="0">
+                <a:solidFill>
+                  <a:srgbClr val="9AA6BC"/>
+                </a:solidFill>
+                <a:latin typeface="Inter" pitchFamily="34" charset="0"/>
+                <a:ea typeface="Inter" pitchFamily="34" charset="-122"/>
+                <a:cs typeface="Inter" pitchFamily="34" charset="-120"/>
+              </a:rPr>
+              <a:t>INTERNAL DISCUSSION DRAFT · 05 / 06</a:t>
+            </a:r>
+            <a:endParaRPr lang="en-US" sz="1333" dirty="0"/>
+          </a:p>
+        </p:txBody>
+      </p:sp>
     </p:spTree>
   </p:cSld>
   <p:clrMapOvr>
@@ -1544,6 +6013,13 @@
 <file path=ppt/slides/slide6.xml><?xml version="1.0" encoding="utf-8"?>
 <p:sld xmlns:a="http://schemas.openxmlformats.org/drawingml/2006/main" xmlns:r="http://schemas.openxmlformats.org/officeDocument/2006/relationships" xmlns:p="http://schemas.openxmlformats.org/presentationml/2006/main">
   <p:cSld name="Slide 6">
+    <p:bg>
+      <p:bgPr>
+        <a:solidFill>
+          <a:srgbClr val="0A1A33"/>
+        </a:solidFill>
+      </p:bgPr>
+    </p:bg>
     <p:spTree>
       <p:nvGrpSpPr>
         <p:cNvPr id="1" name=""/>
@@ -1558,30 +6034,802 @@
           <a:chExt cx="0" cy="0"/>
         </a:xfrm>
       </p:grpSpPr>
-      <p:pic>
-        <p:nvPicPr>
-          <p:cNvPr id="2" name="Image 0" descr="/tmp/slide-1787840541729-123kyklbw6c.png">    </p:cNvPr>
-          <p:cNvPicPr>
-            <a:picLocks noChangeAspect="1"/>
-          </p:cNvPicPr>
-          <p:nvPr/>
-        </p:nvPicPr>
-        <p:blipFill>
-          <a:blip r:embed="rId1"/>
-          <a:stretch>
-            <a:fillRect/>
-          </a:stretch>
-        </p:blipFill>
-        <p:spPr>
-          <a:xfrm>
-            <a:off x="0" y="0"/>
-            <a:ext cx="12188952" cy="6858000"/>
-          </a:xfrm>
-          <a:prstGeom prst="rect">
-            <a:avLst/>
-          </a:prstGeom>
-        </p:spPr>
-      </p:pic>
+      <p:sp>
+        <p:nvSpPr>
+          <p:cNvPr id="2" name="Text 0"/>
+          <p:cNvSpPr/>
+          <p:nvPr/>
+        </p:nvSpPr>
+        <p:spPr>
+          <a:xfrm>
+            <a:off x="677098" y="541734"/>
+            <a:ext cx="3650294" cy="260747"/>
+          </a:xfrm>
+          <a:prstGeom prst="rect">
+            <a:avLst/>
+          </a:prstGeom>
+          <a:noFill/>
+          <a:ln/>
+        </p:spPr>
+        <p:txBody>
+          <a:bodyPr wrap="square" lIns="0" tIns="0" rIns="0" bIns="0" rtlCol="0" anchor="t"/>
+          <a:lstStyle/>
+          <a:p>
+            <a:pPr algn="l" indent="0" marL="0">
+              <a:lnSpc>
+                <a:spcPts val="2053"/>
+              </a:lnSpc>
+              <a:buNone/>
+            </a:pPr>
+            <a:r>
+              <a:rPr lang="en-US" sz="1466" dirty="0">
+                <a:solidFill>
+                  <a:srgbClr val="9AA6BC"/>
+                </a:solidFill>
+                <a:latin typeface="Inter" pitchFamily="34" charset="0"/>
+                <a:ea typeface="Inter" pitchFamily="34" charset="-122"/>
+                <a:cs typeface="Inter" pitchFamily="34" charset="-120"/>
+              </a:rPr>
+              <a:t>ACCESS GOVERNANCE · INTERNAL</a:t>
+            </a:r>
+            <a:endParaRPr lang="en-US" sz="1466" dirty="0"/>
+          </a:p>
+        </p:txBody>
+      </p:sp>
+      <p:sp>
+        <p:nvSpPr>
+          <p:cNvPr id="3" name="Text 1"/>
+          <p:cNvSpPr/>
+          <p:nvPr/>
+        </p:nvSpPr>
+        <p:spPr>
+          <a:xfrm>
+            <a:off x="9595229" y="541734"/>
+            <a:ext cx="1954958" cy="260747"/>
+          </a:xfrm>
+          <a:prstGeom prst="rect">
+            <a:avLst/>
+          </a:prstGeom>
+          <a:noFill/>
+          <a:ln/>
+        </p:spPr>
+        <p:txBody>
+          <a:bodyPr wrap="square" lIns="0" tIns="0" rIns="0" bIns="0" rtlCol="0" anchor="t"/>
+          <a:lstStyle/>
+          <a:p>
+            <a:pPr algn="l" indent="0" marL="0">
+              <a:lnSpc>
+                <a:spcPts val="2053"/>
+              </a:lnSpc>
+              <a:buNone/>
+            </a:pPr>
+            <a:r>
+              <a:rPr lang="en-US" sz="1466" b="1" dirty="0">
+                <a:solidFill>
+                  <a:srgbClr val="C8A24B"/>
+                </a:solidFill>
+                <a:latin typeface="Inter" pitchFamily="34" charset="0"/>
+                <a:ea typeface="Inter" pitchFamily="34" charset="-122"/>
+                <a:cs typeface="Inter" pitchFamily="34" charset="-120"/>
+              </a:rPr>
+              <a:t>CLOSING · 06 / 06</a:t>
+            </a:r>
+            <a:endParaRPr lang="en-US" sz="1466" dirty="0"/>
+          </a:p>
+        </p:txBody>
+      </p:sp>
+      <p:sp>
+        <p:nvSpPr>
+          <p:cNvPr id="4" name="Text 2"/>
+          <p:cNvSpPr/>
+          <p:nvPr/>
+        </p:nvSpPr>
+        <p:spPr>
+          <a:xfrm>
+            <a:off x="677098" y="1039416"/>
+            <a:ext cx="4834884" cy="260747"/>
+          </a:xfrm>
+          <a:prstGeom prst="rect">
+            <a:avLst/>
+          </a:prstGeom>
+          <a:noFill/>
+          <a:ln/>
+        </p:spPr>
+        <p:txBody>
+          <a:bodyPr wrap="square" lIns="0" tIns="0" rIns="0" bIns="0" rtlCol="0" anchor="t"/>
+          <a:lstStyle/>
+          <a:p>
+            <a:pPr algn="l" indent="0" marL="0">
+              <a:lnSpc>
+                <a:spcPts val="2053"/>
+              </a:lnSpc>
+              <a:buNone/>
+            </a:pPr>
+            <a:r>
+              <a:rPr lang="en-US" sz="1466" b="1" dirty="0">
+                <a:solidFill>
+                  <a:srgbClr val="C8A24B"/>
+                </a:solidFill>
+                <a:latin typeface="Inter" pitchFamily="34" charset="0"/>
+                <a:ea typeface="Inter" pitchFamily="34" charset="-122"/>
+                <a:cs typeface="Inter" pitchFamily="34" charset="-120"/>
+              </a:rPr>
+              <a:t>DECISIONS</a:t>
+            </a:r>
+            <a:endParaRPr lang="en-US" sz="1466" dirty="0"/>
+          </a:p>
+        </p:txBody>
+      </p:sp>
+      <p:sp>
+        <p:nvSpPr>
+          <p:cNvPr id="5" name="Text 3"/>
+          <p:cNvSpPr/>
+          <p:nvPr/>
+        </p:nvSpPr>
+        <p:spPr>
+          <a:xfrm>
+            <a:off x="677098" y="1503363"/>
+            <a:ext cx="4834884" cy="2331244"/>
+          </a:xfrm>
+          <a:prstGeom prst="rect">
+            <a:avLst/>
+          </a:prstGeom>
+          <a:noFill/>
+          <a:ln/>
+        </p:spPr>
+        <p:txBody>
+          <a:bodyPr wrap="square" lIns="0" tIns="0" rIns="0" bIns="0" rtlCol="0" anchor="t"/>
+          <a:lstStyle/>
+          <a:p>
+            <a:pPr algn="l" indent="0" marL="0">
+              <a:lnSpc>
+                <a:spcPts val="6119"/>
+              </a:lnSpc>
+              <a:spcBef>
+                <a:spcPts val="1600"/>
+              </a:spcBef>
+              <a:buNone/>
+            </a:pPr>
+            <a:r>
+              <a:rPr lang="en-US" sz="4533" dirty="0">
+                <a:solidFill>
+                  <a:srgbClr val="E8E5DE"/>
+                </a:solidFill>
+                <a:latin typeface="Source Serif 4" pitchFamily="34" charset="0"/>
+                <a:ea typeface="Source Serif 4" pitchFamily="34" charset="-122"/>
+                <a:cs typeface="Source Serif 4" pitchFamily="34" charset="-120"/>
+              </a:rPr>
+              <a:t>What we
+need to
+</a:t>
+            </a:r>
+            <a:pPr algn="l" indent="0" marL="0">
+              <a:lnSpc>
+                <a:spcPts val="6119"/>
+              </a:lnSpc>
+              <a:spcBef>
+                <a:spcPts val="1600"/>
+              </a:spcBef>
+              <a:buNone/>
+            </a:pPr>
+            <a:r>
+              <a:rPr lang="en-US" sz="4533" b="1" dirty="0">
+                <a:solidFill>
+                  <a:srgbClr val="C8A24B"/>
+                </a:solidFill>
+                <a:latin typeface="Source Serif 4" pitchFamily="34" charset="0"/>
+                <a:ea typeface="Source Serif 4" pitchFamily="34" charset="-122"/>
+                <a:cs typeface="Source Serif 4" pitchFamily="34" charset="-120"/>
+              </a:rPr>
+              <a:t>decide</a:t>
+            </a:r>
+            <a:endParaRPr lang="en-US" sz="4533" dirty="0"/>
+          </a:p>
+        </p:txBody>
+      </p:sp>
+      <p:sp>
+        <p:nvSpPr>
+          <p:cNvPr id="6" name="Text 4"/>
+          <p:cNvSpPr/>
+          <p:nvPr/>
+        </p:nvSpPr>
+        <p:spPr>
+          <a:xfrm>
+            <a:off x="677098" y="4105473"/>
+            <a:ext cx="4740082" cy="8334"/>
+          </a:xfrm>
+          <a:prstGeom prst="rect">
+            <a:avLst/>
+          </a:prstGeom>
+          <a:solidFill>
+            <a:srgbClr val="C8A24B"/>
+          </a:solidFill>
+          <a:ln/>
+        </p:spPr>
+        <p:txBody>
+          <a:bodyPr wrap="square" rtlCol="0" anchor="ctr"/>
+          <a:lstStyle/>
+          <a:p>
+            <a:pPr indent="0" marL="0">
+              <a:buNone/>
+            </a:pPr>
+            <a:endParaRPr lang="en-US" dirty="0"/>
+          </a:p>
+        </p:txBody>
+      </p:sp>
+      <p:sp>
+        <p:nvSpPr>
+          <p:cNvPr id="7" name="Text 5"/>
+          <p:cNvSpPr/>
+          <p:nvPr/>
+        </p:nvSpPr>
+        <p:spPr>
+          <a:xfrm>
+            <a:off x="677098" y="4350742"/>
+            <a:ext cx="4834884" cy="1031081"/>
+          </a:xfrm>
+          <a:prstGeom prst="rect">
+            <a:avLst/>
+          </a:prstGeom>
+          <a:noFill/>
+          <a:ln/>
+        </p:spPr>
+        <p:txBody>
+          <a:bodyPr wrap="square" lIns="0" tIns="0" rIns="0" bIns="0" rtlCol="0" anchor="t"/>
+          <a:lstStyle/>
+          <a:p>
+            <a:pPr algn="l" indent="0" marL="0">
+              <a:lnSpc>
+                <a:spcPts val="2706"/>
+              </a:lnSpc>
+              <a:spcBef>
+                <a:spcPts val="1866"/>
+              </a:spcBef>
+              <a:buNone/>
+            </a:pPr>
+            <a:r>
+              <a:rPr lang="en-US" sz="1866" dirty="0">
+                <a:solidFill>
+                  <a:srgbClr val="9AA6BC"/>
+                </a:solidFill>
+                <a:latin typeface="Inter" pitchFamily="34" charset="0"/>
+                <a:ea typeface="Inter" pitchFamily="34" charset="-122"/>
+                <a:cs typeface="Inter" pitchFamily="34" charset="-120"/>
+              </a:rPr>
+              <a:t>Standing access is the risk. Break-glass with an expiry, and a</a:t>
+            </a:r>
+            <a:endParaRPr lang="en-US" sz="1866" dirty="0"/>
+          </a:p>
+          <a:p>
+            <a:pPr algn="l" indent="0" marL="0">
+              <a:lnSpc>
+                <a:spcPts val="2706"/>
+              </a:lnSpc>
+              <a:spcBef>
+                <a:spcPts val="1866"/>
+              </a:spcBef>
+              <a:buNone/>
+            </a:pPr>
+            <a:r>
+              <a:rPr lang="en-US" sz="1866" dirty="0">
+                <a:solidFill>
+                  <a:srgbClr val="9AA6BC"/>
+                </a:solidFill>
+                <a:latin typeface="Inter" pitchFamily="34" charset="0"/>
+                <a:ea typeface="Inter" pitchFamily="34" charset="-122"/>
+                <a:cs typeface="Inter" pitchFamily="34" charset="-120"/>
+              </a:rPr>
+              <a:t>        record someone actually reads, is what replaces it.</a:t>
+            </a:r>
+            <a:endParaRPr lang="en-US" sz="1866" dirty="0"/>
+          </a:p>
+        </p:txBody>
+      </p:sp>
+      <p:sp>
+        <p:nvSpPr>
+          <p:cNvPr id="8" name="Text 6"/>
+          <p:cNvSpPr/>
+          <p:nvPr/>
+        </p:nvSpPr>
+        <p:spPr>
+          <a:xfrm>
+            <a:off x="677098" y="5615384"/>
+            <a:ext cx="4834884" cy="260747"/>
+          </a:xfrm>
+          <a:prstGeom prst="rect">
+            <a:avLst/>
+          </a:prstGeom>
+          <a:noFill/>
+          <a:ln/>
+        </p:spPr>
+        <p:txBody>
+          <a:bodyPr wrap="square" lIns="0" tIns="0" rIns="0" bIns="0" rtlCol="0" anchor="t"/>
+          <a:lstStyle/>
+          <a:p>
+            <a:pPr algn="l" indent="0" marL="0">
+              <a:lnSpc>
+                <a:spcPts val="2053"/>
+              </a:lnSpc>
+              <a:spcBef>
+                <a:spcPts val="1839"/>
+              </a:spcBef>
+              <a:buNone/>
+            </a:pPr>
+            <a:r>
+              <a:rPr lang="en-US" sz="1466" dirty="0">
+                <a:solidFill>
+                  <a:srgbClr val="9AA6BC"/>
+                </a:solidFill>
+                <a:latin typeface="Inter" pitchFamily="34" charset="0"/>
+                <a:ea typeface="Inter" pitchFamily="34" charset="-122"/>
+                <a:cs typeface="Inter" pitchFamily="34" charset="-120"/>
+              </a:rPr>
+              <a:t>PRESENTER · TEAM</a:t>
+            </a:r>
+            <a:endParaRPr lang="en-US" sz="1466" dirty="0"/>
+          </a:p>
+        </p:txBody>
+      </p:sp>
+      <p:sp>
+        <p:nvSpPr>
+          <p:cNvPr id="9" name="Shape 7"/>
+          <p:cNvSpPr/>
+          <p:nvPr/>
+        </p:nvSpPr>
+        <p:spPr>
+          <a:xfrm>
+            <a:off x="5823478" y="1045766"/>
+            <a:ext cx="5688178" cy="0"/>
+          </a:xfrm>
+          <a:prstGeom prst="line">
+            <a:avLst/>
+          </a:prstGeom>
+          <a:noFill/>
+          <a:ln w="12698">
+            <a:solidFill>
+              <a:srgbClr val="C8A24B"/>
+            </a:solidFill>
+            <a:prstDash val="solid"/>
+          </a:ln>
+        </p:spPr>
+      </p:sp>
+      <p:sp>
+        <p:nvSpPr>
+          <p:cNvPr id="10" name="Text 8"/>
+          <p:cNvSpPr/>
+          <p:nvPr/>
+        </p:nvSpPr>
+        <p:spPr>
+          <a:xfrm>
+            <a:off x="5823478" y="1221383"/>
+            <a:ext cx="5801941" cy="260747"/>
+          </a:xfrm>
+          <a:prstGeom prst="rect">
+            <a:avLst/>
+          </a:prstGeom>
+          <a:noFill/>
+          <a:ln/>
+        </p:spPr>
+        <p:txBody>
+          <a:bodyPr wrap="square" lIns="0" tIns="0" rIns="0" bIns="0" rtlCol="0" anchor="t"/>
+          <a:lstStyle/>
+          <a:p>
+            <a:pPr algn="l" indent="0" marL="0">
+              <a:lnSpc>
+                <a:spcPts val="2053"/>
+              </a:lnSpc>
+              <a:buNone/>
+            </a:pPr>
+            <a:r>
+              <a:rPr lang="en-US" sz="1466" b="1" dirty="0">
+                <a:solidFill>
+                  <a:srgbClr val="C8A24B"/>
+                </a:solidFill>
+                <a:latin typeface="Inter" pitchFamily="34" charset="0"/>
+                <a:ea typeface="Inter" pitchFamily="34" charset="-122"/>
+                <a:cs typeface="Inter" pitchFamily="34" charset="-120"/>
+              </a:rPr>
+              <a:t>01 · STANDING ACCESS</a:t>
+            </a:r>
+            <a:endParaRPr lang="en-US" sz="1466" dirty="0"/>
+          </a:p>
+        </p:txBody>
+      </p:sp>
+      <p:sp>
+        <p:nvSpPr>
+          <p:cNvPr id="11" name="Text 9"/>
+          <p:cNvSpPr/>
+          <p:nvPr/>
+        </p:nvSpPr>
+        <p:spPr>
+          <a:xfrm>
+            <a:off x="5823478" y="1566664"/>
+            <a:ext cx="5801941" cy="762000"/>
+          </a:xfrm>
+          <a:prstGeom prst="rect">
+            <a:avLst/>
+          </a:prstGeom>
+          <a:noFill/>
+          <a:ln/>
+        </p:spPr>
+        <p:txBody>
+          <a:bodyPr wrap="square" lIns="0" tIns="0" rIns="0" bIns="0" rtlCol="0" anchor="t"/>
+          <a:lstStyle/>
+          <a:p>
+            <a:pPr algn="l" indent="0" marL="0">
+              <a:lnSpc>
+                <a:spcPts val="3000"/>
+              </a:lnSpc>
+              <a:spcBef>
+                <a:spcPts val="667"/>
+              </a:spcBef>
+              <a:buNone/>
+            </a:pPr>
+            <a:r>
+              <a:rPr lang="en-US" sz="2000" dirty="0">
+                <a:solidFill>
+                  <a:srgbClr val="E8E5DE"/>
+                </a:solidFill>
+                <a:latin typeface="Inter" pitchFamily="34" charset="0"/>
+                <a:ea typeface="Inter" pitchFamily="34" charset="-122"/>
+                <a:cs typeface="Inter" pitchFamily="34" charset="-120"/>
+              </a:rPr>
+              <a:t>Can standing access go to zero, or is there a floor — and who owns what</a:t>
+            </a:r>
+            <a:endParaRPr lang="en-US" sz="2000" dirty="0"/>
+          </a:p>
+          <a:p>
+            <a:pPr algn="l" indent="0" marL="0">
+              <a:lnSpc>
+                <a:spcPts val="3000"/>
+              </a:lnSpc>
+              <a:spcBef>
+                <a:spcPts val="667"/>
+              </a:spcBef>
+              <a:buNone/>
+            </a:pPr>
+            <a:r>
+              <a:rPr lang="en-US" sz="2000" dirty="0">
+                <a:solidFill>
+                  <a:srgbClr val="E8E5DE"/>
+                </a:solidFill>
+                <a:latin typeface="Inter" pitchFamily="34" charset="0"/>
+                <a:ea typeface="Inter" pitchFamily="34" charset="-122"/>
+                <a:cs typeface="Inter" pitchFamily="34" charset="-120"/>
+              </a:rPr>
+              <a:t>          is left?</a:t>
+            </a:r>
+            <a:endParaRPr lang="en-US" sz="2000" dirty="0"/>
+          </a:p>
+        </p:txBody>
+      </p:sp>
+      <p:sp>
+        <p:nvSpPr>
+          <p:cNvPr id="12" name="Shape 10"/>
+          <p:cNvSpPr/>
+          <p:nvPr/>
+        </p:nvSpPr>
+        <p:spPr>
+          <a:xfrm>
+            <a:off x="5823478" y="2538214"/>
+            <a:ext cx="5688178" cy="0"/>
+          </a:xfrm>
+          <a:prstGeom prst="line">
+            <a:avLst/>
+          </a:prstGeom>
+          <a:noFill/>
+          <a:ln w="12698">
+            <a:solidFill>
+              <a:srgbClr val="C8A24B"/>
+            </a:solidFill>
+            <a:prstDash val="solid"/>
+          </a:ln>
+        </p:spPr>
+      </p:sp>
+      <p:sp>
+        <p:nvSpPr>
+          <p:cNvPr id="13" name="Text 11"/>
+          <p:cNvSpPr/>
+          <p:nvPr/>
+        </p:nvSpPr>
+        <p:spPr>
+          <a:xfrm>
+            <a:off x="5823478" y="2713831"/>
+            <a:ext cx="5801941" cy="260747"/>
+          </a:xfrm>
+          <a:prstGeom prst="rect">
+            <a:avLst/>
+          </a:prstGeom>
+          <a:noFill/>
+          <a:ln/>
+        </p:spPr>
+        <p:txBody>
+          <a:bodyPr wrap="square" lIns="0" tIns="0" rIns="0" bIns="0" rtlCol="0" anchor="t"/>
+          <a:lstStyle/>
+          <a:p>
+            <a:pPr algn="l" indent="0" marL="0">
+              <a:lnSpc>
+                <a:spcPts val="2053"/>
+              </a:lnSpc>
+              <a:buNone/>
+            </a:pPr>
+            <a:r>
+              <a:rPr lang="en-US" sz="1466" b="1" dirty="0">
+                <a:solidFill>
+                  <a:srgbClr val="C8A24B"/>
+                </a:solidFill>
+                <a:latin typeface="Inter" pitchFamily="34" charset="0"/>
+                <a:ea typeface="Inter" pitchFamily="34" charset="-122"/>
+                <a:cs typeface="Inter" pitchFamily="34" charset="-120"/>
+              </a:rPr>
+              <a:t>02 · THE WINDOW</a:t>
+            </a:r>
+            <a:endParaRPr lang="en-US" sz="1466" dirty="0"/>
+          </a:p>
+        </p:txBody>
+      </p:sp>
+      <p:sp>
+        <p:nvSpPr>
+          <p:cNvPr id="14" name="Text 12"/>
+          <p:cNvSpPr/>
+          <p:nvPr/>
+        </p:nvSpPr>
+        <p:spPr>
+          <a:xfrm>
+            <a:off x="5823478" y="3059113"/>
+            <a:ext cx="5801941" cy="762000"/>
+          </a:xfrm>
+          <a:prstGeom prst="rect">
+            <a:avLst/>
+          </a:prstGeom>
+          <a:noFill/>
+          <a:ln/>
+        </p:spPr>
+        <p:txBody>
+          <a:bodyPr wrap="square" lIns="0" tIns="0" rIns="0" bIns="0" rtlCol="0" anchor="t"/>
+          <a:lstStyle/>
+          <a:p>
+            <a:pPr algn="l" indent="0" marL="0">
+              <a:lnSpc>
+                <a:spcPts val="3000"/>
+              </a:lnSpc>
+              <a:spcBef>
+                <a:spcPts val="667"/>
+              </a:spcBef>
+              <a:buNone/>
+            </a:pPr>
+            <a:r>
+              <a:rPr lang="en-US" sz="2000" dirty="0">
+                <a:solidFill>
+                  <a:srgbClr val="E8E5DE"/>
+                </a:solidFill>
+                <a:latin typeface="Inter" pitchFamily="34" charset="0"/>
+                <a:ea typeface="Inter" pitchFamily="34" charset="-122"/>
+                <a:cs typeface="Inter" pitchFamily="34" charset="-120"/>
+              </a:rPr>
+              <a:t>How long does the glass stay broken: a fixed window, or the length of the</a:t>
+            </a:r>
+            <a:endParaRPr lang="en-US" sz="2000" dirty="0"/>
+          </a:p>
+          <a:p>
+            <a:pPr algn="l" indent="0" marL="0">
+              <a:lnSpc>
+                <a:spcPts val="3000"/>
+              </a:lnSpc>
+              <a:spcBef>
+                <a:spcPts val="667"/>
+              </a:spcBef>
+              <a:buNone/>
+            </a:pPr>
+            <a:r>
+              <a:rPr lang="en-US" sz="2000" dirty="0">
+                <a:solidFill>
+                  <a:srgbClr val="E8E5DE"/>
+                </a:solidFill>
+                <a:latin typeface="Inter" pitchFamily="34" charset="0"/>
+                <a:ea typeface="Inter" pitchFamily="34" charset="-122"/>
+                <a:cs typeface="Inter" pitchFamily="34" charset="-120"/>
+              </a:rPr>
+              <a:t>          incident?</a:t>
+            </a:r>
+            <a:endParaRPr lang="en-US" sz="2000" dirty="0"/>
+          </a:p>
+        </p:txBody>
+      </p:sp>
+      <p:sp>
+        <p:nvSpPr>
+          <p:cNvPr id="15" name="Shape 13"/>
+          <p:cNvSpPr/>
+          <p:nvPr/>
+        </p:nvSpPr>
+        <p:spPr>
+          <a:xfrm>
+            <a:off x="5823478" y="4030662"/>
+            <a:ext cx="5688178" cy="0"/>
+          </a:xfrm>
+          <a:prstGeom prst="line">
+            <a:avLst/>
+          </a:prstGeom>
+          <a:noFill/>
+          <a:ln w="12698">
+            <a:solidFill>
+              <a:srgbClr val="C8A24B"/>
+            </a:solidFill>
+            <a:prstDash val="solid"/>
+          </a:ln>
+        </p:spPr>
+      </p:sp>
+      <p:sp>
+        <p:nvSpPr>
+          <p:cNvPr id="16" name="Text 14"/>
+          <p:cNvSpPr/>
+          <p:nvPr/>
+        </p:nvSpPr>
+        <p:spPr>
+          <a:xfrm>
+            <a:off x="5823478" y="4206280"/>
+            <a:ext cx="5801941" cy="260747"/>
+          </a:xfrm>
+          <a:prstGeom prst="rect">
+            <a:avLst/>
+          </a:prstGeom>
+          <a:noFill/>
+          <a:ln/>
+        </p:spPr>
+        <p:txBody>
+          <a:bodyPr wrap="square" lIns="0" tIns="0" rIns="0" bIns="0" rtlCol="0" anchor="t"/>
+          <a:lstStyle/>
+          <a:p>
+            <a:pPr algn="l" indent="0" marL="0">
+              <a:lnSpc>
+                <a:spcPts val="2053"/>
+              </a:lnSpc>
+              <a:buNone/>
+            </a:pPr>
+            <a:r>
+              <a:rPr lang="en-US" sz="1466" b="1" dirty="0">
+                <a:solidFill>
+                  <a:srgbClr val="C8A24B"/>
+                </a:solidFill>
+                <a:latin typeface="Inter" pitchFamily="34" charset="0"/>
+                <a:ea typeface="Inter" pitchFamily="34" charset="-122"/>
+                <a:cs typeface="Inter" pitchFamily="34" charset="-120"/>
+              </a:rPr>
+              <a:t>03 · THE READER</a:t>
+            </a:r>
+            <a:endParaRPr lang="en-US" sz="1466" dirty="0"/>
+          </a:p>
+        </p:txBody>
+      </p:sp>
+      <p:sp>
+        <p:nvSpPr>
+          <p:cNvPr id="17" name="Text 15"/>
+          <p:cNvSpPr/>
+          <p:nvPr/>
+        </p:nvSpPr>
+        <p:spPr>
+          <a:xfrm>
+            <a:off x="5823478" y="4551561"/>
+            <a:ext cx="5801941" cy="762000"/>
+          </a:xfrm>
+          <a:prstGeom prst="rect">
+            <a:avLst/>
+          </a:prstGeom>
+          <a:noFill/>
+          <a:ln/>
+        </p:spPr>
+        <p:txBody>
+          <a:bodyPr wrap="square" lIns="0" tIns="0" rIns="0" bIns="0" rtlCol="0" anchor="t"/>
+          <a:lstStyle/>
+          <a:p>
+            <a:pPr algn="l" indent="0" marL="0">
+              <a:lnSpc>
+                <a:spcPts val="3000"/>
+              </a:lnSpc>
+              <a:spcBef>
+                <a:spcPts val="667"/>
+              </a:spcBef>
+              <a:buNone/>
+            </a:pPr>
+            <a:r>
+              <a:rPr lang="en-US" sz="2000" dirty="0">
+                <a:solidFill>
+                  <a:srgbClr val="E8E5DE"/>
+                </a:solidFill>
+                <a:latin typeface="Inter" pitchFamily="34" charset="0"/>
+                <a:ea typeface="Inter" pitchFamily="34" charset="-122"/>
+                <a:cs typeface="Inter" pitchFamily="34" charset="-120"/>
+              </a:rPr>
+              <a:t>Who reads the record, how often, and what are they allowed to change?</a:t>
+            </a:r>
+            <a:endParaRPr lang="en-US" sz="2000" dirty="0"/>
+          </a:p>
+        </p:txBody>
+      </p:sp>
+      <p:sp>
+        <p:nvSpPr>
+          <p:cNvPr id="18" name="Text 16"/>
+          <p:cNvSpPr/>
+          <p:nvPr/>
+        </p:nvSpPr>
+        <p:spPr>
+          <a:xfrm>
+            <a:off x="677098" y="6079331"/>
+            <a:ext cx="5763089" cy="236934"/>
+          </a:xfrm>
+          <a:prstGeom prst="rect">
+            <a:avLst/>
+          </a:prstGeom>
+          <a:noFill/>
+          <a:ln/>
+        </p:spPr>
+        <p:txBody>
+          <a:bodyPr wrap="square" lIns="0" tIns="0" rIns="0" bIns="0" rtlCol="0" anchor="t"/>
+          <a:lstStyle/>
+          <a:p>
+            <a:pPr algn="l" indent="0" marL="0">
+              <a:lnSpc>
+                <a:spcPts val="1866"/>
+              </a:lnSpc>
+              <a:buNone/>
+            </a:pPr>
+            <a:r>
+              <a:rPr lang="en-US" sz="1333" dirty="0">
+                <a:solidFill>
+                  <a:srgbClr val="9AA6BC"/>
+                </a:solidFill>
+                <a:latin typeface="Inter" pitchFamily="34" charset="0"/>
+                <a:ea typeface="Inter" pitchFamily="34" charset="-122"/>
+                <a:cs typeface="Inter" pitchFamily="34" charset="-120"/>
+              </a:rPr>
+              <a:t>SOURCE — none. No figures in this deck; the argument is mechanical.</a:t>
+            </a:r>
+            <a:endParaRPr lang="en-US" sz="1333" dirty="0"/>
+          </a:p>
+        </p:txBody>
+      </p:sp>
+      <p:sp>
+        <p:nvSpPr>
+          <p:cNvPr id="19" name="Text 17"/>
+          <p:cNvSpPr/>
+          <p:nvPr/>
+        </p:nvSpPr>
+        <p:spPr>
+          <a:xfrm>
+            <a:off x="7804381" y="6079331"/>
+            <a:ext cx="3781622" cy="236934"/>
+          </a:xfrm>
+          <a:prstGeom prst="rect">
+            <a:avLst/>
+          </a:prstGeom>
+          <a:noFill/>
+          <a:ln/>
+        </p:spPr>
+        <p:txBody>
+          <a:bodyPr wrap="square" lIns="0" tIns="0" rIns="0" bIns="0" rtlCol="0" anchor="t"/>
+          <a:lstStyle/>
+          <a:p>
+            <a:pPr algn="l" indent="0" marL="0">
+              <a:lnSpc>
+                <a:spcPts val="1866"/>
+              </a:lnSpc>
+              <a:buNone/>
+            </a:pPr>
+            <a:r>
+              <a:rPr lang="en-US" sz="1333" dirty="0">
+                <a:solidFill>
+                  <a:srgbClr val="9AA6BC"/>
+                </a:solidFill>
+                <a:latin typeface="Inter" pitchFamily="34" charset="0"/>
+                <a:ea typeface="Inter" pitchFamily="34" charset="-122"/>
+                <a:cs typeface="Inter" pitchFamily="34" charset="-120"/>
+              </a:rPr>
+              <a:t>INTERNAL DISCUSSION DRAFT · 06 / 06</a:t>
+            </a:r>
+            <a:endParaRPr lang="en-US" sz="1333" dirty="0"/>
+          </a:p>
+        </p:txBody>
+      </p:sp>
     </p:spTree>
   </p:cSld>
   <p:clrMapOvr>

--- a/decks/prod-access/prod-access.pptx
+++ b/decks/prod-access/prod-access.pptx
@@ -1338,7 +1338,7 @@
           <a:ln/>
         </p:spPr>
         <p:txBody>
-          <a:bodyPr wrap="square" lIns="0" tIns="0" rIns="0" bIns="0" rtlCol="0" anchor="t"/>
+          <a:bodyPr wrap="none" lIns="0" tIns="0" rIns="0" bIns="0" rtlCol="0" anchor="t"/>
           <a:lstStyle/>
           <a:p>
             <a:pPr algn="l" indent="0" marL="0">
@@ -1380,7 +1380,7 @@
           <a:ln/>
         </p:spPr>
         <p:txBody>
-          <a:bodyPr wrap="square" lIns="0" tIns="0" rIns="0" bIns="0" rtlCol="0" anchor="t"/>
+          <a:bodyPr wrap="none" lIns="0" tIns="0" rIns="0" bIns="0" rtlCol="0" anchor="t"/>
           <a:lstStyle/>
           <a:p>
             <a:pPr algn="l" indent="0" marL="0">
@@ -1422,7 +1422,7 @@
           <a:ln/>
         </p:spPr>
         <p:txBody>
-          <a:bodyPr wrap="square" lIns="0" tIns="0" rIns="0" bIns="0" rtlCol="0" anchor="t"/>
+          <a:bodyPr wrap="none" lIns="0" tIns="0" rIns="0" bIns="0" rtlCol="0" anchor="t"/>
           <a:lstStyle/>
           <a:p>
             <a:pPr algn="l" indent="0" marL="0">
@@ -1464,7 +1464,7 @@
           <a:ln/>
         </p:spPr>
         <p:txBody>
-          <a:bodyPr wrap="square" lIns="0" tIns="0" rIns="0" bIns="0" rtlCol="0" anchor="t"/>
+          <a:bodyPr wrap="none" lIns="0" tIns="0" rIns="0" bIns="0" rtlCol="0" anchor="t"/>
           <a:lstStyle/>
           <a:p>
             <a:pPr algn="l" indent="0" marL="0">
@@ -1539,7 +1539,9 @@
           <a:ln/>
         </p:spPr>
         <p:txBody>
-          <a:bodyPr wrap="square" lIns="0" tIns="203175" rIns="0" bIns="0" rtlCol="0" anchor="t"/>
+          <a:bodyPr wrap="square" lIns="0" tIns="203175" rIns="0" bIns="0" rtlCol="0" anchor="t">
+            <a:normAutofit/>
+          </a:bodyPr>
           <a:lstStyle/>
           <a:p>
             <a:pPr algn="l" indent="0" marL="0">
@@ -1577,7 +1579,7 @@
                 <a:ea typeface="Inter" pitchFamily="34" charset="-122"/>
                 <a:cs typeface="Inter" pitchFamily="34" charset="-120"/>
               </a:rPr>
-              <a:t>      once, for a reason that ends — and the grant does not.</a:t>
+              <a:t>once, for a reason that ends — and the grant does not.</a:t>
             </a:r>
             <a:endParaRPr lang="en-US" sz="2133" dirty="0"/>
           </a:p>
@@ -1635,7 +1637,7 @@
           <a:ln/>
         </p:spPr>
         <p:txBody>
-          <a:bodyPr wrap="square" lIns="0" tIns="0" rIns="0" bIns="0" rtlCol="0" anchor="t"/>
+          <a:bodyPr wrap="none" lIns="0" tIns="0" rIns="0" bIns="0" rtlCol="0" anchor="t"/>
           <a:lstStyle/>
           <a:p>
             <a:pPr algn="l" indent="0" marL="0">
@@ -1677,7 +1679,9 @@
           <a:ln/>
         </p:spPr>
         <p:txBody>
-          <a:bodyPr wrap="square" lIns="0" tIns="0" rIns="0" bIns="0" rtlCol="0" anchor="t"/>
+          <a:bodyPr wrap="square" lIns="0" tIns="0" rIns="0" bIns="0" rtlCol="0" anchor="t">
+            <a:normAutofit/>
+          </a:bodyPr>
           <a:lstStyle/>
           <a:p>
             <a:pPr algn="l" indent="0" marL="0">
@@ -1722,7 +1726,7 @@
           <a:ln/>
         </p:spPr>
         <p:txBody>
-          <a:bodyPr wrap="square" lIns="0" tIns="0" rIns="0" bIns="0" rtlCol="0" anchor="t"/>
+          <a:bodyPr wrap="none" lIns="0" tIns="0" rIns="0" bIns="0" rtlCol="0" anchor="t"/>
           <a:lstStyle/>
           <a:p>
             <a:pPr algn="l" indent="0" marL="0">
@@ -1767,7 +1771,7 @@
           <a:ln/>
         </p:spPr>
         <p:txBody>
-          <a:bodyPr wrap="square" lIns="0" tIns="0" rIns="0" bIns="0" rtlCol="0" anchor="t"/>
+          <a:bodyPr wrap="none" lIns="0" tIns="0" rIns="0" bIns="0" rtlCol="0" anchor="t"/>
           <a:lstStyle/>
           <a:p>
             <a:pPr algn="l" indent="0" marL="0">
@@ -1809,7 +1813,7 @@
           <a:ln/>
         </p:spPr>
         <p:txBody>
-          <a:bodyPr wrap="square" lIns="0" tIns="0" rIns="0" bIns="0" rtlCol="0" anchor="t"/>
+          <a:bodyPr wrap="none" lIns="0" tIns="0" rIns="0" bIns="0" rtlCol="0" anchor="t"/>
           <a:lstStyle/>
           <a:p>
             <a:pPr algn="l" indent="0" marL="0">
@@ -1883,7 +1887,7 @@
           <a:ln/>
         </p:spPr>
         <p:txBody>
-          <a:bodyPr wrap="square" lIns="0" tIns="0" rIns="0" bIns="0" rtlCol="0" anchor="t"/>
+          <a:bodyPr wrap="none" lIns="0" tIns="0" rIns="0" bIns="0" rtlCol="0" anchor="t"/>
           <a:lstStyle/>
           <a:p>
             <a:pPr algn="l" indent="0" marL="0">
@@ -1925,7 +1929,7 @@
           <a:ln/>
         </p:spPr>
         <p:txBody>
-          <a:bodyPr wrap="square" lIns="0" tIns="0" rIns="0" bIns="0" rtlCol="0" anchor="t"/>
+          <a:bodyPr wrap="none" lIns="0" tIns="0" rIns="0" bIns="0" rtlCol="0" anchor="t"/>
           <a:lstStyle/>
           <a:p>
             <a:pPr algn="l" indent="0" marL="0">
@@ -1967,7 +1971,7 @@
           <a:ln/>
         </p:spPr>
         <p:txBody>
-          <a:bodyPr wrap="square" lIns="0" tIns="0" rIns="0" bIns="0" rtlCol="0" anchor="t"/>
+          <a:bodyPr wrap="none" lIns="0" tIns="0" rIns="0" bIns="0" rtlCol="0" anchor="t"/>
           <a:lstStyle/>
           <a:p>
             <a:pPr algn="l" indent="0" marL="0">
@@ -2046,6 +2050,10 @@
             <a:prstDash val="solid"/>
           </a:ln>
         </p:spPr>
+        <p:txBody>
+          <a:bodyPr/>
+          <a:p/>
+        </p:txBody>
       </p:sp>
       <p:sp>
         <p:nvSpPr>
@@ -2065,7 +2073,7 @@
           <a:ln/>
         </p:spPr>
         <p:txBody>
-          <a:bodyPr wrap="square" lIns="0" tIns="0" rIns="0" bIns="0" rtlCol="0" anchor="t"/>
+          <a:bodyPr wrap="none" lIns="0" tIns="0" rIns="0" bIns="0" rtlCol="0" anchor="t"/>
           <a:lstStyle/>
           <a:p>
             <a:pPr algn="l" indent="0" marL="0">
@@ -2107,7 +2115,7 @@
           <a:ln/>
         </p:spPr>
         <p:txBody>
-          <a:bodyPr wrap="square" lIns="0" tIns="0" rIns="0" bIns="0" rtlCol="0" anchor="t"/>
+          <a:bodyPr wrap="none" lIns="0" tIns="0" rIns="0" bIns="0" rtlCol="0" anchor="t"/>
           <a:lstStyle/>
           <a:p>
             <a:pPr algn="l" indent="0" marL="0">
@@ -2149,7 +2157,7 @@
           <a:ln/>
         </p:spPr>
         <p:txBody>
-          <a:bodyPr wrap="square" lIns="0" tIns="0" rIns="0" bIns="0" rtlCol="0" anchor="t"/>
+          <a:bodyPr wrap="none" lIns="0" tIns="0" rIns="0" bIns="0" rtlCol="0" anchor="t"/>
           <a:lstStyle/>
           <a:p>
             <a:pPr algn="l" indent="0" marL="0">
@@ -2195,6 +2203,10 @@
             <a:prstDash val="solid"/>
           </a:ln>
         </p:spPr>
+        <p:txBody>
+          <a:bodyPr/>
+          <a:p/>
+        </p:txBody>
       </p:sp>
       <p:sp>
         <p:nvSpPr>
@@ -2214,7 +2226,7 @@
           <a:ln/>
         </p:spPr>
         <p:txBody>
-          <a:bodyPr wrap="square" lIns="0" tIns="0" rIns="0" bIns="0" rtlCol="0" anchor="t"/>
+          <a:bodyPr wrap="none" lIns="0" tIns="0" rIns="0" bIns="0" rtlCol="0" anchor="t"/>
           <a:lstStyle/>
           <a:p>
             <a:pPr algn="l" indent="0" marL="0">
@@ -2256,7 +2268,7 @@
           <a:ln/>
         </p:spPr>
         <p:txBody>
-          <a:bodyPr wrap="square" lIns="0" tIns="0" rIns="0" bIns="0" rtlCol="0" anchor="t"/>
+          <a:bodyPr wrap="none" lIns="0" tIns="0" rIns="0" bIns="0" rtlCol="0" anchor="t"/>
           <a:lstStyle/>
           <a:p>
             <a:pPr algn="l" indent="0" marL="0">
@@ -2298,7 +2310,7 @@
           <a:ln/>
         </p:spPr>
         <p:txBody>
-          <a:bodyPr wrap="square" lIns="0" tIns="0" rIns="0" bIns="0" rtlCol="0" anchor="t"/>
+          <a:bodyPr wrap="none" lIns="0" tIns="0" rIns="0" bIns="0" rtlCol="0" anchor="t"/>
           <a:lstStyle/>
           <a:p>
             <a:pPr algn="l" indent="0" marL="0">
@@ -2340,7 +2352,7 @@
           <a:ln/>
         </p:spPr>
         <p:txBody>
-          <a:bodyPr wrap="square" lIns="0" tIns="0" rIns="0" bIns="0" rtlCol="0" anchor="t"/>
+          <a:bodyPr wrap="none" lIns="0" tIns="0" rIns="0" bIns="0" rtlCol="0" anchor="t"/>
           <a:lstStyle/>
           <a:p>
             <a:pPr algn="l" indent="0" marL="0">
@@ -2389,6 +2401,10 @@
             <a:prstDash val="solid"/>
           </a:ln>
         </p:spPr>
+        <p:txBody>
+          <a:bodyPr/>
+          <a:p/>
+        </p:txBody>
       </p:sp>
       <p:sp>
         <p:nvSpPr>
@@ -2408,7 +2424,7 @@
           <a:ln/>
         </p:spPr>
         <p:txBody>
-          <a:bodyPr wrap="square" lIns="0" tIns="0" rIns="0" bIns="0" rtlCol="0" anchor="t"/>
+          <a:bodyPr wrap="none" lIns="0" tIns="0" rIns="0" bIns="0" rtlCol="0" anchor="t"/>
           <a:lstStyle/>
           <a:p>
             <a:pPr algn="l" indent="0" marL="0">
@@ -2450,7 +2466,7 @@
           <a:ln/>
         </p:spPr>
         <p:txBody>
-          <a:bodyPr wrap="square" lIns="0" tIns="0" rIns="0" bIns="0" rtlCol="0" anchor="t"/>
+          <a:bodyPr wrap="none" lIns="0" tIns="0" rIns="0" bIns="0" rtlCol="0" anchor="t"/>
           <a:lstStyle/>
           <a:p>
             <a:pPr algn="l" indent="0" marL="0">
@@ -2492,7 +2508,7 @@
           <a:ln/>
         </p:spPr>
         <p:txBody>
-          <a:bodyPr wrap="square" lIns="0" tIns="0" rIns="0" bIns="0" rtlCol="0" anchor="t"/>
+          <a:bodyPr wrap="none" lIns="0" tIns="0" rIns="0" bIns="0" rtlCol="0" anchor="t"/>
           <a:lstStyle/>
           <a:p>
             <a:pPr algn="l" indent="0" marL="0">
@@ -2534,7 +2550,7 @@
           <a:ln/>
         </p:spPr>
         <p:txBody>
-          <a:bodyPr wrap="square" lIns="0" tIns="0" rIns="0" bIns="0" rtlCol="0" anchor="t"/>
+          <a:bodyPr wrap="none" lIns="0" tIns="0" rIns="0" bIns="0" rtlCol="0" anchor="t"/>
           <a:lstStyle/>
           <a:p>
             <a:pPr algn="l" indent="0" marL="0">
@@ -2583,6 +2599,10 @@
             <a:prstDash val="solid"/>
           </a:ln>
         </p:spPr>
+        <p:txBody>
+          <a:bodyPr/>
+          <a:p/>
+        </p:txBody>
       </p:sp>
       <p:sp>
         <p:nvSpPr>
@@ -2602,7 +2622,7 @@
           <a:ln/>
         </p:spPr>
         <p:txBody>
-          <a:bodyPr wrap="square" lIns="0" tIns="0" rIns="0" bIns="0" rtlCol="0" anchor="t"/>
+          <a:bodyPr wrap="none" lIns="0" tIns="0" rIns="0" bIns="0" rtlCol="0" anchor="t"/>
           <a:lstStyle/>
           <a:p>
             <a:pPr algn="l" indent="0" marL="0">
@@ -2644,7 +2664,7 @@
           <a:ln/>
         </p:spPr>
         <p:txBody>
-          <a:bodyPr wrap="square" lIns="0" tIns="0" rIns="0" bIns="0" rtlCol="0" anchor="t"/>
+          <a:bodyPr wrap="none" lIns="0" tIns="0" rIns="0" bIns="0" rtlCol="0" anchor="t"/>
           <a:lstStyle/>
           <a:p>
             <a:pPr algn="l" indent="0" marL="0">
@@ -2686,7 +2706,7 @@
           <a:ln/>
         </p:spPr>
         <p:txBody>
-          <a:bodyPr wrap="square" lIns="0" tIns="0" rIns="0" bIns="0" rtlCol="0" anchor="t"/>
+          <a:bodyPr wrap="none" lIns="0" tIns="0" rIns="0" bIns="0" rtlCol="0" anchor="t"/>
           <a:lstStyle/>
           <a:p>
             <a:pPr algn="l" indent="0" marL="0">
@@ -2728,7 +2748,7 @@
           <a:ln/>
         </p:spPr>
         <p:txBody>
-          <a:bodyPr wrap="square" lIns="0" tIns="0" rIns="0" bIns="0" rtlCol="0" anchor="t"/>
+          <a:bodyPr wrap="none" lIns="0" tIns="0" rIns="0" bIns="0" rtlCol="0" anchor="t"/>
           <a:lstStyle/>
           <a:p>
             <a:pPr algn="l" indent="0" marL="0">
@@ -2777,6 +2797,10 @@
             <a:prstDash val="solid"/>
           </a:ln>
         </p:spPr>
+        <p:txBody>
+          <a:bodyPr/>
+          <a:p/>
+        </p:txBody>
       </p:sp>
       <p:sp>
         <p:nvSpPr>
@@ -2796,7 +2820,7 @@
           <a:ln/>
         </p:spPr>
         <p:txBody>
-          <a:bodyPr wrap="square" lIns="0" tIns="0" rIns="0" bIns="0" rtlCol="0" anchor="t"/>
+          <a:bodyPr wrap="none" lIns="0" tIns="0" rIns="0" bIns="0" rtlCol="0" anchor="t"/>
           <a:lstStyle/>
           <a:p>
             <a:pPr algn="l" indent="0" marL="0">
@@ -2838,7 +2862,7 @@
           <a:ln/>
         </p:spPr>
         <p:txBody>
-          <a:bodyPr wrap="square" lIns="0" tIns="0" rIns="0" bIns="0" rtlCol="0" anchor="t"/>
+          <a:bodyPr wrap="none" lIns="0" tIns="0" rIns="0" bIns="0" rtlCol="0" anchor="t"/>
           <a:lstStyle/>
           <a:p>
             <a:pPr algn="l" indent="0" marL="0">
@@ -2880,7 +2904,7 @@
           <a:ln/>
         </p:spPr>
         <p:txBody>
-          <a:bodyPr wrap="square" lIns="0" tIns="0" rIns="0" bIns="0" rtlCol="0" anchor="t"/>
+          <a:bodyPr wrap="none" lIns="0" tIns="0" rIns="0" bIns="0" rtlCol="0" anchor="t"/>
           <a:lstStyle/>
           <a:p>
             <a:pPr algn="l" indent="0" marL="0">
@@ -2954,7 +2978,7 @@
           <a:ln/>
         </p:spPr>
         <p:txBody>
-          <a:bodyPr wrap="square" lIns="0" tIns="0" rIns="0" bIns="0" rtlCol="0" anchor="t"/>
+          <a:bodyPr wrap="none" lIns="0" tIns="0" rIns="0" bIns="0" rtlCol="0" anchor="t"/>
           <a:lstStyle/>
           <a:p>
             <a:pPr algn="l" indent="0" marL="0">
@@ -2996,7 +3020,7 @@
           <a:ln/>
         </p:spPr>
         <p:txBody>
-          <a:bodyPr wrap="square" lIns="0" tIns="0" rIns="0" bIns="0" rtlCol="0" anchor="t"/>
+          <a:bodyPr wrap="none" lIns="0" tIns="0" rIns="0" bIns="0" rtlCol="0" anchor="t"/>
           <a:lstStyle/>
           <a:p>
             <a:pPr algn="l" indent="0" marL="0">
@@ -3038,7 +3062,7 @@
           <a:ln/>
         </p:spPr>
         <p:txBody>
-          <a:bodyPr wrap="square" lIns="0" tIns="0" rIns="0" bIns="0" rtlCol="0" anchor="t"/>
+          <a:bodyPr wrap="none" lIns="0" tIns="0" rIns="0" bIns="0" rtlCol="0" anchor="t"/>
           <a:lstStyle/>
           <a:p>
             <a:pPr algn="l" indent="0" marL="0">
@@ -3147,7 +3171,7 @@
           <a:ln/>
         </p:spPr>
         <p:txBody>
-          <a:bodyPr wrap="square" lIns="0" tIns="0" rIns="0" bIns="0" rtlCol="0" anchor="t"/>
+          <a:bodyPr wrap="none" lIns="0" tIns="0" rIns="0" bIns="0" rtlCol="0" anchor="t"/>
           <a:lstStyle/>
           <a:p>
             <a:pPr algn="l" indent="0" marL="0">
@@ -3189,7 +3213,9 @@
           <a:ln/>
         </p:spPr>
         <p:txBody>
-          <a:bodyPr wrap="square" lIns="0" tIns="0" rIns="0" bIns="0" rtlCol="0" anchor="t"/>
+          <a:bodyPr wrap="square" lIns="0" tIns="0" rIns="0" bIns="0" rtlCol="0" anchor="t">
+            <a:normAutofit/>
+          </a:bodyPr>
           <a:lstStyle/>
           <a:p>
             <a:pPr algn="l" indent="0" marL="0">
@@ -3287,7 +3313,9 @@
           <a:ln/>
         </p:spPr>
         <p:txBody>
-          <a:bodyPr wrap="square" lIns="0" tIns="0" rIns="0" bIns="0" rtlCol="0" anchor="t"/>
+          <a:bodyPr wrap="square" lIns="0" tIns="0" rIns="0" bIns="0" rtlCol="0" anchor="t">
+            <a:normAutofit/>
+          </a:bodyPr>
           <a:lstStyle/>
           <a:p>
             <a:pPr algn="l" indent="0" marL="0">
@@ -3325,7 +3353,7 @@
                 <a:ea typeface="Inter" pitchFamily="34" charset="-122"/>
                 <a:cs typeface="Inter" pitchFamily="34" charset="-120"/>
               </a:rPr>
-              <a:t>        at 03:00.</a:t>
+              <a:t>at 03:00.</a:t>
             </a:r>
             <a:endParaRPr lang="en-US" sz="1866" dirty="0"/>
           </a:p>
@@ -3383,7 +3411,7 @@
           <a:ln/>
         </p:spPr>
         <p:txBody>
-          <a:bodyPr wrap="square" lIns="0" tIns="0" rIns="0" bIns="0" rtlCol="0" anchor="t"/>
+          <a:bodyPr wrap="none" lIns="0" tIns="0" rIns="0" bIns="0" rtlCol="0" anchor="t"/>
           <a:lstStyle/>
           <a:p>
             <a:pPr algn="l" indent="0" marL="0">
@@ -3425,7 +3453,9 @@
           <a:ln/>
         </p:spPr>
         <p:txBody>
-          <a:bodyPr wrap="square" lIns="0" tIns="0" rIns="0" bIns="0" rtlCol="0" anchor="t"/>
+          <a:bodyPr wrap="square" lIns="0" tIns="0" rIns="0" bIns="0" rtlCol="0" anchor="t">
+            <a:normAutofit/>
+          </a:bodyPr>
           <a:lstStyle/>
           <a:p>
             <a:pPr algn="l" indent="0" marL="0">
@@ -3523,7 +3553,9 @@
           <a:ln/>
         </p:spPr>
         <p:txBody>
-          <a:bodyPr wrap="square" lIns="0" tIns="0" rIns="0" bIns="0" rtlCol="0" anchor="t"/>
+          <a:bodyPr wrap="square" lIns="0" tIns="0" rIns="0" bIns="0" rtlCol="0" anchor="t">
+            <a:normAutofit/>
+          </a:bodyPr>
           <a:lstStyle/>
           <a:p>
             <a:pPr algn="l" indent="0" marL="0">
@@ -3561,7 +3593,7 @@
                 <a:ea typeface="Inter" pitchFamily="34" charset="-122"/>
                 <a:cs typeface="Inter" pitchFamily="34" charset="-120"/>
               </a:rPr>
-              <a:t>        needs someone awake.</a:t>
+              <a:t>needs someone awake.</a:t>
             </a:r>
             <a:endParaRPr lang="en-US" sz="1866" dirty="0"/>
           </a:p>
@@ -3619,7 +3651,7 @@
           <a:ln/>
         </p:spPr>
         <p:txBody>
-          <a:bodyPr wrap="square" lIns="0" tIns="0" rIns="0" bIns="0" rtlCol="0" anchor="t"/>
+          <a:bodyPr wrap="none" lIns="0" tIns="0" rIns="0" bIns="0" rtlCol="0" anchor="t"/>
           <a:lstStyle/>
           <a:p>
             <a:pPr algn="l" indent="0" marL="0">
@@ -3661,7 +3693,9 @@
           <a:ln/>
         </p:spPr>
         <p:txBody>
-          <a:bodyPr wrap="square" lIns="0" tIns="0" rIns="0" bIns="0" rtlCol="0" anchor="t"/>
+          <a:bodyPr wrap="square" lIns="0" tIns="0" rIns="0" bIns="0" rtlCol="0" anchor="t">
+            <a:normAutofit/>
+          </a:bodyPr>
           <a:lstStyle/>
           <a:p>
             <a:pPr algn="l" indent="0" marL="0">
@@ -3759,7 +3793,9 @@
           <a:ln/>
         </p:spPr>
         <p:txBody>
-          <a:bodyPr wrap="square" lIns="0" tIns="0" rIns="0" bIns="0" rtlCol="0" anchor="t"/>
+          <a:bodyPr wrap="square" lIns="0" tIns="0" rIns="0" bIns="0" rtlCol="0" anchor="t">
+            <a:normAutofit/>
+          </a:bodyPr>
           <a:lstStyle/>
           <a:p>
             <a:pPr algn="l" indent="0" marL="0">
@@ -3797,7 +3833,7 @@
                 <a:ea typeface="Inter" pitchFamily="34" charset="-122"/>
                 <a:cs typeface="Inter" pitchFamily="34" charset="-120"/>
               </a:rPr>
-              <a:t>        it goes stale.</a:t>
+              <a:t>it goes stale.</a:t>
             </a:r>
             <a:endParaRPr lang="en-US" sz="1866" dirty="0"/>
           </a:p>
@@ -3825,6 +3861,10 @@
             <a:prstDash val="solid"/>
           </a:ln>
         </p:spPr>
+        <p:txBody>
+          <a:bodyPr/>
+          <a:p/>
+        </p:txBody>
       </p:sp>
       <p:sp>
         <p:nvSpPr>
@@ -3844,7 +3884,7 @@
           <a:ln/>
         </p:spPr>
         <p:txBody>
-          <a:bodyPr wrap="square" lIns="0" tIns="0" rIns="0" bIns="0" rtlCol="0" anchor="t"/>
+          <a:bodyPr wrap="none" lIns="0" tIns="0" rIns="0" bIns="0" rtlCol="0" anchor="t"/>
           <a:lstStyle/>
           <a:p>
             <a:pPr algn="l" indent="0" marL="0">
@@ -3886,7 +3926,7 @@
           <a:ln/>
         </p:spPr>
         <p:txBody>
-          <a:bodyPr wrap="square" lIns="0" tIns="0" rIns="0" bIns="0" rtlCol="0" anchor="t"/>
+          <a:bodyPr wrap="none" lIns="0" tIns="0" rIns="0" bIns="0" rtlCol="0" anchor="t"/>
           <a:lstStyle/>
           <a:p>
             <a:pPr algn="l" indent="0" marL="0">
@@ -3928,7 +3968,7 @@
           <a:ln/>
         </p:spPr>
         <p:txBody>
-          <a:bodyPr wrap="square" lIns="0" tIns="0" rIns="0" bIns="0" rtlCol="0" anchor="t"/>
+          <a:bodyPr wrap="none" lIns="0" tIns="0" rIns="0" bIns="0" rtlCol="0" anchor="t"/>
           <a:lstStyle/>
           <a:p>
             <a:pPr algn="l" indent="0" marL="0">
@@ -4002,7 +4042,7 @@
           <a:ln/>
         </p:spPr>
         <p:txBody>
-          <a:bodyPr wrap="square" lIns="0" tIns="0" rIns="0" bIns="0" rtlCol="0" anchor="t"/>
+          <a:bodyPr wrap="none" lIns="0" tIns="0" rIns="0" bIns="0" rtlCol="0" anchor="t"/>
           <a:lstStyle/>
           <a:p>
             <a:pPr algn="l" indent="0" marL="0">
@@ -4044,7 +4084,7 @@
           <a:ln/>
         </p:spPr>
         <p:txBody>
-          <a:bodyPr wrap="square" lIns="0" tIns="0" rIns="0" bIns="0" rtlCol="0" anchor="t"/>
+          <a:bodyPr wrap="none" lIns="0" tIns="0" rIns="0" bIns="0" rtlCol="0" anchor="t"/>
           <a:lstStyle/>
           <a:p>
             <a:pPr algn="l" indent="0" marL="0">
@@ -4086,7 +4126,7 @@
           <a:ln/>
         </p:spPr>
         <p:txBody>
-          <a:bodyPr wrap="square" lIns="0" tIns="0" rIns="0" bIns="0" rtlCol="0" anchor="t"/>
+          <a:bodyPr wrap="none" lIns="0" tIns="0" rIns="0" bIns="0" rtlCol="0" anchor="t"/>
           <a:lstStyle/>
           <a:p>
             <a:pPr algn="l" indent="0" marL="0">
@@ -4195,7 +4235,7 @@
           <a:ln/>
         </p:spPr>
         <p:txBody>
-          <a:bodyPr wrap="square" lIns="0" tIns="0" rIns="0" bIns="0" rtlCol="0" anchor="t"/>
+          <a:bodyPr wrap="none" lIns="0" tIns="0" rIns="0" bIns="0" rtlCol="0" anchor="t"/>
           <a:lstStyle/>
           <a:p>
             <a:pPr algn="l" indent="0" marL="0">
@@ -4237,7 +4277,7 @@
           <a:ln/>
         </p:spPr>
         <p:txBody>
-          <a:bodyPr wrap="square" lIns="0" tIns="0" rIns="0" bIns="0" rtlCol="0" anchor="t"/>
+          <a:bodyPr wrap="none" lIns="0" tIns="0" rIns="0" bIns="0" rtlCol="0" anchor="t"/>
           <a:lstStyle/>
           <a:p>
             <a:pPr algn="l" indent="0" marL="0">
@@ -4282,7 +4322,9 @@
           <a:ln/>
         </p:spPr>
         <p:txBody>
-          <a:bodyPr wrap="square" lIns="0" tIns="0" rIns="0" bIns="0" rtlCol="0" anchor="t"/>
+          <a:bodyPr wrap="square" lIns="0" tIns="0" rIns="0" bIns="0" rtlCol="0" anchor="t">
+            <a:normAutofit/>
+          </a:bodyPr>
           <a:lstStyle/>
           <a:p>
             <a:pPr algn="l" indent="0" marL="0">
@@ -4361,7 +4403,7 @@
           <a:ln/>
         </p:spPr>
         <p:txBody>
-          <a:bodyPr wrap="square" lIns="0" tIns="0" rIns="0" bIns="0" rtlCol="0" anchor="t"/>
+          <a:bodyPr wrap="none" lIns="0" tIns="0" rIns="0" bIns="0" rtlCol="0" anchor="t"/>
           <a:lstStyle/>
           <a:p>
             <a:pPr algn="l" indent="0" marL="0">
@@ -4403,7 +4445,7 @@
           <a:ln/>
         </p:spPr>
         <p:txBody>
-          <a:bodyPr wrap="square" lIns="0" tIns="0" rIns="0" bIns="0" rtlCol="0" anchor="t"/>
+          <a:bodyPr wrap="none" lIns="0" tIns="0" rIns="0" bIns="0" rtlCol="0" anchor="t"/>
           <a:lstStyle/>
           <a:p>
             <a:pPr algn="l" indent="0" marL="0">
@@ -4448,7 +4490,9 @@
           <a:ln/>
         </p:spPr>
         <p:txBody>
-          <a:bodyPr wrap="square" lIns="0" tIns="0" rIns="0" bIns="0" rtlCol="0" anchor="t"/>
+          <a:bodyPr wrap="square" lIns="0" tIns="0" rIns="0" bIns="0" rtlCol="0" anchor="t">
+            <a:normAutofit/>
+          </a:bodyPr>
           <a:lstStyle/>
           <a:p>
             <a:pPr algn="l" indent="0" marL="0">
@@ -4492,7 +4536,7 @@
                 <a:ea typeface="Inter" pitchFamily="34" charset="-122"/>
                 <a:cs typeface="Inter" pitchFamily="34" charset="-120"/>
               </a:rPr>
-              <a:t>        happened.</a:t>
+              <a:t>happened.</a:t>
             </a:r>
             <a:endParaRPr lang="en-US" sz="1866" dirty="0"/>
           </a:p>
@@ -4550,7 +4594,7 @@
           <a:ln/>
         </p:spPr>
         <p:txBody>
-          <a:bodyPr wrap="square" lIns="0" tIns="0" rIns="0" bIns="0" rtlCol="0" anchor="t"/>
+          <a:bodyPr wrap="none" lIns="0" tIns="0" rIns="0" bIns="0" rtlCol="0" anchor="t"/>
           <a:lstStyle/>
           <a:p>
             <a:pPr algn="l" indent="0" marL="0">
@@ -4592,7 +4636,7 @@
           <a:ln/>
         </p:spPr>
         <p:txBody>
-          <a:bodyPr wrap="square" lIns="0" tIns="0" rIns="0" bIns="0" rtlCol="0" anchor="t"/>
+          <a:bodyPr wrap="none" lIns="0" tIns="0" rIns="0" bIns="0" rtlCol="0" anchor="t"/>
           <a:lstStyle/>
           <a:p>
             <a:pPr algn="l" indent="0" marL="0">
@@ -4637,7 +4681,9 @@
           <a:ln/>
         </p:spPr>
         <p:txBody>
-          <a:bodyPr wrap="square" lIns="0" tIns="0" rIns="0" bIns="0" rtlCol="0" anchor="t"/>
+          <a:bodyPr wrap="square" lIns="0" tIns="0" rIns="0" bIns="0" rtlCol="0" anchor="t">
+            <a:normAutofit/>
+          </a:bodyPr>
           <a:lstStyle/>
           <a:p>
             <a:pPr algn="l" indent="0" marL="0">
@@ -4716,7 +4762,7 @@
           <a:ln/>
         </p:spPr>
         <p:txBody>
-          <a:bodyPr wrap="square" lIns="0" tIns="0" rIns="0" bIns="0" rtlCol="0" anchor="t"/>
+          <a:bodyPr wrap="none" lIns="0" tIns="0" rIns="0" bIns="0" rtlCol="0" anchor="t"/>
           <a:lstStyle/>
           <a:p>
             <a:pPr algn="l" indent="0" marL="0">
@@ -4758,7 +4804,7 @@
           <a:ln/>
         </p:spPr>
         <p:txBody>
-          <a:bodyPr wrap="square" lIns="0" tIns="0" rIns="0" bIns="0" rtlCol="0" anchor="t"/>
+          <a:bodyPr wrap="none" lIns="0" tIns="0" rIns="0" bIns="0" rtlCol="0" anchor="t"/>
           <a:lstStyle/>
           <a:p>
             <a:pPr algn="l" indent="0" marL="0">
@@ -4803,7 +4849,9 @@
           <a:ln/>
         </p:spPr>
         <p:txBody>
-          <a:bodyPr wrap="square" lIns="0" tIns="0" rIns="0" bIns="0" rtlCol="0" anchor="t"/>
+          <a:bodyPr wrap="square" lIns="0" tIns="0" rIns="0" bIns="0" rtlCol="0" anchor="t">
+            <a:normAutofit/>
+          </a:bodyPr>
           <a:lstStyle/>
           <a:p>
             <a:pPr algn="l" indent="0" marL="0">
@@ -4848,7 +4896,7 @@
           <a:ln/>
         </p:spPr>
         <p:txBody>
-          <a:bodyPr wrap="square" lIns="0" tIns="0" rIns="0" bIns="0" rtlCol="0" anchor="t"/>
+          <a:bodyPr wrap="none" lIns="0" tIns="0" rIns="0" bIns="0" rtlCol="0" anchor="t"/>
           <a:lstStyle/>
           <a:p>
             <a:pPr algn="l" indent="0" marL="0">
@@ -4890,7 +4938,7 @@
           <a:ln/>
         </p:spPr>
         <p:txBody>
-          <a:bodyPr wrap="square" lIns="0" tIns="0" rIns="0" bIns="0" rtlCol="0" anchor="t"/>
+          <a:bodyPr wrap="none" lIns="0" tIns="0" rIns="0" bIns="0" rtlCol="0" anchor="t"/>
           <a:lstStyle/>
           <a:p>
             <a:pPr algn="l" indent="0" marL="0">
@@ -4964,7 +5012,7 @@
           <a:ln/>
         </p:spPr>
         <p:txBody>
-          <a:bodyPr wrap="square" lIns="0" tIns="0" rIns="0" bIns="0" rtlCol="0" anchor="t"/>
+          <a:bodyPr wrap="none" lIns="0" tIns="0" rIns="0" bIns="0" rtlCol="0" anchor="t"/>
           <a:lstStyle/>
           <a:p>
             <a:pPr algn="l" indent="0" marL="0">
@@ -5006,7 +5054,7 @@
           <a:ln/>
         </p:spPr>
         <p:txBody>
-          <a:bodyPr wrap="square" lIns="0" tIns="0" rIns="0" bIns="0" rtlCol="0" anchor="t"/>
+          <a:bodyPr wrap="none" lIns="0" tIns="0" rIns="0" bIns="0" rtlCol="0" anchor="t"/>
           <a:lstStyle/>
           <a:p>
             <a:pPr algn="l" indent="0" marL="0">
@@ -5048,7 +5096,7 @@
           <a:ln/>
         </p:spPr>
         <p:txBody>
-          <a:bodyPr wrap="square" lIns="0" tIns="0" rIns="0" bIns="0" rtlCol="0" anchor="t"/>
+          <a:bodyPr wrap="none" lIns="0" tIns="0" rIns="0" bIns="0" rtlCol="0" anchor="t"/>
           <a:lstStyle/>
           <a:p>
             <a:pPr algn="l" indent="0" marL="0">
@@ -5157,7 +5205,7 @@
           <a:ln/>
         </p:spPr>
         <p:txBody>
-          <a:bodyPr wrap="square" lIns="0" tIns="0" rIns="0" bIns="0" rtlCol="0" anchor="t"/>
+          <a:bodyPr wrap="none" lIns="0" tIns="0" rIns="0" bIns="0" rtlCol="0" anchor="t"/>
           <a:lstStyle/>
           <a:p>
             <a:pPr algn="l" indent="0" marL="0">
@@ -5199,7 +5247,9 @@
           <a:ln/>
         </p:spPr>
         <p:txBody>
-          <a:bodyPr wrap="square" lIns="0" tIns="0" rIns="0" bIns="0" rtlCol="0" anchor="t"/>
+          <a:bodyPr wrap="square" lIns="0" tIns="0" rIns="0" bIns="0" rtlCol="0" anchor="t">
+            <a:normAutofit/>
+          </a:bodyPr>
           <a:lstStyle/>
           <a:p>
             <a:pPr algn="l" indent="0" marL="0">
@@ -5297,7 +5347,9 @@
           <a:ln/>
         </p:spPr>
         <p:txBody>
-          <a:bodyPr wrap="square" lIns="0" tIns="0" rIns="0" bIns="0" rtlCol="0" anchor="t"/>
+          <a:bodyPr wrap="square" lIns="0" tIns="0" rIns="0" bIns="0" rtlCol="0" anchor="t">
+            <a:normAutofit/>
+          </a:bodyPr>
           <a:lstStyle/>
           <a:p>
             <a:pPr algn="l" indent="0" marL="0">
@@ -5403,7 +5455,7 @@
           <a:ln/>
         </p:spPr>
         <p:txBody>
-          <a:bodyPr wrap="square" lIns="0" tIns="0" rIns="0" bIns="0" rtlCol="0" anchor="t"/>
+          <a:bodyPr wrap="none" lIns="0" tIns="0" rIns="0" bIns="0" rtlCol="0" anchor="t"/>
           <a:lstStyle/>
           <a:p>
             <a:pPr algn="l" indent="0" marL="0">
@@ -5445,7 +5497,9 @@
           <a:ln/>
         </p:spPr>
         <p:txBody>
-          <a:bodyPr wrap="square" lIns="0" tIns="0" rIns="0" bIns="0" rtlCol="0" anchor="t"/>
+          <a:bodyPr wrap="square" lIns="0" tIns="0" rIns="0" bIns="0" rtlCol="0" anchor="t">
+            <a:normAutofit/>
+          </a:bodyPr>
           <a:lstStyle/>
           <a:p>
             <a:pPr algn="l" indent="0" marL="0">
@@ -5543,7 +5597,9 @@
           <a:ln/>
         </p:spPr>
         <p:txBody>
-          <a:bodyPr wrap="square" lIns="0" tIns="0" rIns="0" bIns="0" rtlCol="0" anchor="t"/>
+          <a:bodyPr wrap="square" lIns="0" tIns="0" rIns="0" bIns="0" rtlCol="0" anchor="t">
+            <a:normAutofit/>
+          </a:bodyPr>
           <a:lstStyle/>
           <a:p>
             <a:pPr algn="l" indent="0" marL="0">
@@ -5581,7 +5637,7 @@
                 <a:ea typeface="Inter" pitchFamily="34" charset="-122"/>
                 <a:cs typeface="Inter" pitchFamily="34" charset="-120"/>
               </a:rPr>
-              <a:t>        evidence.</a:t>
+              <a:t>evidence.</a:t>
             </a:r>
             <a:endParaRPr lang="en-US" sz="1866" dirty="0"/>
           </a:p>
@@ -5669,7 +5725,7 @@
           <a:ln/>
         </p:spPr>
         <p:txBody>
-          <a:bodyPr wrap="square" lIns="0" tIns="0" rIns="0" bIns="0" rtlCol="0" anchor="t"/>
+          <a:bodyPr wrap="none" lIns="0" tIns="0" rIns="0" bIns="0" rtlCol="0" anchor="t"/>
           <a:lstStyle/>
           <a:p>
             <a:pPr algn="l" indent="0" marL="0">
@@ -5711,7 +5767,9 @@
           <a:ln/>
         </p:spPr>
         <p:txBody>
-          <a:bodyPr wrap="square" lIns="0" tIns="0" rIns="0" bIns="0" rtlCol="0" anchor="t"/>
+          <a:bodyPr wrap="square" lIns="0" tIns="0" rIns="0" bIns="0" rtlCol="0" anchor="t">
+            <a:normAutofit/>
+          </a:bodyPr>
           <a:lstStyle/>
           <a:p>
             <a:pPr algn="l" indent="0" marL="0">
@@ -5809,7 +5867,9 @@
           <a:ln/>
         </p:spPr>
         <p:txBody>
-          <a:bodyPr wrap="square" lIns="0" tIns="0" rIns="0" bIns="0" rtlCol="0" anchor="t"/>
+          <a:bodyPr wrap="square" lIns="0" tIns="0" rIns="0" bIns="0" rtlCol="0" anchor="t">
+            <a:normAutofit/>
+          </a:bodyPr>
           <a:lstStyle/>
           <a:p>
             <a:pPr algn="l" indent="0" marL="0">
@@ -5847,7 +5907,7 @@
                 <a:ea typeface="Inter" pitchFamily="34" charset="-122"/>
                 <a:cs typeface="Inter" pitchFamily="34" charset="-120"/>
               </a:rPr>
-              <a:t>        theatre.</a:t>
+              <a:t>theatre.</a:t>
             </a:r>
             <a:endParaRPr lang="en-US" sz="1866" dirty="0"/>
           </a:p>
@@ -5875,6 +5935,10 @@
             <a:prstDash val="solid"/>
           </a:ln>
         </p:spPr>
+        <p:txBody>
+          <a:bodyPr/>
+          <a:p/>
+        </p:txBody>
       </p:sp>
       <p:sp>
         <p:nvSpPr>
@@ -5894,7 +5958,7 @@
           <a:ln/>
         </p:spPr>
         <p:txBody>
-          <a:bodyPr wrap="square" lIns="0" tIns="0" rIns="0" bIns="0" rtlCol="0" anchor="t"/>
+          <a:bodyPr wrap="none" lIns="0" tIns="0" rIns="0" bIns="0" rtlCol="0" anchor="t"/>
           <a:lstStyle/>
           <a:p>
             <a:pPr algn="l" indent="0" marL="0">
@@ -5936,7 +6000,7 @@
           <a:ln/>
         </p:spPr>
         <p:txBody>
-          <a:bodyPr wrap="square" lIns="0" tIns="0" rIns="0" bIns="0" rtlCol="0" anchor="t"/>
+          <a:bodyPr wrap="none" lIns="0" tIns="0" rIns="0" bIns="0" rtlCol="0" anchor="t"/>
           <a:lstStyle/>
           <a:p>
             <a:pPr algn="l" indent="0" marL="0">
@@ -5978,7 +6042,7 @@
           <a:ln/>
         </p:spPr>
         <p:txBody>
-          <a:bodyPr wrap="square" lIns="0" tIns="0" rIns="0" bIns="0" rtlCol="0" anchor="t"/>
+          <a:bodyPr wrap="none" lIns="0" tIns="0" rIns="0" bIns="0" rtlCol="0" anchor="t"/>
           <a:lstStyle/>
           <a:p>
             <a:pPr algn="l" indent="0" marL="0">
@@ -6052,7 +6116,7 @@
           <a:ln/>
         </p:spPr>
         <p:txBody>
-          <a:bodyPr wrap="square" lIns="0" tIns="0" rIns="0" bIns="0" rtlCol="0" anchor="t"/>
+          <a:bodyPr wrap="none" lIns="0" tIns="0" rIns="0" bIns="0" rtlCol="0" anchor="t"/>
           <a:lstStyle/>
           <a:p>
             <a:pPr algn="l" indent="0" marL="0">
@@ -6094,7 +6158,7 @@
           <a:ln/>
         </p:spPr>
         <p:txBody>
-          <a:bodyPr wrap="square" lIns="0" tIns="0" rIns="0" bIns="0" rtlCol="0" anchor="t"/>
+          <a:bodyPr wrap="none" lIns="0" tIns="0" rIns="0" bIns="0" rtlCol="0" anchor="t"/>
           <a:lstStyle/>
           <a:p>
             <a:pPr algn="l" indent="0" marL="0">
@@ -6136,7 +6200,7 @@
           <a:ln/>
         </p:spPr>
         <p:txBody>
-          <a:bodyPr wrap="square" lIns="0" tIns="0" rIns="0" bIns="0" rtlCol="0" anchor="t"/>
+          <a:bodyPr wrap="none" lIns="0" tIns="0" rIns="0" bIns="0" rtlCol="0" anchor="t"/>
           <a:lstStyle/>
           <a:p>
             <a:pPr algn="l" indent="0" marL="0">
@@ -6199,9 +6263,7 @@
                 <a:ea typeface="Source Serif 4" pitchFamily="34" charset="-122"/>
                 <a:cs typeface="Source Serif 4" pitchFamily="34" charset="-120"/>
               </a:rPr>
-              <a:t>What we
-need to
-</a:t>
+              <a:t>What we need to </a:t>
             </a:r>
             <a:pPr algn="l" indent="0" marL="0">
               <a:lnSpc>
@@ -6275,7 +6337,9 @@
           <a:ln/>
         </p:spPr>
         <p:txBody>
-          <a:bodyPr wrap="square" lIns="0" tIns="0" rIns="0" bIns="0" rtlCol="0" anchor="t"/>
+          <a:bodyPr wrap="square" lIns="0" tIns="0" rIns="0" bIns="0" rtlCol="0" anchor="t">
+            <a:normAutofit/>
+          </a:bodyPr>
           <a:lstStyle/>
           <a:p>
             <a:pPr algn="l" indent="0" marL="0">
@@ -6319,7 +6383,7 @@
                 <a:ea typeface="Inter" pitchFamily="34" charset="-122"/>
                 <a:cs typeface="Inter" pitchFamily="34" charset="-120"/>
               </a:rPr>
-              <a:t>        record someone actually reads, is what replaces it.</a:t>
+              <a:t>record someone actually reads, is what replaces it.</a:t>
             </a:r>
             <a:endParaRPr lang="en-US" sz="1866" dirty="0"/>
           </a:p>
@@ -6343,7 +6407,7 @@
           <a:ln/>
         </p:spPr>
         <p:txBody>
-          <a:bodyPr wrap="square" lIns="0" tIns="0" rIns="0" bIns="0" rtlCol="0" anchor="t"/>
+          <a:bodyPr wrap="none" lIns="0" tIns="0" rIns="0" bIns="0" rtlCol="0" anchor="t"/>
           <a:lstStyle/>
           <a:p>
             <a:pPr algn="l" indent="0" marL="0">
@@ -6392,6 +6456,10 @@
             <a:prstDash val="solid"/>
           </a:ln>
         </p:spPr>
+        <p:txBody>
+          <a:bodyPr/>
+          <a:p/>
+        </p:txBody>
       </p:sp>
       <p:sp>
         <p:nvSpPr>
@@ -6411,7 +6479,7 @@
           <a:ln/>
         </p:spPr>
         <p:txBody>
-          <a:bodyPr wrap="square" lIns="0" tIns="0" rIns="0" bIns="0" rtlCol="0" anchor="t"/>
+          <a:bodyPr wrap="none" lIns="0" tIns="0" rIns="0" bIns="0" rtlCol="0" anchor="t"/>
           <a:lstStyle/>
           <a:p>
             <a:pPr algn="l" indent="0" marL="0">
@@ -6453,7 +6521,9 @@
           <a:ln/>
         </p:spPr>
         <p:txBody>
-          <a:bodyPr wrap="square" lIns="0" tIns="0" rIns="0" bIns="0" rtlCol="0" anchor="t"/>
+          <a:bodyPr wrap="square" lIns="0" tIns="0" rIns="0" bIns="0" rtlCol="0" anchor="t">
+            <a:normAutofit/>
+          </a:bodyPr>
           <a:lstStyle/>
           <a:p>
             <a:pPr algn="l" indent="0" marL="0">
@@ -6497,7 +6567,7 @@
                 <a:ea typeface="Inter" pitchFamily="34" charset="-122"/>
                 <a:cs typeface="Inter" pitchFamily="34" charset="-120"/>
               </a:rPr>
-              <a:t>          is left?</a:t>
+              <a:t>is left?</a:t>
             </a:r>
             <a:endParaRPr lang="en-US" sz="2000" dirty="0"/>
           </a:p>
@@ -6525,6 +6595,10 @@
             <a:prstDash val="solid"/>
           </a:ln>
         </p:spPr>
+        <p:txBody>
+          <a:bodyPr/>
+          <a:p/>
+        </p:txBody>
       </p:sp>
       <p:sp>
         <p:nvSpPr>
@@ -6544,7 +6618,7 @@
           <a:ln/>
         </p:spPr>
         <p:txBody>
-          <a:bodyPr wrap="square" lIns="0" tIns="0" rIns="0" bIns="0" rtlCol="0" anchor="t"/>
+          <a:bodyPr wrap="none" lIns="0" tIns="0" rIns="0" bIns="0" rtlCol="0" anchor="t"/>
           <a:lstStyle/>
           <a:p>
             <a:pPr algn="l" indent="0" marL="0">
@@ -6586,7 +6660,9 @@
           <a:ln/>
         </p:spPr>
         <p:txBody>
-          <a:bodyPr wrap="square" lIns="0" tIns="0" rIns="0" bIns="0" rtlCol="0" anchor="t"/>
+          <a:bodyPr wrap="square" lIns="0" tIns="0" rIns="0" bIns="0" rtlCol="0" anchor="t">
+            <a:normAutofit/>
+          </a:bodyPr>
           <a:lstStyle/>
           <a:p>
             <a:pPr algn="l" indent="0" marL="0">
@@ -6630,7 +6706,7 @@
                 <a:ea typeface="Inter" pitchFamily="34" charset="-122"/>
                 <a:cs typeface="Inter" pitchFamily="34" charset="-120"/>
               </a:rPr>
-              <a:t>          incident?</a:t>
+              <a:t>incident?</a:t>
             </a:r>
             <a:endParaRPr lang="en-US" sz="2000" dirty="0"/>
           </a:p>
@@ -6658,6 +6734,10 @@
             <a:prstDash val="solid"/>
           </a:ln>
         </p:spPr>
+        <p:txBody>
+          <a:bodyPr/>
+          <a:p/>
+        </p:txBody>
       </p:sp>
       <p:sp>
         <p:nvSpPr>
@@ -6677,7 +6757,7 @@
           <a:ln/>
         </p:spPr>
         <p:txBody>
-          <a:bodyPr wrap="square" lIns="0" tIns="0" rIns="0" bIns="0" rtlCol="0" anchor="t"/>
+          <a:bodyPr wrap="none" lIns="0" tIns="0" rIns="0" bIns="0" rtlCol="0" anchor="t"/>
           <a:lstStyle/>
           <a:p>
             <a:pPr algn="l" indent="0" marL="0">
@@ -6719,7 +6799,9 @@
           <a:ln/>
         </p:spPr>
         <p:txBody>
-          <a:bodyPr wrap="square" lIns="0" tIns="0" rIns="0" bIns="0" rtlCol="0" anchor="t"/>
+          <a:bodyPr wrap="square" lIns="0" tIns="0" rIns="0" bIns="0" rtlCol="0" anchor="t">
+            <a:normAutofit/>
+          </a:bodyPr>
           <a:lstStyle/>
           <a:p>
             <a:pPr algn="l" indent="0" marL="0">
@@ -6764,7 +6846,7 @@
           <a:ln/>
         </p:spPr>
         <p:txBody>
-          <a:bodyPr wrap="square" lIns="0" tIns="0" rIns="0" bIns="0" rtlCol="0" anchor="t"/>
+          <a:bodyPr wrap="none" lIns="0" tIns="0" rIns="0" bIns="0" rtlCol="0" anchor="t"/>
           <a:lstStyle/>
           <a:p>
             <a:pPr algn="l" indent="0" marL="0">
@@ -6806,7 +6888,7 @@
           <a:ln/>
         </p:spPr>
         <p:txBody>
-          <a:bodyPr wrap="square" lIns="0" tIns="0" rIns="0" bIns="0" rtlCol="0" anchor="t"/>
+          <a:bodyPr wrap="none" lIns="0" tIns="0" rIns="0" bIns="0" rtlCol="0" anchor="t"/>
           <a:lstStyle/>
           <a:p>
             <a:pPr algn="l" indent="0" marL="0">

--- a/decks/prod-access/prod-access.pptx
+++ b/decks/prod-access/prod-access.pptx
@@ -3213,9 +3213,7 @@
           <a:ln/>
         </p:spPr>
         <p:txBody>
-          <a:bodyPr wrap="square" lIns="0" tIns="0" rIns="0" bIns="0" rtlCol="0" anchor="t">
-            <a:normAutofit/>
-          </a:bodyPr>
+          <a:bodyPr wrap="none" lIns="0" tIns="0" rIns="0" bIns="0" rtlCol="0" anchor="t"/>
           <a:lstStyle/>
           <a:p>
             <a:pPr algn="l" indent="0" marL="0">
@@ -3453,9 +3451,7 @@
           <a:ln/>
         </p:spPr>
         <p:txBody>
-          <a:bodyPr wrap="square" lIns="0" tIns="0" rIns="0" bIns="0" rtlCol="0" anchor="t">
-            <a:normAutofit/>
-          </a:bodyPr>
+          <a:bodyPr wrap="none" lIns="0" tIns="0" rIns="0" bIns="0" rtlCol="0" anchor="t"/>
           <a:lstStyle/>
           <a:p>
             <a:pPr algn="l" indent="0" marL="0">
@@ -3693,9 +3689,7 @@
           <a:ln/>
         </p:spPr>
         <p:txBody>
-          <a:bodyPr wrap="square" lIns="0" tIns="0" rIns="0" bIns="0" rtlCol="0" anchor="t">
-            <a:normAutofit/>
-          </a:bodyPr>
+          <a:bodyPr wrap="none" lIns="0" tIns="0" rIns="0" bIns="0" rtlCol="0" anchor="t"/>
           <a:lstStyle/>
           <a:p>
             <a:pPr algn="l" indent="0" marL="0">
@@ -5247,9 +5241,7 @@
           <a:ln/>
         </p:spPr>
         <p:txBody>
-          <a:bodyPr wrap="square" lIns="0" tIns="0" rIns="0" bIns="0" rtlCol="0" anchor="t">
-            <a:normAutofit/>
-          </a:bodyPr>
+          <a:bodyPr wrap="none" lIns="0" tIns="0" rIns="0" bIns="0" rtlCol="0" anchor="t"/>
           <a:lstStyle/>
           <a:p>
             <a:pPr algn="l" indent="0" marL="0">
@@ -5497,9 +5489,7 @@
           <a:ln/>
         </p:spPr>
         <p:txBody>
-          <a:bodyPr wrap="square" lIns="0" tIns="0" rIns="0" bIns="0" rtlCol="0" anchor="t">
-            <a:normAutofit/>
-          </a:bodyPr>
+          <a:bodyPr wrap="none" lIns="0" tIns="0" rIns="0" bIns="0" rtlCol="0" anchor="t"/>
           <a:lstStyle/>
           <a:p>
             <a:pPr algn="l" indent="0" marL="0">
@@ -5767,9 +5757,7 @@
           <a:ln/>
         </p:spPr>
         <p:txBody>
-          <a:bodyPr wrap="square" lIns="0" tIns="0" rIns="0" bIns="0" rtlCol="0" anchor="t">
-            <a:normAutofit/>
-          </a:bodyPr>
+          <a:bodyPr wrap="none" lIns="0" tIns="0" rIns="0" bIns="0" rtlCol="0" anchor="t"/>
           <a:lstStyle/>
           <a:p>
             <a:pPr algn="l" indent="0" marL="0">
@@ -6242,7 +6230,7 @@
           <a:ln/>
         </p:spPr>
         <p:txBody>
-          <a:bodyPr wrap="square" lIns="0" tIns="0" rIns="0" bIns="0" rtlCol="0" anchor="t"/>
+          <a:bodyPr wrap="none" lIns="0" tIns="0" rIns="0" bIns="0" rtlCol="0" anchor="t"/>
           <a:lstStyle/>
           <a:p>
             <a:pPr algn="l" indent="0" marL="0">
